--- a/part2-豐兆/20260819仰望研習主講_從零打造社團管理系統_游豐兆.pptx
+++ b/part2-豐兆/20260819仰望研習主講_從零打造社團管理系統_游豐兆.pptx
@@ -1916,7 +1916,7 @@
           </a:p>
           <a:p>
             <a:r>
-              <a:t>這正是今天教的「一個做、一個挑錯、人拍板」，只是放大到兩個人的規模。而且這個形狀你們回學校就用得上：兩位老師合帶一個社團，或者一位老師配一位行政——不用學任何工程師的東西，重點只有一句：東西放同一個地方，誰改了什麼看得到。想看的老師，網址在畫面下方，整個倉庫是公開的。</a:t>
+              <a:t>這正是今天教的「一個做、一個挑錯、人拍板」，只是放大到兩個人的規模。而且這個形狀你們回學校就用得上：兩位老師合帶一個社團，或者一位老師配一位行政——不用學任何工程師的東西，重點只有一句：東西放同一個地方，誰改了什麼看得到。想看倉庫紀錄的老師，現場我直接投影給大家看，網址在畫面下方。</a:t>
             </a:r>
           </a:p>
         </p:txBody>

--- a/part2-豐兆/20260819仰望研習主講_從零打造社團管理系統_游豐兆.pptx
+++ b/part2-豐兆/20260819仰望研習主講_從零打造社團管理系統_游豐兆.pptx
@@ -30,6 +30,7 @@
     <p:sldId id="278" r:id="rId30"/>
     <p:sldId id="279" r:id="rId31"/>
     <p:sldId id="280" r:id="rId32"/>
+    <p:sldId id="281" r:id="rId33"/>
   </p:sldIdLst>
   <p:sldSz cx="12191695" cy="6858000" type="screen4x3"/>
   <p:notesSz cx="6858000" cy="9144000"/>
@@ -606,7 +607,7 @@
           </a:p>
           <a:p>
             <a:r>
-              <a:t>【開場口播（1分鐘）】現在打開 Antigravity。這是今天第一次花它的額度，值得。左邊卡片二複製過去，中間那個括號，把剛才 ChatGPT 給你的最終版規格整段貼進去。最下面記得改成你自己的資料夾路徑，最簡單就是桌面。送出，然後讓它跑，大概一到三分鐘。</a:t>
+              <a:t>【開場口播（1分鐘）】現在打開 Antigravity。這是今天第一次花它的額度，值得。左邊卡片二複製過去，中間那個括號，把剛才 ChatGPT 給你的最終版規格整段貼進去。存檔位置那句不用改——它會存到 Antigravity 現在開著的資料夾根目錄，不必貼任何路徑。送出，然後讓它跑，大概一到三分鐘。</a:t>
             </a:r>
           </a:p>
           <a:p>
@@ -1826,12 +1827,7 @@
           </a:p>
           <a:p>
             <a:r>
-              <a:t>清點行李。第一，你們學校專屬版的系統加上備份檔，網址也在投影片上，回去重新下載永遠拿得到。第二，兩份你自己做的文件，回饋單和你挑的那份表單，都驗收過了。第三，五張提示詞卡，從出規格、做檔案、萬用模板、寫圖說到驗收，一整套流程的口令都在裡面，共用資料夾有純文字版，複製就能用。第四，兩個參考資源：北濱國小的完整結案報告在臺師大科教中心網站上公開，六班小校、處境跟各位很像，寫報告前看一遍很值得；東華的全民科學週教案庫有一百多份花蓮在地老師寫的教案，備課素材直接拿。</a:t>
-            </a:r>
-          </a:p>
-          <a:p>
-            <a:r>
-              <a:t>還有一個機會順便廣告：二〇二七全民科學週教案徵選，九月二十號截止，入選一案兩千元。你今天下午做的教案，回去打磨一下，一個月後剛好投出去。</a:t>
+              <a:t>清點行李。第一，你們學校專屬版的系統加上備份檔，網址也在投影片上，回去重新下載永遠拿得到。第二，兩份你自己做的文件，回饋單和你挑的那份表單，都驗收過了。第三，五張提示詞卡，從出規格、做檔案、萬用模板、寫圖說到驗收，一整套流程的口令都在裡面，共用資料夾有純文字版，複製就能用。第四，參考資源和投稿機會——名額、義務、網址下一頁專頁講，這裡先不展開。</a:t>
             </a:r>
           </a:p>
         </p:txBody>
@@ -1901,22 +1897,22 @@
           <a:lstStyle/>
           <a:p>
             <a:r>
-              <a:t>時間：11:57 前後（2分鐘）</a:t>
-            </a:r>
-          </a:p>
-          <a:p>
-            <a:r>
-              <a:t>最後想給大家看一個幕後花絮，因為它本身就是一堂課。你們今天用的這套教材和系統，是我和文盛老師「兩個人、各自帶自己的 AI」一起做出來的。</a:t>
-            </a:r>
-          </a:p>
-          <a:p>
-            <a:r>
-              <a:t>流程長這樣：文盛老師的 AI 先實測我做的系統，開出二十九條改善工單——注意，其中九條被「人」推翻了，AI 說的我們沒有照單全收。然後我的 AI 逐條認領、動手修，每一條都要照工單上的驗收判準實測通過才算數。最後兩個人各自把關，所有紀錄都留在同一個 GitHub 倉庫裡：這一條是誰提的、誰改的、改之前長什麼樣，全部查得到。</a:t>
-            </a:r>
-          </a:p>
-          <a:p>
-            <a:r>
-              <a:t>這正是今天教的「一個做、一個挑錯、人拍板」，只是放大到兩個人的規模。而且這個形狀你們回學校就用得上：兩位老師合帶一個社團，或者一位老師配一位行政——不用學任何工程師的東西，重點只有一句：東西放同一個地方，誰改了什麼看得到。想看倉庫紀錄的老師，現場我直接投影給大家看，網址在畫面下方。</a:t>
+              <a:t>時間：11:55 前後（併入帶得走，約2分鐘）</a:t>
+            </a:r>
+          </a:p>
+          <a:p>
+            <a:r>
+              <a:t>上一頁第四樣東西展開講。教案徵選：九月二十號星期日截止，國小組六名、國中高中組六名，不限花蓮的老師。入選的給付是三擇一：兩千元獎金、縣府敘獎、或縣府獎狀。要先講清楚義務：入選的作者至少一位要在十二月的種子教師研習營擔任講師，並協助拍一支教案說明影片——講師費另外給，但沒有代課費，請大家評估時間再投。</a:t>
+            </a:r>
+          </a:p>
+          <a:p>
+            <a:r>
+              <a:t>要投的不是今天做的這些管理文件，是另外一份「兩節課加十分鐘闖關版」的實驗教案，用官方 C03 表格填。特別說一件事：C03 的「教案來源」欄位有一格就叫「AI 協作」，官方明講可以用 AI，只要附上協作舉證——你今天學的三段提示詞加驗收口訣，直接就是那份舉證。表格和範本都在畫面上那個雲端資料夾。</a:t>
+            </a:r>
+          </a:p>
+          <a:p>
+            <a:r>
+              <a:t>右邊兩個資源：北濱國小的期末報告，六班小校、處境跟各位很像，值得學的是它怎麼寫失敗與轉折——第七頁那個百合珠芽的案例就出自這份；但注意，報告「格式」一律以仰望的成果報告書範本為準，別照抄它的格式。東華在地教案庫收了 2015 到 2026 歷年花蓮老師寫的教案，免登入、公開，備課素材直接拿。</a:t>
             </a:r>
           </a:p>
         </p:txBody>
@@ -1986,32 +1982,22 @@
           <a:lstStyle/>
           <a:p>
             <a:r>
-              <a:t>時間：11:57-11:59（2分鐘）</a:t>
-            </a:r>
-          </a:p>
-          <a:p>
-            <a:r>
-              <a:t>今天學的東西，一個禮拜不用就會生疏，所以回學校第一週只拜託三件事，都很小。</a:t>
-            </a:r>
-          </a:p>
-          <a:p>
-            <a:r>
-              <a:t>第一，把回饋單印三十份，放進社團資料夾。開學第一堂課就發一次，讓學生習慣這張單子，期末再發一次，前後對照，你的四個百分比就有故事可說。</a:t>
-            </a:r>
-          </a:p>
-          <a:p>
-            <a:r>
-              <a:t>第二，拿到正式的社團名單，就貼進系統。第一週上完課，點名，順手把材料費登進去。只要第一週有做，後面每週就是三十秒的事。</a:t>
-            </a:r>
-          </a:p>
-          <a:p>
-            <a:r>
-              <a:t>第三，拿著三個地雷那一頁去找出納，聊十分鐘，確認校內的請購單格式怎麼跟系統的紀錄對起來。出納是你核銷路上最重要的盟友，先把規則對齊，之後一路順。</a:t>
-            </a:r>
-          </a:p>
-          <a:p>
-            <a:r>
-              <a:t>這三件做完，我可以跟你保證：明年六月的成果報告，你已經寫完一半了。</a:t>
+              <a:t>時間：11:57 前後（2分鐘）</a:t>
+            </a:r>
+          </a:p>
+          <a:p>
+            <a:r>
+              <a:t>最後想給大家看一個幕後花絮，因為它本身就是一堂課。你們今天用的這套教材和系統，是我和文盛老師「兩個人、各自帶自己的 AI」一起做出來的。</a:t>
+            </a:r>
+          </a:p>
+          <a:p>
+            <a:r>
+              <a:t>流程長這樣：文盛老師的 AI 先實測我做的系統，開出二十九條改善工單——注意，其中九條被「人」推翻了，AI 說的我們沒有照單全收。然後我的 AI 逐條認領、動手修，每一條都要照工單上的驗收判準實測通過才算數。最後兩個人各自把關，所有紀錄都留在同一個 GitHub 倉庫裡：這一條是誰提的、誰改的、改之前長什麼樣，全部查得到。</a:t>
+            </a:r>
+          </a:p>
+          <a:p>
+            <a:r>
+              <a:t>這正是今天教的「一個做、一個挑錯、人拍板」，只是放大到兩個人的規模。而且這個形狀你們回學校就用得上：兩位老師合帶一個社團，或者一位老師配一位行政——不用學任何工程師的東西，重點只有一句：東西放同一個地方，誰改了什麼看得到。想看倉庫紀錄的老師，現場我直接投影給大家看，網址在畫面下方。</a:t>
             </a:r>
           </a:p>
         </p:txBody>
@@ -2081,6 +2067,106 @@
           <a:lstStyle/>
           <a:p>
             <a:r>
+              <a:t>時間：11:57-11:59（2分鐘）</a:t>
+            </a:r>
+          </a:p>
+          <a:p>
+            <a:r>
+              <a:t>今天學的東西，一個禮拜不用就會生疏，所以回學校第一週只拜託四件事，都很小。</a:t>
+            </a:r>
+          </a:p>
+          <a:p>
+            <a:r>
+              <a:t>第一，把回饋單印三十份，放進社團資料夾。注意時點：學期初的工作是「準備好」，發放是期末最後一兩堂課，發下去、當場收回，回收率才高。</a:t>
+            </a:r>
+          </a:p>
+          <a:p>
+            <a:r>
+              <a:t>第二，拿到正式的社團名單，就貼進系統。第一週上完課，點名，順手把材料費登進去。只要第一週有做，後面每週就是三十秒的事。</a:t>
+            </a:r>
+          </a:p>
+          <a:p>
+            <a:r>
+              <a:t>第三，拿著三個地雷那一頁去找出納，聊十分鐘，確認校內的請購單格式怎麼跟系統的紀錄對起來。出納是你核銷路上最重要的盟友，先把規則對齊，之後一路順。</a:t>
+            </a:r>
+          </a:p>
+          <a:p>
+            <a:r>
+              <a:t>第四，照片的事：去問學校那份既有的個資同意書，利用範圍有沒有涵蓋「提供給校外單位作成果報告」。有涵蓋，記一筆備查就好；沒涵蓋，隨社團報名表補發一張。沒收到回條的孩子，拍背影或手部特寫，一樣能交差。</a:t>
+            </a:r>
+          </a:p>
+          <a:p>
+            <a:r>
+              <a:t>最下面那行紅字也唸一次：電腦要送修、要還、要借人，先匯出備份、再清除全部資料——名單存在瀏覽器裡，光刪 HTML 檔是刪不掉的。這四件做完，明年六月的成果報告，你已經寫完一半了。</a:t>
+            </a:r>
+          </a:p>
+        </p:txBody>
+      </p:sp>
+      <p:sp>
+        <p:nvSpPr>
+          <p:cNvPr id="4" name="Slide Number Placeholder 3"/>
+          <p:cNvSpPr>
+            <a:spLocks noGrp="1"/>
+          </p:cNvSpPr>
+          <p:nvPr>
+            <p:ph type="sldNum" idx="5" sz="quarter"/>
+          </p:nvPr>
+        </p:nvSpPr>
+        <p:spPr/>
+      </p:sp>
+    </p:spTree>
+  </p:cSld>
+  <p:clrMapOvr>
+    <a:masterClrMapping/>
+  </p:clrMapOvr>
+</p:notes>
+</file>
+
+<file path=ppt/notesSlides/notesSlide26.xml><?xml version="1.0" encoding="utf-8"?>
+<p:notes xmlns:a="http://schemas.openxmlformats.org/drawingml/2006/main" xmlns:p="http://schemas.openxmlformats.org/presentationml/2006/main" xmlns:r="http://schemas.openxmlformats.org/officeDocument/2006/relationships">
+  <p:cSld>
+    <p:spTree>
+      <p:nvGrpSpPr>
+        <p:cNvPr id="1" name=""/>
+        <p:cNvGrpSpPr/>
+        <p:nvPr/>
+      </p:nvGrpSpPr>
+      <p:grpSpPr>
+        <a:xfrm>
+          <a:off x="0" y="0"/>
+          <a:ext cx="0" cy="0"/>
+          <a:chOff x="0" y="0"/>
+          <a:chExt cx="0" cy="0"/>
+        </a:xfrm>
+      </p:grpSpPr>
+      <p:sp>
+        <p:nvSpPr>
+          <p:cNvPr id="2" name="Slide Image Placeholder 1"/>
+          <p:cNvSpPr>
+            <a:spLocks noGrp="1"/>
+          </p:cNvSpPr>
+          <p:nvPr>
+            <p:ph type="sldImg" idx="2"/>
+          </p:nvPr>
+        </p:nvSpPr>
+        <p:spPr/>
+      </p:sp>
+      <p:sp>
+        <p:nvSpPr>
+          <p:cNvPr id="3" name="Notes Placeholder 2"/>
+          <p:cNvSpPr>
+            <a:spLocks noGrp="1"/>
+          </p:cNvSpPr>
+          <p:nvPr>
+            <p:ph type="body" idx="3" sz="quarter"/>
+          </p:nvPr>
+        </p:nvSpPr>
+        <p:spPr/>
+        <p:txBody>
+          <a:bodyPr/>
+          <a:lstStyle/>
+          <a:p>
+            <a:r>
               <a:t>時間：11:59-12:00（1分鐘）</a:t>
             </a:r>
           </a:p>
@@ -2266,7 +2352,7 @@
           </a:p>
           <a:p>
             <a:r>
-              <a:t>重點是這句話：回饋單不是期末才補的附件。如果九月開學的時候沒把題目設計好、沒發下去，明年六月要寫報告的那一刻，這四個數字是生不出來的，而且補不回來。你總不能叫學生回想十個月前的感覺。</a:t>
+              <a:t>重點是這句話：回饋單不是期末才想的附件。如果學期初沒把題目和紀錄方式準備好，明年六月要寫報告的那一刻，這四個數字是生不出來的，而且補不回來。發放的時點是期末最後一兩堂課，發下去、當場收回；學期初的工作是把單子準備好、放進社團資料夾。</a:t>
             </a:r>
           </a:p>
           <a:p>
@@ -7044,7 +7130,7 @@
                 <a:latin typeface="Microsoft JhengHei"/>
                 <a:ea typeface="Microsoft JhengHei"/>
               </a:rPr>
-              <a:t>請把檔案存到：（貼上你自己的資料夾完整路徑，例如 C:\Users\你\Desktop）</a:t>
+              <a:t>請把檔案存到我現在開著的這個資料夾的根目錄。</a:t>
             </a:r>
           </a:p>
           <a:p>
@@ -7362,7 +7448,7 @@
                 <a:latin typeface="Microsoft JhengHei"/>
                 <a:ea typeface="Microsoft JhengHei"/>
               </a:rPr>
-              <a:t>10 / 25</a:t>
+              <a:t>10 / 26</a:t>
             </a:r>
           </a:p>
         </p:txBody>
@@ -8382,7 +8468,7 @@
                 <a:latin typeface="Microsoft JhengHei"/>
                 <a:ea typeface="Microsoft JhengHei"/>
               </a:rPr>
-              <a:t>11 / 25</a:t>
+              <a:t>11 / 26</a:t>
             </a:r>
           </a:p>
         </p:txBody>
@@ -9210,7 +9296,7 @@
                 <a:latin typeface="Microsoft JhengHei"/>
                 <a:ea typeface="Microsoft JhengHei"/>
               </a:rPr>
-              <a:t>12 / 25</a:t>
+              <a:t>12 / 26</a:t>
             </a:r>
           </a:p>
         </p:txBody>
@@ -10290,7 +10376,7 @@
                 <a:latin typeface="Microsoft JhengHei"/>
                 <a:ea typeface="Microsoft JhengHei"/>
               </a:rPr>
-              <a:t>13 / 25</a:t>
+              <a:t>13 / 26</a:t>
             </a:r>
           </a:p>
         </p:txBody>
@@ -11133,7 +11219,7 @@
                 <a:latin typeface="Microsoft JhengHei"/>
                 <a:ea typeface="Microsoft JhengHei"/>
               </a:rPr>
-              <a:t>14 / 25</a:t>
+              <a:t>14 / 26</a:t>
             </a:r>
           </a:p>
         </p:txBody>
@@ -12294,7 +12380,7 @@
                 <a:latin typeface="Microsoft JhengHei"/>
                 <a:ea typeface="Microsoft JhengHei"/>
               </a:rPr>
-              <a:t>15 / 25</a:t>
+              <a:t>15 / 26</a:t>
             </a:r>
           </a:p>
         </p:txBody>
@@ -13365,7 +13451,7 @@
                 <a:latin typeface="Microsoft JhengHei"/>
                 <a:ea typeface="Microsoft JhengHei"/>
               </a:rPr>
-              <a:t>16 / 25</a:t>
+              <a:t>16 / 26</a:t>
             </a:r>
           </a:p>
         </p:txBody>
@@ -13969,7 +14055,7 @@
                 <a:latin typeface="Microsoft JhengHei"/>
                 <a:ea typeface="Microsoft JhengHei"/>
               </a:rPr>
-              <a:t>存到：（你的資料夾路徑）。做完告訴我檔案在哪。</a:t>
+              <a:t>存到我現在開著的這個資料夾的根目錄。做完告訴我檔案在哪。</a:t>
             </a:r>
           </a:p>
         </p:txBody>
@@ -14267,7 +14353,7 @@
                 <a:latin typeface="Microsoft JhengHei"/>
                 <a:ea typeface="Microsoft JhengHei"/>
               </a:rPr>
-              <a:t>17 / 25</a:t>
+              <a:t>17 / 26</a:t>
             </a:r>
           </a:p>
         </p:txBody>
@@ -15003,7 +15089,7 @@
                 <a:latin typeface="Microsoft JhengHei"/>
                 <a:ea typeface="Microsoft JhengHei"/>
               </a:rPr>
-              <a:t>18 / 25</a:t>
+              <a:t>18 / 26</a:t>
             </a:r>
           </a:p>
         </p:txBody>
@@ -16127,7 +16213,7 @@
                 <a:latin typeface="Microsoft JhengHei"/>
                 <a:ea typeface="Microsoft JhengHei"/>
               </a:rPr>
-              <a:t>19 / 25</a:t>
+              <a:t>19 / 26</a:t>
             </a:r>
           </a:p>
         </p:txBody>
@@ -17418,7 +17504,7 @@
                 <a:latin typeface="Microsoft JhengHei"/>
                 <a:ea typeface="Microsoft JhengHei"/>
               </a:rPr>
-              <a:t>2 / 25</a:t>
+              <a:t>2 / 26</a:t>
             </a:r>
           </a:p>
         </p:txBody>
@@ -18641,7 +18727,7 @@
                 <a:latin typeface="Microsoft JhengHei"/>
                 <a:ea typeface="Microsoft JhengHei"/>
               </a:rPr>
-              <a:t>20 / 25</a:t>
+              <a:t>20 / 26</a:t>
             </a:r>
           </a:p>
         </p:txBody>
@@ -19543,7 +19629,7 @@
                 <a:latin typeface="Microsoft JhengHei"/>
                 <a:ea typeface="Microsoft JhengHei"/>
               </a:rPr>
-              <a:t>21 / 25</a:t>
+              <a:t>21 / 26</a:t>
             </a:r>
           </a:p>
         </p:txBody>
@@ -20432,7 +20518,7 @@
                 <a:latin typeface="Microsoft JhengHei"/>
                 <a:ea typeface="Microsoft JhengHei"/>
               </a:rPr>
-              <a:t>參考資源＋投稿</a:t>
+              <a:t>參考資源＋投稿機會</a:t>
             </a:r>
           </a:p>
         </p:txBody>
@@ -20475,7 +20561,7 @@
                 <a:latin typeface="Microsoft JhengHei"/>
                 <a:ea typeface="Microsoft JhengHei"/>
               </a:rPr>
-              <a:t>北濱國小公開報告、東華教案庫；9/20 教案徵選一案 2,000 元</a:t>
+              <a:t>北濱國小期末報告、東華在地教案庫、9/20 教案徵選——名額、義務與網址見下一頁</a:t>
             </a:r>
           </a:p>
         </p:txBody>
@@ -20585,7 +20671,7 @@
                 <a:latin typeface="Microsoft JhengHei"/>
                 <a:ea typeface="Microsoft JhengHei"/>
               </a:rPr>
-              <a:t>22 / 25</a:t>
+              <a:t>22 / 26</a:t>
             </a:r>
           </a:p>
         </p:txBody>
@@ -20690,7 +20776,7 @@
                 <a:latin typeface="Microsoft JhengHei"/>
                 <a:ea typeface="Microsoft JhengHei"/>
               </a:rPr>
-              <a:t>22 / CO-CREATION</a:t>
+              <a:t>22 / OPPORTUNITY</a:t>
             </a:r>
           </a:p>
         </p:txBody>
@@ -20733,7 +20819,7 @@
                 <a:latin typeface="Microsoft JhengHei"/>
                 <a:ea typeface="Microsoft JhengHei"/>
               </a:rPr>
-              <a:t>這套教材，就是兩個人×兩個 AI 一起做出來的</a:t>
+              <a:t>9/20 教案徵選＋兩個參考資源</a:t>
             </a:r>
           </a:p>
         </p:txBody>
@@ -20776,7 +20862,7 @@
                 <a:latin typeface="Microsoft JhengHei"/>
                 <a:ea typeface="Microsoft JhengHei"/>
               </a:rPr>
-              <a:t>8/19 的另一堂示範課：AI 協作不是一個人的事</a:t>
+              <a:t>2027 第十三屆「北花蓮」全民科學週教案徵選</a:t>
             </a:r>
           </a:p>
         </p:txBody>
@@ -20789,8 +20875,8 @@
         </p:nvSpPr>
         <p:spPr>
           <a:xfrm>
-            <a:off x="685800" y="1828800"/>
-            <a:ext cx="3520440" cy="2651760"/>
+            <a:off x="685800" y="1783080"/>
+            <a:ext cx="6035040" cy="4206240"/>
           </a:xfrm>
           <a:prstGeom prst="roundRect">
             <a:avLst>
@@ -20829,69 +20915,14 @@
       </p:sp>
       <p:sp>
         <p:nvSpPr>
-          <p:cNvPr id="7" name="Rounded Rectangle 6"/>
-          <p:cNvSpPr/>
-          <p:nvPr/>
-        </p:nvSpPr>
-        <p:spPr>
-          <a:xfrm>
-            <a:off x="914400" y="2057400"/>
-            <a:ext cx="3063240" cy="457200"/>
-          </a:xfrm>
-          <a:prstGeom prst="roundRect">
-            <a:avLst>
-              <a:gd name="adj" fmla="val 30000"/>
-            </a:avLst>
-          </a:prstGeom>
-          <a:solidFill>
-            <a:srgbClr val="1C7293"/>
-          </a:solidFill>
-          <a:ln>
-            <a:noFill/>
-          </a:ln>
-          <a:effectLst/>
-        </p:spPr>
-        <p:style>
-          <a:lnRef idx="1">
-            <a:schemeClr val="accent1"/>
-          </a:lnRef>
-          <a:fillRef idx="3">
-            <a:schemeClr val="accent1"/>
-          </a:fillRef>
-          <a:effectRef idx="2">
-            <a:schemeClr val="accent1"/>
-          </a:effectRef>
-          <a:fontRef idx="minor">
-            <a:schemeClr val="lt1"/>
-          </a:fontRef>
-        </p:style>
-        <p:txBody>
-          <a:bodyPr rtlCol="0" anchor="ctr" lIns="0" rIns="0"/>
-          <a:lstStyle/>
-          <a:p>
-            <a:pPr algn="ctr"/>
-            <a:r>
-              <a:rPr sz="1500" b="1">
-                <a:solidFill>
-                  <a:srgbClr val="FFFFFF"/>
-                </a:solidFill>
-                <a:latin typeface="Microsoft JhengHei"/>
-              </a:rPr>
-              <a:t>文盛老師的 AI</a:t>
-            </a:r>
-          </a:p>
-        </p:txBody>
-      </p:sp>
-      <p:sp>
-        <p:nvSpPr>
-          <p:cNvPr id="8" name="TextBox 7"/>
+          <p:cNvPr id="7" name="TextBox 6"/>
           <p:cNvSpPr txBox="1"/>
           <p:nvPr/>
         </p:nvSpPr>
         <p:spPr>
           <a:xfrm>
-            <a:off x="914400" y="2697480"/>
-            <a:ext cx="3063240" cy="1645920"/>
+            <a:off x="960120" y="1965960"/>
+            <a:ext cx="5486400" cy="411480"/>
           </a:xfrm>
           <a:prstGeom prst="rect">
             <a:avLst/>
@@ -20906,79 +20937,178 @@
           <a:p>
             <a:pPr algn="l">
               <a:lnSpc>
-                <a:spcPct val="130000"/>
-              </a:lnSpc>
-              <a:spcAft>
-                <a:spcPts val="400"/>
-              </a:spcAft>
-            </a:pPr>
-            <a:r>
-              <a:rPr sz="1350" b="0" i="0" lang="zh-TW">
+                <a:spcPct val="115000"/>
+              </a:lnSpc>
+              <a:spcAft>
+                <a:spcPts val="400"/>
+              </a:spcAft>
+            </a:pPr>
+            <a:r>
+              <a:rPr sz="1600" b="1" i="0" lang="zh-TW">
+                <a:solidFill>
+                  <a:srgbClr val="C99A3E"/>
+                </a:solidFill>
+                <a:latin typeface="Microsoft JhengHei"/>
+                <a:ea typeface="Microsoft JhengHei"/>
+              </a:rPr>
+              <a:t>教案徵選（9/20（日）截止）</a:t>
+            </a:r>
+          </a:p>
+        </p:txBody>
+      </p:sp>
+      <p:sp>
+        <p:nvSpPr>
+          <p:cNvPr id="8" name="TextBox 7"/>
+          <p:cNvSpPr txBox="1"/>
+          <p:nvPr/>
+        </p:nvSpPr>
+        <p:spPr>
+          <a:xfrm>
+            <a:off x="960120" y="2468880"/>
+            <a:ext cx="5486400" cy="3383280"/>
+          </a:xfrm>
+          <a:prstGeom prst="rect">
+            <a:avLst/>
+          </a:prstGeom>
+          <a:noFill/>
+        </p:spPr>
+        <p:txBody>
+          <a:bodyPr wrap="square" anchor="t" lIns="0" rIns="0" tIns="0" bIns="0">
+            <a:spAutoFit/>
+          </a:bodyPr>
+          <a:lstStyle/>
+          <a:p>
+            <a:pPr algn="l">
+              <a:lnSpc>
+                <a:spcPct val="135000"/>
+              </a:lnSpc>
+              <a:spcAft>
+                <a:spcPts val="400"/>
+              </a:spcAft>
+            </a:pPr>
+            <a:r>
+              <a:rPr sz="1300" b="0" i="0" lang="zh-TW">
                 <a:solidFill>
                   <a:srgbClr val="1E293B"/>
                 </a:solidFill>
                 <a:latin typeface="Microsoft JhengHei"/>
                 <a:ea typeface="Microsoft JhengHei"/>
               </a:rPr>
-              <a:t>實測審查我方做的系統與簡報，開出 29 條改善工單——其中 9 條被「人」推翻，沒有照單全收</a:t>
-            </a:r>
-          </a:p>
-        </p:txBody>
-      </p:sp>
-      <p:sp>
-        <p:nvSpPr>
-          <p:cNvPr id="9" name="Right Arrow 8"/>
+              <a:t>・名額：國小組 6 名、國中高中組 6 名（不限花蓮教師）</a:t>
+            </a:r>
+          </a:p>
+          <a:p>
+            <a:pPr algn="l">
+              <a:lnSpc>
+                <a:spcPct val="135000"/>
+              </a:lnSpc>
+              <a:spcAft>
+                <a:spcPts val="400"/>
+              </a:spcAft>
+            </a:pPr>
+            <a:r>
+              <a:rPr sz="1300" b="0" i="0" lang="zh-TW">
+                <a:solidFill>
+                  <a:srgbClr val="1E293B"/>
+                </a:solidFill>
+                <a:latin typeface="Microsoft JhengHei"/>
+                <a:ea typeface="Microsoft JhengHei"/>
+              </a:rPr>
+              <a:t>・入選三擇一：獎金 2,000 元／縣府敘獎／縣府獎狀</a:t>
+            </a:r>
+          </a:p>
+          <a:p>
+            <a:pPr algn="l">
+              <a:lnSpc>
+                <a:spcPct val="135000"/>
+              </a:lnSpc>
+              <a:spcAft>
+                <a:spcPts val="400"/>
+              </a:spcAft>
+            </a:pPr>
+            <a:r>
+              <a:rPr sz="1300" b="0" i="0" lang="zh-TW">
+                <a:solidFill>
+                  <a:srgbClr val="1E293B"/>
+                </a:solidFill>
+                <a:latin typeface="Microsoft JhengHei"/>
+                <a:ea typeface="Microsoft JhengHei"/>
+              </a:rPr>
+              <a:t>・入選義務：12 月種子教師研習營擔任講師＋協助拍教案說明影片（講師費另給、無代課費）</a:t>
+            </a:r>
+          </a:p>
+          <a:p>
+            <a:pPr algn="l">
+              <a:lnSpc>
+                <a:spcPct val="135000"/>
+              </a:lnSpc>
+              <a:spcAft>
+                <a:spcPts val="400"/>
+              </a:spcAft>
+            </a:pPr>
+            <a:r>
+              <a:rPr sz="1300" b="0" i="0" lang="zh-TW">
+                <a:solidFill>
+                  <a:srgbClr val="1E293B"/>
+                </a:solidFill>
+                <a:latin typeface="Microsoft JhengHei"/>
+                <a:ea typeface="Microsoft JhengHei"/>
+              </a:rPr>
+              <a:t>・投稿標的：另外一份「2 節課＋10 分鐘闖關版」實驗教案，用官方 C03 表格填</a:t>
+            </a:r>
+          </a:p>
+          <a:p>
+            <a:pPr algn="l">
+              <a:lnSpc>
+                <a:spcPct val="135000"/>
+              </a:lnSpc>
+              <a:spcAft>
+                <a:spcPts val="400"/>
+              </a:spcAft>
+            </a:pPr>
+            <a:r>
+              <a:rPr sz="1300" b="0" i="0" lang="zh-TW">
+                <a:solidFill>
+                  <a:srgbClr val="1E293B"/>
+                </a:solidFill>
+                <a:latin typeface="Microsoft JhengHei"/>
+                <a:ea typeface="Microsoft JhengHei"/>
+              </a:rPr>
+              <a:t>・C03 的「教案來源」有一格叫「AI 協作」——官方明講可以，附上協作舉證即可；今天學的三段提示詞＋驗收口訣，就是那份舉證</a:t>
+            </a:r>
+          </a:p>
+          <a:p>
+            <a:pPr algn="l">
+              <a:lnSpc>
+                <a:spcPct val="135000"/>
+              </a:lnSpc>
+              <a:spcAft>
+                <a:spcPts val="400"/>
+              </a:spcAft>
+            </a:pPr>
+            <a:r>
+              <a:rPr sz="1300" b="0" i="0" lang="zh-TW">
+                <a:solidFill>
+                  <a:srgbClr val="1E293B"/>
+                </a:solidFill>
+                <a:latin typeface="Microsoft JhengHei"/>
+                <a:ea typeface="Microsoft JhengHei"/>
+              </a:rPr>
+              <a:t>・C01/C02/C03 與範本：drive.google.com/drive/folders/1r8chsD3wRO_v_CXfxe0QyK9yTobaUOhH</a:t>
+            </a:r>
+          </a:p>
+        </p:txBody>
+      </p:sp>
+      <p:sp>
+        <p:nvSpPr>
+          <p:cNvPr id="9" name="Rounded Rectangle 8"/>
           <p:cNvSpPr/>
           <p:nvPr/>
         </p:nvSpPr>
         <p:spPr>
           <a:xfrm>
-            <a:off x="4224528" y="2926080"/>
-            <a:ext cx="274320" cy="274320"/>
-          </a:xfrm>
-          <a:prstGeom prst="rightArrow">
-            <a:avLst/>
-          </a:prstGeom>
-          <a:solidFill>
-            <a:srgbClr val="64748B"/>
-          </a:solidFill>
-          <a:ln>
-            <a:noFill/>
-          </a:ln>
-          <a:effectLst/>
-        </p:spPr>
-        <p:style>
-          <a:lnRef idx="1">
-            <a:schemeClr val="accent1"/>
-          </a:lnRef>
-          <a:fillRef idx="3">
-            <a:schemeClr val="accent1"/>
-          </a:fillRef>
-          <a:effectRef idx="2">
-            <a:schemeClr val="accent1"/>
-          </a:effectRef>
-          <a:fontRef idx="minor">
-            <a:schemeClr val="lt1"/>
-          </a:fontRef>
-        </p:style>
-        <p:txBody>
-          <a:bodyPr rtlCol="0" anchor="ctr"/>
-          <a:lstStyle/>
-          <a:p>
-            <a:pPr algn="ctr"/>
-          </a:p>
-        </p:txBody>
-      </p:sp>
-      <p:sp>
-        <p:nvSpPr>
-          <p:cNvPr id="10" name="Rounded Rectangle 9"/>
-          <p:cNvSpPr/>
-          <p:nvPr/>
-        </p:nvSpPr>
-        <p:spPr>
-          <a:xfrm>
-            <a:off x="4526280" y="1828800"/>
-            <a:ext cx="3520440" cy="2651760"/>
+            <a:off x="7086600" y="1783080"/>
+            <a:ext cx="4434840" cy="4206240"/>
           </a:xfrm>
           <a:prstGeom prst="roundRect">
             <a:avLst>
@@ -21017,69 +21147,14 @@
       </p:sp>
       <p:sp>
         <p:nvSpPr>
-          <p:cNvPr id="11" name="Rounded Rectangle 10"/>
-          <p:cNvSpPr/>
-          <p:nvPr/>
-        </p:nvSpPr>
-        <p:spPr>
-          <a:xfrm>
-            <a:off x="4754880" y="2057400"/>
-            <a:ext cx="3063240" cy="457200"/>
-          </a:xfrm>
-          <a:prstGeom prst="roundRect">
-            <a:avLst>
-              <a:gd name="adj" fmla="val 30000"/>
-            </a:avLst>
-          </a:prstGeom>
-          <a:solidFill>
-            <a:srgbClr val="2E7D5B"/>
-          </a:solidFill>
-          <a:ln>
-            <a:noFill/>
-          </a:ln>
-          <a:effectLst/>
-        </p:spPr>
-        <p:style>
-          <a:lnRef idx="1">
-            <a:schemeClr val="accent1"/>
-          </a:lnRef>
-          <a:fillRef idx="3">
-            <a:schemeClr val="accent1"/>
-          </a:fillRef>
-          <a:effectRef idx="2">
-            <a:schemeClr val="accent1"/>
-          </a:effectRef>
-          <a:fontRef idx="minor">
-            <a:schemeClr val="lt1"/>
-          </a:fontRef>
-        </p:style>
-        <p:txBody>
-          <a:bodyPr rtlCol="0" anchor="ctr" lIns="0" rIns="0"/>
-          <a:lstStyle/>
-          <a:p>
-            <a:pPr algn="ctr"/>
-            <a:r>
-              <a:rPr sz="1500" b="1">
-                <a:solidFill>
-                  <a:srgbClr val="FFFFFF"/>
-                </a:solidFill>
-                <a:latin typeface="Microsoft JhengHei"/>
-              </a:rPr>
-              <a:t>豐兆的 AI</a:t>
-            </a:r>
-          </a:p>
-        </p:txBody>
-      </p:sp>
-      <p:sp>
-        <p:nvSpPr>
-          <p:cNvPr id="12" name="TextBox 11"/>
+          <p:cNvPr id="10" name="TextBox 9"/>
           <p:cNvSpPr txBox="1"/>
           <p:nvPr/>
         </p:nvSpPr>
         <p:spPr>
           <a:xfrm>
-            <a:off x="4754880" y="2697480"/>
-            <a:ext cx="3063240" cy="1645920"/>
+            <a:off x="7360920" y="1965960"/>
+            <a:ext cx="3886200" cy="411480"/>
           </a:xfrm>
           <a:prstGeom prst="rect">
             <a:avLst/>
@@ -21094,180 +21169,35 @@
           <a:p>
             <a:pPr algn="l">
               <a:lnSpc>
-                <a:spcPct val="130000"/>
-              </a:lnSpc>
-              <a:spcAft>
-                <a:spcPts val="400"/>
-              </a:spcAft>
-            </a:pPr>
-            <a:r>
-              <a:rPr sz="1350" b="0" i="0" lang="zh-TW">
-                <a:solidFill>
-                  <a:srgbClr val="1E293B"/>
-                </a:solidFill>
-                <a:latin typeface="Microsoft JhengHei"/>
-                <a:ea typeface="Microsoft JhengHei"/>
-              </a:rPr>
-              <a:t>逐條認領工單、動手修改，每一條照「驗收判準」實測通過才改狀態</a:t>
-            </a:r>
-          </a:p>
-        </p:txBody>
-      </p:sp>
-      <p:sp>
-        <p:nvSpPr>
-          <p:cNvPr id="13" name="Right Arrow 12"/>
-          <p:cNvSpPr/>
-          <p:nvPr/>
-        </p:nvSpPr>
-        <p:spPr>
-          <a:xfrm>
-            <a:off x="8065008" y="2926080"/>
-            <a:ext cx="274320" cy="274320"/>
-          </a:xfrm>
-          <a:prstGeom prst="rightArrow">
-            <a:avLst/>
-          </a:prstGeom>
-          <a:solidFill>
-            <a:srgbClr val="64748B"/>
-          </a:solidFill>
-          <a:ln>
-            <a:noFill/>
-          </a:ln>
-          <a:effectLst/>
-        </p:spPr>
-        <p:style>
-          <a:lnRef idx="1">
-            <a:schemeClr val="accent1"/>
-          </a:lnRef>
-          <a:fillRef idx="3">
-            <a:schemeClr val="accent1"/>
-          </a:fillRef>
-          <a:effectRef idx="2">
-            <a:schemeClr val="accent1"/>
-          </a:effectRef>
-          <a:fontRef idx="minor">
-            <a:schemeClr val="lt1"/>
-          </a:fontRef>
-        </p:style>
-        <p:txBody>
-          <a:bodyPr rtlCol="0" anchor="ctr"/>
-          <a:lstStyle/>
-          <a:p>
-            <a:pPr algn="ctr"/>
-          </a:p>
-        </p:txBody>
-      </p:sp>
-      <p:sp>
-        <p:nvSpPr>
-          <p:cNvPr id="14" name="Rounded Rectangle 13"/>
-          <p:cNvSpPr/>
-          <p:nvPr/>
-        </p:nvSpPr>
-        <p:spPr>
-          <a:xfrm>
-            <a:off x="8366760" y="1828800"/>
-            <a:ext cx="3520440" cy="2651760"/>
-          </a:xfrm>
-          <a:prstGeom prst="roundRect">
-            <a:avLst>
-              <a:gd name="adj" fmla="val 6000"/>
-            </a:avLst>
-          </a:prstGeom>
-          <a:solidFill>
-            <a:srgbClr val="FFFFFF"/>
-          </a:solidFill>
-          <a:ln>
-            <a:noFill/>
-          </a:ln>
-          <a:effectLst/>
-        </p:spPr>
-        <p:style>
-          <a:lnRef idx="1">
-            <a:schemeClr val="accent1"/>
-          </a:lnRef>
-          <a:fillRef idx="3">
-            <a:schemeClr val="accent1"/>
-          </a:fillRef>
-          <a:effectRef idx="2">
-            <a:schemeClr val="accent1"/>
-          </a:effectRef>
-          <a:fontRef idx="minor">
-            <a:schemeClr val="lt1"/>
-          </a:fontRef>
-        </p:style>
-        <p:txBody>
-          <a:bodyPr rtlCol="0" anchor="ctr"/>
-          <a:lstStyle/>
-          <a:p>
-            <a:pPr algn="ctr"/>
-          </a:p>
-        </p:txBody>
-      </p:sp>
-      <p:sp>
-        <p:nvSpPr>
-          <p:cNvPr id="15" name="Rounded Rectangle 14"/>
-          <p:cNvSpPr/>
-          <p:nvPr/>
-        </p:nvSpPr>
-        <p:spPr>
-          <a:xfrm>
-            <a:off x="8595360" y="2057400"/>
-            <a:ext cx="3063240" cy="457200"/>
-          </a:xfrm>
-          <a:prstGeom prst="roundRect">
-            <a:avLst>
-              <a:gd name="adj" fmla="val 30000"/>
-            </a:avLst>
-          </a:prstGeom>
-          <a:solidFill>
-            <a:srgbClr val="C99A3E"/>
-          </a:solidFill>
-          <a:ln>
-            <a:noFill/>
-          </a:ln>
-          <a:effectLst/>
-        </p:spPr>
-        <p:style>
-          <a:lnRef idx="1">
-            <a:schemeClr val="accent1"/>
-          </a:lnRef>
-          <a:fillRef idx="3">
-            <a:schemeClr val="accent1"/>
-          </a:fillRef>
-          <a:effectRef idx="2">
-            <a:schemeClr val="accent1"/>
-          </a:effectRef>
-          <a:fontRef idx="minor">
-            <a:schemeClr val="lt1"/>
-          </a:fontRef>
-        </p:style>
-        <p:txBody>
-          <a:bodyPr rtlCol="0" anchor="ctr" lIns="0" rIns="0"/>
-          <a:lstStyle/>
-          <a:p>
-            <a:pPr algn="ctr"/>
-            <a:r>
-              <a:rPr sz="1500" b="1">
-                <a:solidFill>
-                  <a:srgbClr val="0B1F3A"/>
-                </a:solidFill>
-                <a:latin typeface="Microsoft JhengHei"/>
-              </a:rPr>
-              <a:t>兩個人把關</a:t>
-            </a:r>
-          </a:p>
-        </p:txBody>
-      </p:sp>
-      <p:sp>
-        <p:nvSpPr>
-          <p:cNvPr id="16" name="TextBox 15"/>
+                <a:spcPct val="115000"/>
+              </a:lnSpc>
+              <a:spcAft>
+                <a:spcPts val="400"/>
+              </a:spcAft>
+            </a:pPr>
+            <a:r>
+              <a:rPr sz="1600" b="1" i="0" lang="zh-TW">
+                <a:solidFill>
+                  <a:srgbClr val="2E7D5B"/>
+                </a:solidFill>
+                <a:latin typeface="Microsoft JhengHei"/>
+                <a:ea typeface="Microsoft JhengHei"/>
+              </a:rPr>
+              <a:t>兩個參考資源</a:t>
+            </a:r>
+          </a:p>
+        </p:txBody>
+      </p:sp>
+      <p:sp>
+        <p:nvSpPr>
+          <p:cNvPr id="11" name="TextBox 10"/>
           <p:cNvSpPr txBox="1"/>
           <p:nvPr/>
         </p:nvSpPr>
         <p:spPr>
           <a:xfrm>
-            <a:off x="8595360" y="2697480"/>
-            <a:ext cx="3063240" cy="1645920"/>
+            <a:off x="7360920" y="2468880"/>
+            <a:ext cx="3886200" cy="3383280"/>
           </a:xfrm>
           <a:prstGeom prst="rect">
             <a:avLst/>
@@ -21282,81 +21212,115 @@
           <a:p>
             <a:pPr algn="l">
               <a:lnSpc>
-                <a:spcPct val="130000"/>
-              </a:lnSpc>
-              <a:spcAft>
-                <a:spcPts val="400"/>
-              </a:spcAft>
-            </a:pPr>
-            <a:r>
-              <a:rPr sz="1350" b="0" i="0" lang="zh-TW">
+                <a:spcPct val="135000"/>
+              </a:lnSpc>
+              <a:spcAft>
+                <a:spcPts val="400"/>
+              </a:spcAft>
+            </a:pPr>
+            <a:r>
+              <a:rPr sz="1300" b="0" i="0" lang="zh-TW">
                 <a:solidFill>
                   <a:srgbClr val="1E293B"/>
                 </a:solidFill>
                 <a:latin typeface="Microsoft JhengHei"/>
                 <a:ea typeface="Microsoft JhengHei"/>
               </a:rPr>
-              <a:t>誰提的、誰改的、改之前長什麼樣——全部留在同一個 GitHub 倉庫的紀錄裡</a:t>
-            </a:r>
-          </a:p>
-        </p:txBody>
-      </p:sp>
-      <p:sp>
-        <p:nvSpPr>
-          <p:cNvPr id="17" name="Rounded Rectangle 16"/>
-          <p:cNvSpPr/>
-          <p:nvPr/>
-        </p:nvSpPr>
-        <p:spPr>
-          <a:xfrm>
-            <a:off x="685800" y="4800600"/>
-            <a:ext cx="10835640" cy="685800"/>
-          </a:xfrm>
-          <a:prstGeom prst="roundRect">
-            <a:avLst>
-              <a:gd name="adj" fmla="val 15000"/>
-            </a:avLst>
-          </a:prstGeom>
-          <a:solidFill>
-            <a:srgbClr val="0B1F3A"/>
-          </a:solidFill>
-          <a:ln>
-            <a:noFill/>
-          </a:ln>
-          <a:effectLst/>
-        </p:spPr>
-        <p:style>
-          <a:lnRef idx="1">
-            <a:schemeClr val="accent1"/>
-          </a:lnRef>
-          <a:fillRef idx="3">
-            <a:schemeClr val="accent1"/>
-          </a:fillRef>
-          <a:effectRef idx="2">
-            <a:schemeClr val="accent1"/>
-          </a:effectRef>
-          <a:fontRef idx="minor">
-            <a:schemeClr val="lt1"/>
-          </a:fontRef>
-        </p:style>
-        <p:txBody>
-          <a:bodyPr rtlCol="0" anchor="ctr"/>
-          <a:lstStyle/>
-          <a:p>
-            <a:pPr algn="ctr"/>
-          </a:p>
-        </p:txBody>
-      </p:sp>
-      <p:sp>
-        <p:nvSpPr>
-          <p:cNvPr id="18" name="TextBox 17"/>
+              <a:t>北濱國小期末報告（教育部科教專案，臺師大科教中心 PDF）——學它「怎麼寫失敗與轉折」；報告格式仍以仰望範本為準：</a:t>
+            </a:r>
+          </a:p>
+          <a:p>
+            <a:pPr algn="l">
+              <a:lnSpc>
+                <a:spcPct val="135000"/>
+              </a:lnSpc>
+              <a:spcAft>
+                <a:spcPts val="400"/>
+              </a:spcAft>
+            </a:pPr>
+            <a:r>
+              <a:rPr sz="1300" b="0" i="0" lang="zh-TW">
+                <a:solidFill>
+                  <a:srgbClr val="1E293B"/>
+                </a:solidFill>
+                <a:latin typeface="Microsoft JhengHei"/>
+                <a:ea typeface="Microsoft JhengHei"/>
+              </a:rPr>
+              <a:t>sec.ntnu.edu.tw（搜「北濱國民小學 線上報告」）</a:t>
+            </a:r>
+          </a:p>
+          <a:p>
+            <a:pPr algn="l">
+              <a:lnSpc>
+                <a:spcPct val="135000"/>
+              </a:lnSpc>
+              <a:spcAft>
+                <a:spcPts val="400"/>
+              </a:spcAft>
+            </a:pPr>
+            <a:r>
+              <a:rPr sz="1300" b="0" i="0" lang="zh-TW">
+                <a:solidFill>
+                  <a:srgbClr val="1E293B"/>
+                </a:solidFill>
+                <a:latin typeface="Microsoft JhengHei"/>
+                <a:ea typeface="Microsoft JhengHei"/>
+              </a:rPr>
+              <a:t/>
+            </a:r>
+          </a:p>
+          <a:p>
+            <a:pPr algn="l">
+              <a:lnSpc>
+                <a:spcPct val="135000"/>
+              </a:lnSpc>
+              <a:spcAft>
+                <a:spcPts val="400"/>
+              </a:spcAft>
+            </a:pPr>
+            <a:r>
+              <a:rPr sz="1300" b="0" i="0" lang="zh-TW">
+                <a:solidFill>
+                  <a:srgbClr val="1E293B"/>
+                </a:solidFill>
+                <a:latin typeface="Microsoft JhengHei"/>
+                <a:ea typeface="Microsoft JhengHei"/>
+              </a:rPr>
+              <a:t>東華在地教案庫（2015–2026 歷年教案，免登入公開）：</a:t>
+            </a:r>
+          </a:p>
+          <a:p>
+            <a:pPr algn="l">
+              <a:lnSpc>
+                <a:spcPct val="135000"/>
+              </a:lnSpc>
+              <a:spcAft>
+                <a:spcPts val="400"/>
+              </a:spcAft>
+            </a:pPr>
+            <a:r>
+              <a:rPr sz="1300" b="0" i="0" lang="zh-TW">
+                <a:solidFill>
+                  <a:srgbClr val="1E293B"/>
+                </a:solidFill>
+                <a:latin typeface="Microsoft JhengHei"/>
+                <a:ea typeface="Microsoft JhengHei"/>
+              </a:rPr>
+              <a:t>sites.google.com/view/be-ernt/</a:t>
+            </a:r>
+          </a:p>
+        </p:txBody>
+      </p:sp>
+      <p:sp>
+        <p:nvSpPr>
+          <p:cNvPr id="12" name="TextBox 11"/>
           <p:cNvSpPr txBox="1"/>
           <p:nvPr/>
         </p:nvSpPr>
         <p:spPr>
           <a:xfrm>
-            <a:off x="960120" y="4937760"/>
-            <a:ext cx="10332720" cy="457200"/>
+            <a:off x="502920" y="6473952"/>
+            <a:ext cx="8229600" cy="274320"/>
           </a:xfrm>
           <a:prstGeom prst="rect">
             <a:avLst/>
@@ -21378,28 +21342,28 @@
               </a:spcAft>
             </a:pPr>
             <a:r>
-              <a:rPr sz="1500" b="1" i="0" lang="zh-TW">
-                <a:solidFill>
-                  <a:srgbClr val="FFFFFF"/>
-                </a:solidFill>
-                <a:latin typeface="Microsoft JhengHei"/>
-                <a:ea typeface="Microsoft JhengHei"/>
-              </a:rPr>
-              <a:t>兩位老師合帶一個社團、或一位老師配一位行政，就是這個形狀——東西放同一個地方，誰改了什麼看得到。</a:t>
-            </a:r>
-          </a:p>
-        </p:txBody>
-      </p:sp>
-      <p:sp>
-        <p:nvSpPr>
-          <p:cNvPr id="19" name="TextBox 18"/>
+              <a:rPr sz="1000" b="0" i="0" lang="zh-TW">
+                <a:solidFill>
+                  <a:srgbClr val="64748B"/>
+                </a:solidFill>
+                <a:latin typeface="Microsoft JhengHei"/>
+                <a:ea typeface="Microsoft JhengHei"/>
+              </a:rPr>
+              <a:t>仰望教育基金會 × 國立東華大學｜花蓮地區科學社團教師研習 2026/8/19</a:t>
+            </a:r>
+          </a:p>
+        </p:txBody>
+      </p:sp>
+      <p:sp>
+        <p:nvSpPr>
+          <p:cNvPr id="13" name="TextBox 12"/>
           <p:cNvSpPr txBox="1"/>
           <p:nvPr/>
         </p:nvSpPr>
         <p:spPr>
           <a:xfrm>
-            <a:off x="685800" y="5715000"/>
-            <a:ext cx="10835640" cy="457200"/>
+            <a:off x="10820095" y="6473952"/>
+            <a:ext cx="914400" cy="274320"/>
           </a:xfrm>
           <a:prstGeom prst="rect">
             <a:avLst/>
@@ -21412,7 +21376,7 @@
           </a:bodyPr>
           <a:lstStyle/>
           <a:p>
-            <a:pPr algn="l">
+            <a:pPr algn="r">
               <a:lnSpc>
                 <a:spcPct val="115000"/>
               </a:lnSpc>
@@ -21421,110 +21385,14 @@
               </a:spcAft>
             </a:pPr>
             <a:r>
-              <a:rPr sz="1350" b="1" i="0" lang="zh-TW">
+              <a:rPr sz="1000" b="0" i="0" lang="zh-TW">
                 <a:solidFill>
                   <a:srgbClr val="64748B"/>
                 </a:solidFill>
                 <a:latin typeface="Microsoft JhengHei"/>
                 <a:ea typeface="Microsoft JhengHei"/>
               </a:rPr>
-              <a:t>教材：陳文盛 × 游豐兆（CC BY-NC-SA 4.0）　</a:t>
-            </a:r>
-            <a:r>
-              <a:rPr sz="1350" b="1" i="0" lang="zh-TW">
-                <a:solidFill>
-                  <a:srgbClr val="1C7293"/>
-                </a:solidFill>
-                <a:latin typeface="Microsoft JhengHei"/>
-                <a:ea typeface="Microsoft JhengHei"/>
-              </a:rPr>
-              <a:t>github.com/cwstedctw/sci-club-toolkit</a:t>
-            </a:r>
-          </a:p>
-        </p:txBody>
-      </p:sp>
-      <p:sp>
-        <p:nvSpPr>
-          <p:cNvPr id="20" name="TextBox 19"/>
-          <p:cNvSpPr txBox="1"/>
-          <p:nvPr/>
-        </p:nvSpPr>
-        <p:spPr>
-          <a:xfrm>
-            <a:off x="502920" y="6473952"/>
-            <a:ext cx="8229600" cy="274320"/>
-          </a:xfrm>
-          <a:prstGeom prst="rect">
-            <a:avLst/>
-          </a:prstGeom>
-          <a:noFill/>
-        </p:spPr>
-        <p:txBody>
-          <a:bodyPr wrap="square" anchor="t" lIns="0" rIns="0" tIns="0" bIns="0">
-            <a:spAutoFit/>
-          </a:bodyPr>
-          <a:lstStyle/>
-          <a:p>
-            <a:pPr algn="l">
-              <a:lnSpc>
-                <a:spcPct val="115000"/>
-              </a:lnSpc>
-              <a:spcAft>
-                <a:spcPts val="400"/>
-              </a:spcAft>
-            </a:pPr>
-            <a:r>
-              <a:rPr sz="1000" b="0" i="0" lang="zh-TW">
-                <a:solidFill>
-                  <a:srgbClr val="64748B"/>
-                </a:solidFill>
-                <a:latin typeface="Microsoft JhengHei"/>
-                <a:ea typeface="Microsoft JhengHei"/>
-              </a:rPr>
-              <a:t>仰望教育基金會 × 國立東華大學｜花蓮地區科學社團教師研習 2026/8/19</a:t>
-            </a:r>
-          </a:p>
-        </p:txBody>
-      </p:sp>
-      <p:sp>
-        <p:nvSpPr>
-          <p:cNvPr id="21" name="TextBox 20"/>
-          <p:cNvSpPr txBox="1"/>
-          <p:nvPr/>
-        </p:nvSpPr>
-        <p:spPr>
-          <a:xfrm>
-            <a:off x="10820095" y="6473952"/>
-            <a:ext cx="914400" cy="274320"/>
-          </a:xfrm>
-          <a:prstGeom prst="rect">
-            <a:avLst/>
-          </a:prstGeom>
-          <a:noFill/>
-        </p:spPr>
-        <p:txBody>
-          <a:bodyPr wrap="square" anchor="t" lIns="0" rIns="0" tIns="0" bIns="0">
-            <a:spAutoFit/>
-          </a:bodyPr>
-          <a:lstStyle/>
-          <a:p>
-            <a:pPr algn="r">
-              <a:lnSpc>
-                <a:spcPct val="115000"/>
-              </a:lnSpc>
-              <a:spcAft>
-                <a:spcPts val="400"/>
-              </a:spcAft>
-            </a:pPr>
-            <a:r>
-              <a:rPr sz="1000" b="0" i="0" lang="zh-TW">
-                <a:solidFill>
-                  <a:srgbClr val="64748B"/>
-                </a:solidFill>
-                <a:latin typeface="Microsoft JhengHei"/>
-                <a:ea typeface="Microsoft JhengHei"/>
-              </a:rPr>
-              <a:t>23 / 25</a:t>
+              <a:t>23 / 26</a:t>
             </a:r>
           </a:p>
         </p:txBody>
@@ -21629,7 +21497,7 @@
                 <a:latin typeface="Microsoft JhengHei"/>
                 <a:ea typeface="Microsoft JhengHei"/>
               </a:rPr>
-              <a:t>23 / NEXT 7 DAYS</a:t>
+              <a:t>23 / CO-CREATION</a:t>
             </a:r>
           </a:p>
         </p:txBody>
@@ -21672,7 +21540,7 @@
                 <a:latin typeface="Microsoft JhengHei"/>
                 <a:ea typeface="Microsoft JhengHei"/>
               </a:rPr>
-              <a:t>回學校後的第一週，做這三件就好</a:t>
+              <a:t>這套教材，就是兩個人×兩個 AI 一起做出來的</a:t>
             </a:r>
           </a:p>
         </p:txBody>
@@ -21715,7 +21583,7 @@
                 <a:latin typeface="Microsoft JhengHei"/>
                 <a:ea typeface="Microsoft JhengHei"/>
               </a:rPr>
-              <a:t>開學（9 月）前的準備</a:t>
+              <a:t>8/19 的另一堂示範課：AI 協作不是一個人的事</a:t>
             </a:r>
           </a:p>
         </p:txBody>
@@ -21728,8 +21596,8 @@
         </p:nvSpPr>
         <p:spPr>
           <a:xfrm>
-            <a:off x="685800" y="1920240"/>
-            <a:ext cx="10835640" cy="1143000"/>
+            <a:off x="685800" y="1828800"/>
+            <a:ext cx="3520440" cy="2651760"/>
           </a:xfrm>
           <a:prstGeom prst="roundRect">
             <a:avLst>
@@ -21768,17 +21636,19 @@
       </p:sp>
       <p:sp>
         <p:nvSpPr>
-          <p:cNvPr id="7" name="Oval 6"/>
+          <p:cNvPr id="7" name="Rounded Rectangle 6"/>
           <p:cNvSpPr/>
           <p:nvPr/>
         </p:nvSpPr>
         <p:spPr>
           <a:xfrm>
-            <a:off x="960120" y="2176272"/>
-            <a:ext cx="621792" cy="621792"/>
-          </a:xfrm>
-          <a:prstGeom prst="ellipse">
-            <a:avLst/>
+            <a:off x="914400" y="2057400"/>
+            <a:ext cx="3063240" cy="457200"/>
+          </a:xfrm>
+          <a:prstGeom prst="roundRect">
+            <a:avLst>
+              <a:gd name="adj" fmla="val 30000"/>
+            </a:avLst>
           </a:prstGeom>
           <a:solidFill>
             <a:srgbClr val="1C7293"/>
@@ -21803,18 +21673,18 @@
           </a:fontRef>
         </p:style>
         <p:txBody>
-          <a:bodyPr rtlCol="0" anchor="ctr" lIns="0" rIns="0" tIns="0" bIns="0"/>
+          <a:bodyPr rtlCol="0" anchor="ctr" lIns="0" rIns="0"/>
           <a:lstStyle/>
           <a:p>
             <a:pPr algn="ctr"/>
             <a:r>
-              <a:rPr sz="2000" b="1">
+              <a:rPr sz="1500" b="1">
                 <a:solidFill>
                   <a:srgbClr val="FFFFFF"/>
                 </a:solidFill>
                 <a:latin typeface="Microsoft JhengHei"/>
               </a:rPr>
-              <a:t>1</a:t>
+              <a:t>文盛老師的 AI</a:t>
             </a:r>
           </a:p>
         </p:txBody>
@@ -21827,8 +21697,8 @@
         </p:nvSpPr>
         <p:spPr>
           <a:xfrm>
-            <a:off x="1828800" y="2084832"/>
-            <a:ext cx="3383280" cy="822960"/>
+            <a:off x="914400" y="2697480"/>
+            <a:ext cx="3063240" cy="1645920"/>
           </a:xfrm>
           <a:prstGeom prst="rect">
             <a:avLst/>
@@ -21836,72 +21706,73 @@
           <a:noFill/>
         </p:spPr>
         <p:txBody>
-          <a:bodyPr wrap="square" anchor="ctr" lIns="0" rIns="0" tIns="0" bIns="0">
+          <a:bodyPr wrap="square" anchor="t" lIns="0" rIns="0" tIns="0" bIns="0">
             <a:spAutoFit/>
           </a:bodyPr>
           <a:lstStyle/>
           <a:p>
             <a:pPr algn="l">
               <a:lnSpc>
-                <a:spcPct val="115000"/>
-              </a:lnSpc>
-              <a:spcAft>
-                <a:spcPts val="400"/>
-              </a:spcAft>
-            </a:pPr>
-            <a:r>
-              <a:rPr sz="1700" b="1" i="0" lang="zh-TW">
+                <a:spcPct val="130000"/>
+              </a:lnSpc>
+              <a:spcAft>
+                <a:spcPts val="400"/>
+              </a:spcAft>
+            </a:pPr>
+            <a:r>
+              <a:rPr sz="1350" b="0" i="0" lang="zh-TW">
                 <a:solidFill>
                   <a:srgbClr val="1E293B"/>
                 </a:solidFill>
                 <a:latin typeface="Microsoft JhengHei"/>
                 <a:ea typeface="Microsoft JhengHei"/>
               </a:rPr>
-              <a:t>回饋單印 30 份</a:t>
-            </a:r>
-          </a:p>
-        </p:txBody>
-      </p:sp>
-      <p:sp>
-        <p:nvSpPr>
-          <p:cNvPr id="9" name="TextBox 8"/>
-          <p:cNvSpPr txBox="1"/>
-          <p:nvPr/>
-        </p:nvSpPr>
-        <p:spPr>
-          <a:xfrm>
-            <a:off x="5394960" y="2084832"/>
-            <a:ext cx="5943600" cy="822960"/>
-          </a:xfrm>
-          <a:prstGeom prst="rect">
-            <a:avLst/>
-          </a:prstGeom>
-          <a:noFill/>
-        </p:spPr>
-        <p:txBody>
-          <a:bodyPr wrap="square" anchor="ctr" lIns="0" rIns="0" tIns="0" bIns="0">
-            <a:spAutoFit/>
-          </a:bodyPr>
-          <a:lstStyle/>
-          <a:p>
-            <a:pPr algn="l">
-              <a:lnSpc>
-                <a:spcPct val="125000"/>
-              </a:lnSpc>
-              <a:spcAft>
-                <a:spcPts val="400"/>
-              </a:spcAft>
-            </a:pPr>
-            <a:r>
-              <a:rPr sz="1450" b="0" i="0" lang="zh-TW">
-                <a:solidFill>
-                  <a:srgbClr val="1E293B"/>
-                </a:solidFill>
-                <a:latin typeface="Microsoft JhengHei"/>
-                <a:ea typeface="Microsoft JhengHei"/>
-              </a:rPr>
-              <a:t>放進社團資料夾——第一堂課就發，不要等期末</a:t>
-            </a:r>
+              <a:t>實測審查我方做的系統與簡報，開出 29 條改善工單——其中 9 條被「人」推翻，沒有照單全收</a:t>
+            </a:r>
+          </a:p>
+        </p:txBody>
+      </p:sp>
+      <p:sp>
+        <p:nvSpPr>
+          <p:cNvPr id="9" name="Right Arrow 8"/>
+          <p:cNvSpPr/>
+          <p:nvPr/>
+        </p:nvSpPr>
+        <p:spPr>
+          <a:xfrm>
+            <a:off x="4224528" y="2926080"/>
+            <a:ext cx="274320" cy="274320"/>
+          </a:xfrm>
+          <a:prstGeom prst="rightArrow">
+            <a:avLst/>
+          </a:prstGeom>
+          <a:solidFill>
+            <a:srgbClr val="64748B"/>
+          </a:solidFill>
+          <a:ln>
+            <a:noFill/>
+          </a:ln>
+          <a:effectLst/>
+        </p:spPr>
+        <p:style>
+          <a:lnRef idx="1">
+            <a:schemeClr val="accent1"/>
+          </a:lnRef>
+          <a:fillRef idx="3">
+            <a:schemeClr val="accent1"/>
+          </a:fillRef>
+          <a:effectRef idx="2">
+            <a:schemeClr val="accent1"/>
+          </a:effectRef>
+          <a:fontRef idx="minor">
+            <a:schemeClr val="lt1"/>
+          </a:fontRef>
+        </p:style>
+        <p:txBody>
+          <a:bodyPr rtlCol="0" anchor="ctr"/>
+          <a:lstStyle/>
+          <a:p>
+            <a:pPr algn="ctr"/>
           </a:p>
         </p:txBody>
       </p:sp>
@@ -21913,8 +21784,8 @@
         </p:nvSpPr>
         <p:spPr>
           <a:xfrm>
-            <a:off x="685800" y="3218688"/>
-            <a:ext cx="10835640" cy="1143000"/>
+            <a:off x="4526280" y="1828800"/>
+            <a:ext cx="3520440" cy="2651760"/>
           </a:xfrm>
           <a:prstGeom prst="roundRect">
             <a:avLst>
@@ -21953,20 +21824,22 @@
       </p:sp>
       <p:sp>
         <p:nvSpPr>
-          <p:cNvPr id="11" name="Oval 10"/>
+          <p:cNvPr id="11" name="Rounded Rectangle 10"/>
           <p:cNvSpPr/>
           <p:nvPr/>
         </p:nvSpPr>
         <p:spPr>
           <a:xfrm>
-            <a:off x="960120" y="3474720"/>
-            <a:ext cx="621792" cy="621792"/>
-          </a:xfrm>
-          <a:prstGeom prst="ellipse">
-            <a:avLst/>
+            <a:off x="4754880" y="2057400"/>
+            <a:ext cx="3063240" cy="457200"/>
+          </a:xfrm>
+          <a:prstGeom prst="roundRect">
+            <a:avLst>
+              <a:gd name="adj" fmla="val 30000"/>
+            </a:avLst>
           </a:prstGeom>
           <a:solidFill>
-            <a:srgbClr val="065A82"/>
+            <a:srgbClr val="2E7D5B"/>
           </a:solidFill>
           <a:ln>
             <a:noFill/>
@@ -21988,18 +21861,18 @@
           </a:fontRef>
         </p:style>
         <p:txBody>
-          <a:bodyPr rtlCol="0" anchor="ctr" lIns="0" rIns="0" tIns="0" bIns="0"/>
+          <a:bodyPr rtlCol="0" anchor="ctr" lIns="0" rIns="0"/>
           <a:lstStyle/>
           <a:p>
             <a:pPr algn="ctr"/>
             <a:r>
-              <a:rPr sz="2000" b="1">
+              <a:rPr sz="1500" b="1">
                 <a:solidFill>
                   <a:srgbClr val="FFFFFF"/>
                 </a:solidFill>
                 <a:latin typeface="Microsoft JhengHei"/>
               </a:rPr>
-              <a:t>2</a:t>
+              <a:t>豐兆的 AI</a:t>
             </a:r>
           </a:p>
         </p:txBody>
@@ -22012,8 +21885,8 @@
         </p:nvSpPr>
         <p:spPr>
           <a:xfrm>
-            <a:off x="1828800" y="3383280"/>
-            <a:ext cx="3383280" cy="822960"/>
+            <a:off x="4754880" y="2697480"/>
+            <a:ext cx="3063240" cy="1645920"/>
           </a:xfrm>
           <a:prstGeom prst="rect">
             <a:avLst/>
@@ -22021,72 +21894,73 @@
           <a:noFill/>
         </p:spPr>
         <p:txBody>
-          <a:bodyPr wrap="square" anchor="ctr" lIns="0" rIns="0" tIns="0" bIns="0">
+          <a:bodyPr wrap="square" anchor="t" lIns="0" rIns="0" tIns="0" bIns="0">
             <a:spAutoFit/>
           </a:bodyPr>
           <a:lstStyle/>
           <a:p>
             <a:pPr algn="l">
               <a:lnSpc>
-                <a:spcPct val="115000"/>
-              </a:lnSpc>
-              <a:spcAft>
-                <a:spcPts val="400"/>
-              </a:spcAft>
-            </a:pPr>
-            <a:r>
-              <a:rPr sz="1700" b="1" i="0" lang="zh-TW">
+                <a:spcPct val="130000"/>
+              </a:lnSpc>
+              <a:spcAft>
+                <a:spcPts val="400"/>
+              </a:spcAft>
+            </a:pPr>
+            <a:r>
+              <a:rPr sz="1350" b="0" i="0" lang="zh-TW">
                 <a:solidFill>
                   <a:srgbClr val="1E293B"/>
                 </a:solidFill>
                 <a:latin typeface="Microsoft JhengHei"/>
                 <a:ea typeface="Microsoft JhengHei"/>
               </a:rPr>
-              <a:t>真名單貼進系統</a:t>
-            </a:r>
-          </a:p>
-        </p:txBody>
-      </p:sp>
-      <p:sp>
-        <p:nvSpPr>
-          <p:cNvPr id="13" name="TextBox 12"/>
-          <p:cNvSpPr txBox="1"/>
-          <p:nvPr/>
-        </p:nvSpPr>
-        <p:spPr>
-          <a:xfrm>
-            <a:off x="5394960" y="3383280"/>
-            <a:ext cx="5943600" cy="822960"/>
-          </a:xfrm>
-          <a:prstGeom prst="rect">
-            <a:avLst/>
-          </a:prstGeom>
-          <a:noFill/>
-        </p:spPr>
-        <p:txBody>
-          <a:bodyPr wrap="square" anchor="ctr" lIns="0" rIns="0" tIns="0" bIns="0">
-            <a:spAutoFit/>
-          </a:bodyPr>
-          <a:lstStyle/>
-          <a:p>
-            <a:pPr algn="l">
-              <a:lnSpc>
-                <a:spcPct val="125000"/>
-              </a:lnSpc>
-              <a:spcAft>
-                <a:spcPts val="400"/>
-              </a:spcAft>
-            </a:pPr>
-            <a:r>
-              <a:rPr sz="1450" b="0" i="0" lang="zh-TW">
-                <a:solidFill>
-                  <a:srgbClr val="1E293B"/>
-                </a:solidFill>
-                <a:latin typeface="Microsoft JhengHei"/>
-                <a:ea typeface="Microsoft JhengHei"/>
-              </a:rPr>
-              <a:t>拿到正式社團名單就貼；第一週上完課就點名、登材料費</a:t>
-            </a:r>
+              <a:t>逐條認領工單、動手修改，每一條照「驗收判準」實測通過才改狀態</a:t>
+            </a:r>
+          </a:p>
+        </p:txBody>
+      </p:sp>
+      <p:sp>
+        <p:nvSpPr>
+          <p:cNvPr id="13" name="Right Arrow 12"/>
+          <p:cNvSpPr/>
+          <p:nvPr/>
+        </p:nvSpPr>
+        <p:spPr>
+          <a:xfrm>
+            <a:off x="8065008" y="2926080"/>
+            <a:ext cx="274320" cy="274320"/>
+          </a:xfrm>
+          <a:prstGeom prst="rightArrow">
+            <a:avLst/>
+          </a:prstGeom>
+          <a:solidFill>
+            <a:srgbClr val="64748B"/>
+          </a:solidFill>
+          <a:ln>
+            <a:noFill/>
+          </a:ln>
+          <a:effectLst/>
+        </p:spPr>
+        <p:style>
+          <a:lnRef idx="1">
+            <a:schemeClr val="accent1"/>
+          </a:lnRef>
+          <a:fillRef idx="3">
+            <a:schemeClr val="accent1"/>
+          </a:fillRef>
+          <a:effectRef idx="2">
+            <a:schemeClr val="accent1"/>
+          </a:effectRef>
+          <a:fontRef idx="minor">
+            <a:schemeClr val="lt1"/>
+          </a:fontRef>
+        </p:style>
+        <p:txBody>
+          <a:bodyPr rtlCol="0" anchor="ctr"/>
+          <a:lstStyle/>
+          <a:p>
+            <a:pPr algn="ctr"/>
           </a:p>
         </p:txBody>
       </p:sp>
@@ -22098,8 +21972,8 @@
         </p:nvSpPr>
         <p:spPr>
           <a:xfrm>
-            <a:off x="685800" y="4517136"/>
-            <a:ext cx="10835640" cy="1143000"/>
+            <a:off x="8366760" y="1828800"/>
+            <a:ext cx="3520440" cy="2651760"/>
           </a:xfrm>
           <a:prstGeom prst="roundRect">
             <a:avLst>
@@ -22138,20 +22012,22 @@
       </p:sp>
       <p:sp>
         <p:nvSpPr>
-          <p:cNvPr id="15" name="Oval 14"/>
+          <p:cNvPr id="15" name="Rounded Rectangle 14"/>
           <p:cNvSpPr/>
           <p:nvPr/>
         </p:nvSpPr>
         <p:spPr>
           <a:xfrm>
-            <a:off x="960120" y="4773168"/>
-            <a:ext cx="621792" cy="621792"/>
-          </a:xfrm>
-          <a:prstGeom prst="ellipse">
-            <a:avLst/>
+            <a:off x="8595360" y="2057400"/>
+            <a:ext cx="3063240" cy="457200"/>
+          </a:xfrm>
+          <a:prstGeom prst="roundRect">
+            <a:avLst>
+              <a:gd name="adj" fmla="val 30000"/>
+            </a:avLst>
           </a:prstGeom>
           <a:solidFill>
-            <a:srgbClr val="2E7D5B"/>
+            <a:srgbClr val="C99A3E"/>
           </a:solidFill>
           <a:ln>
             <a:noFill/>
@@ -22173,18 +22049,18 @@
           </a:fontRef>
         </p:style>
         <p:txBody>
-          <a:bodyPr rtlCol="0" anchor="ctr" lIns="0" rIns="0" tIns="0" bIns="0"/>
+          <a:bodyPr rtlCol="0" anchor="ctr" lIns="0" rIns="0"/>
           <a:lstStyle/>
           <a:p>
             <a:pPr algn="ctr"/>
             <a:r>
-              <a:rPr sz="2000" b="1">
-                <a:solidFill>
-                  <a:srgbClr val="FFFFFF"/>
-                </a:solidFill>
-                <a:latin typeface="Microsoft JhengHei"/>
-              </a:rPr>
-              <a:t>3</a:t>
+              <a:rPr sz="1500" b="1">
+                <a:solidFill>
+                  <a:srgbClr val="0B1F3A"/>
+                </a:solidFill>
+                <a:latin typeface="Microsoft JhengHei"/>
+              </a:rPr>
+              <a:t>兩個人把關</a:t>
             </a:r>
           </a:p>
         </p:txBody>
@@ -22197,8 +22073,8 @@
         </p:nvSpPr>
         <p:spPr>
           <a:xfrm>
-            <a:off x="1828800" y="4681728"/>
-            <a:ext cx="3383280" cy="822960"/>
+            <a:off x="8595360" y="2697480"/>
+            <a:ext cx="3063240" cy="1645920"/>
           </a:xfrm>
           <a:prstGeom prst="rect">
             <a:avLst/>
@@ -22206,84 +22082,41 @@
           <a:noFill/>
         </p:spPr>
         <p:txBody>
-          <a:bodyPr wrap="square" anchor="ctr" lIns="0" rIns="0" tIns="0" bIns="0">
+          <a:bodyPr wrap="square" anchor="t" lIns="0" rIns="0" tIns="0" bIns="0">
             <a:spAutoFit/>
           </a:bodyPr>
           <a:lstStyle/>
           <a:p>
             <a:pPr algn="l">
               <a:lnSpc>
-                <a:spcPct val="115000"/>
-              </a:lnSpc>
-              <a:spcAft>
-                <a:spcPts val="400"/>
-              </a:spcAft>
-            </a:pPr>
-            <a:r>
-              <a:rPr sz="1700" b="1" i="0" lang="zh-TW">
+                <a:spcPct val="130000"/>
+              </a:lnSpc>
+              <a:spcAft>
+                <a:spcPts val="400"/>
+              </a:spcAft>
+            </a:pPr>
+            <a:r>
+              <a:rPr sz="1350" b="0" i="0" lang="zh-TW">
                 <a:solidFill>
                   <a:srgbClr val="1E293B"/>
                 </a:solidFill>
                 <a:latin typeface="Microsoft JhengHei"/>
                 <a:ea typeface="Microsoft JhengHei"/>
               </a:rPr>
-              <a:t>跟出納對一次</a:t>
-            </a:r>
-          </a:p>
-        </p:txBody>
-      </p:sp>
-      <p:sp>
-        <p:nvSpPr>
-          <p:cNvPr id="17" name="TextBox 16"/>
-          <p:cNvSpPr txBox="1"/>
-          <p:nvPr/>
-        </p:nvSpPr>
-        <p:spPr>
-          <a:xfrm>
-            <a:off x="5394960" y="4681728"/>
-            <a:ext cx="5943600" cy="822960"/>
-          </a:xfrm>
-          <a:prstGeom prst="rect">
-            <a:avLst/>
-          </a:prstGeom>
-          <a:noFill/>
-        </p:spPr>
-        <p:txBody>
-          <a:bodyPr wrap="square" anchor="ctr" lIns="0" rIns="0" tIns="0" bIns="0">
-            <a:spAutoFit/>
-          </a:bodyPr>
-          <a:lstStyle/>
-          <a:p>
-            <a:pPr algn="l">
-              <a:lnSpc>
-                <a:spcPct val="125000"/>
-              </a:lnSpc>
-              <a:spcAft>
-                <a:spcPts val="400"/>
-              </a:spcAft>
-            </a:pPr>
-            <a:r>
-              <a:rPr sz="1450" b="0" i="0" lang="zh-TW">
-                <a:solidFill>
-                  <a:srgbClr val="1E293B"/>
-                </a:solidFill>
-                <a:latin typeface="Microsoft JhengHei"/>
-                <a:ea typeface="Microsoft JhengHei"/>
-              </a:rPr>
-              <a:t>拿「三個地雷」那頁去聊 10 分鐘，確認校內格式怎麼套</a:t>
-            </a:r>
-          </a:p>
-        </p:txBody>
-      </p:sp>
-      <p:sp>
-        <p:nvSpPr>
-          <p:cNvPr id="18" name="Rounded Rectangle 17"/>
+              <a:t>誰提的、誰改的、改之前長什麼樣——全部留在同一個 GitHub 倉庫的紀錄裡</a:t>
+            </a:r>
+          </a:p>
+        </p:txBody>
+      </p:sp>
+      <p:sp>
+        <p:nvSpPr>
+          <p:cNvPr id="17" name="Rounded Rectangle 16"/>
           <p:cNvSpPr/>
           <p:nvPr/>
         </p:nvSpPr>
         <p:spPr>
           <a:xfrm>
-            <a:off x="685800" y="5861304"/>
+            <a:off x="685800" y="4800600"/>
             <a:ext cx="10835640" cy="685800"/>
           </a:xfrm>
           <a:prstGeom prst="roundRect">
@@ -22323,13 +22156,13 @@
       </p:sp>
       <p:sp>
         <p:nvSpPr>
-          <p:cNvPr id="19" name="TextBox 18"/>
+          <p:cNvPr id="18" name="TextBox 17"/>
           <p:cNvSpPr txBox="1"/>
           <p:nvPr/>
         </p:nvSpPr>
         <p:spPr>
           <a:xfrm>
-            <a:off x="960120" y="5998464"/>
+            <a:off x="960120" y="4937760"/>
             <a:ext cx="10332720" cy="457200"/>
           </a:xfrm>
           <a:prstGeom prst="rect">
@@ -22359,21 +22192,21 @@
                 <a:latin typeface="Microsoft JhengHei"/>
                 <a:ea typeface="Microsoft JhengHei"/>
               </a:rPr>
-              <a:t>三件都做完，2027 年 6 月的成果報告，已經寫完一半。</a:t>
-            </a:r>
-          </a:p>
-        </p:txBody>
-      </p:sp>
-      <p:sp>
-        <p:nvSpPr>
-          <p:cNvPr id="20" name="TextBox 19"/>
+              <a:t>兩位老師合帶一個社團、或一位老師配一位行政，就是這個形狀——東西放同一個地方，誰改了什麼看得到。</a:t>
+            </a:r>
+          </a:p>
+        </p:txBody>
+      </p:sp>
+      <p:sp>
+        <p:nvSpPr>
+          <p:cNvPr id="19" name="TextBox 18"/>
           <p:cNvSpPr txBox="1"/>
           <p:nvPr/>
         </p:nvSpPr>
         <p:spPr>
           <a:xfrm>
-            <a:off x="502920" y="6473952"/>
-            <a:ext cx="8229600" cy="274320"/>
+            <a:off x="685800" y="5715000"/>
+            <a:ext cx="10835640" cy="457200"/>
           </a:xfrm>
           <a:prstGeom prst="rect">
             <a:avLst/>
@@ -22395,28 +22228,38 @@
               </a:spcAft>
             </a:pPr>
             <a:r>
-              <a:rPr sz="1000" b="0" i="0" lang="zh-TW">
+              <a:rPr sz="1350" b="1" i="0" lang="zh-TW">
                 <a:solidFill>
                   <a:srgbClr val="64748B"/>
                 </a:solidFill>
                 <a:latin typeface="Microsoft JhengHei"/>
                 <a:ea typeface="Microsoft JhengHei"/>
               </a:rPr>
-              <a:t>仰望教育基金會 × 國立東華大學｜花蓮地區科學社團教師研習 2026/8/19</a:t>
-            </a:r>
-          </a:p>
-        </p:txBody>
-      </p:sp>
-      <p:sp>
-        <p:nvSpPr>
-          <p:cNvPr id="21" name="TextBox 20"/>
+              <a:t>教材：陳文盛 × 游豐兆（CC BY-NC-SA 4.0）　</a:t>
+            </a:r>
+            <a:r>
+              <a:rPr sz="1350" b="1" i="0" lang="zh-TW">
+                <a:solidFill>
+                  <a:srgbClr val="1C7293"/>
+                </a:solidFill>
+                <a:latin typeface="Microsoft JhengHei"/>
+                <a:ea typeface="Microsoft JhengHei"/>
+              </a:rPr>
+              <a:t>github.com/cwstedctw/sci-club-toolkit</a:t>
+            </a:r>
+          </a:p>
+        </p:txBody>
+      </p:sp>
+      <p:sp>
+        <p:nvSpPr>
+          <p:cNvPr id="20" name="TextBox 19"/>
           <p:cNvSpPr txBox="1"/>
           <p:nvPr/>
         </p:nvSpPr>
         <p:spPr>
           <a:xfrm>
-            <a:off x="10820095" y="6473952"/>
-            <a:ext cx="914400" cy="274320"/>
+            <a:off x="502920" y="6473952"/>
+            <a:ext cx="8229600" cy="274320"/>
           </a:xfrm>
           <a:prstGeom prst="rect">
             <a:avLst/>
@@ -22429,6 +22272,49 @@
           </a:bodyPr>
           <a:lstStyle/>
           <a:p>
+            <a:pPr algn="l">
+              <a:lnSpc>
+                <a:spcPct val="115000"/>
+              </a:lnSpc>
+              <a:spcAft>
+                <a:spcPts val="400"/>
+              </a:spcAft>
+            </a:pPr>
+            <a:r>
+              <a:rPr sz="1000" b="0" i="0" lang="zh-TW">
+                <a:solidFill>
+                  <a:srgbClr val="64748B"/>
+                </a:solidFill>
+                <a:latin typeface="Microsoft JhengHei"/>
+                <a:ea typeface="Microsoft JhengHei"/>
+              </a:rPr>
+              <a:t>仰望教育基金會 × 國立東華大學｜花蓮地區科學社團教師研習 2026/8/19</a:t>
+            </a:r>
+          </a:p>
+        </p:txBody>
+      </p:sp>
+      <p:sp>
+        <p:nvSpPr>
+          <p:cNvPr id="21" name="TextBox 20"/>
+          <p:cNvSpPr txBox="1"/>
+          <p:nvPr/>
+        </p:nvSpPr>
+        <p:spPr>
+          <a:xfrm>
+            <a:off x="10820095" y="6473952"/>
+            <a:ext cx="914400" cy="274320"/>
+          </a:xfrm>
+          <a:prstGeom prst="rect">
+            <a:avLst/>
+          </a:prstGeom>
+          <a:noFill/>
+        </p:spPr>
+        <p:txBody>
+          <a:bodyPr wrap="square" anchor="t" lIns="0" rIns="0" tIns="0" bIns="0">
+            <a:spAutoFit/>
+          </a:bodyPr>
+          <a:lstStyle/>
+          <a:p>
             <a:pPr algn="r">
               <a:lnSpc>
                 <a:spcPct val="115000"/>
@@ -22445,7 +22331,7 @@
                 <a:latin typeface="Microsoft JhengHei"/>
                 <a:ea typeface="Microsoft JhengHei"/>
               </a:rPr>
-              <a:t>24 / 25</a:t>
+              <a:t>24 / 26</a:t>
             </a:r>
           </a:p>
         </p:txBody>
@@ -22483,6 +22369,1076 @@
             <a:avLst/>
           </a:prstGeom>
           <a:solidFill>
+            <a:srgbClr val="F5F9FA"/>
+          </a:solidFill>
+          <a:ln>
+            <a:noFill/>
+          </a:ln>
+          <a:effectLst/>
+        </p:spPr>
+        <p:style>
+          <a:lnRef idx="1">
+            <a:schemeClr val="accent1"/>
+          </a:lnRef>
+          <a:fillRef idx="3">
+            <a:schemeClr val="accent1"/>
+          </a:fillRef>
+          <a:effectRef idx="2">
+            <a:schemeClr val="accent1"/>
+          </a:effectRef>
+          <a:fontRef idx="minor">
+            <a:schemeClr val="lt1"/>
+          </a:fontRef>
+        </p:style>
+        <p:txBody>
+          <a:bodyPr rtlCol="0" anchor="ctr"/>
+          <a:lstStyle/>
+          <a:p>
+            <a:pPr algn="ctr"/>
+          </a:p>
+        </p:txBody>
+      </p:sp>
+      <p:sp>
+        <p:nvSpPr>
+          <p:cNvPr id="3" name="TextBox 2"/>
+          <p:cNvSpPr txBox="1"/>
+          <p:nvPr/>
+        </p:nvSpPr>
+        <p:spPr>
+          <a:xfrm>
+            <a:off x="502920" y="347472"/>
+            <a:ext cx="8229600" cy="320040"/>
+          </a:xfrm>
+          <a:prstGeom prst="rect">
+            <a:avLst/>
+          </a:prstGeom>
+          <a:noFill/>
+        </p:spPr>
+        <p:txBody>
+          <a:bodyPr wrap="square" anchor="t" lIns="0" rIns="0" tIns="0" bIns="0">
+            <a:spAutoFit/>
+          </a:bodyPr>
+          <a:lstStyle/>
+          <a:p>
+            <a:pPr algn="l">
+              <a:lnSpc>
+                <a:spcPct val="115000"/>
+              </a:lnSpc>
+              <a:spcAft>
+                <a:spcPts val="400"/>
+              </a:spcAft>
+            </a:pPr>
+            <a:r>
+              <a:rPr sz="1400" b="1" i="0" lang="zh-TW">
+                <a:solidFill>
+                  <a:srgbClr val="1C7293"/>
+                </a:solidFill>
+                <a:latin typeface="Microsoft JhengHei"/>
+                <a:ea typeface="Microsoft JhengHei"/>
+              </a:rPr>
+              <a:t>24 / NEXT 7 DAYS</a:t>
+            </a:r>
+          </a:p>
+        </p:txBody>
+      </p:sp>
+      <p:sp>
+        <p:nvSpPr>
+          <p:cNvPr id="4" name="TextBox 3"/>
+          <p:cNvSpPr txBox="1"/>
+          <p:nvPr/>
+        </p:nvSpPr>
+        <p:spPr>
+          <a:xfrm>
+            <a:off x="502920" y="658368"/>
+            <a:ext cx="11155680" cy="685800"/>
+          </a:xfrm>
+          <a:prstGeom prst="rect">
+            <a:avLst/>
+          </a:prstGeom>
+          <a:noFill/>
+        </p:spPr>
+        <p:txBody>
+          <a:bodyPr wrap="square" anchor="t" lIns="0" rIns="0" tIns="0" bIns="0">
+            <a:spAutoFit/>
+          </a:bodyPr>
+          <a:lstStyle/>
+          <a:p>
+            <a:pPr algn="l">
+              <a:lnSpc>
+                <a:spcPct val="115000"/>
+              </a:lnSpc>
+              <a:spcAft>
+                <a:spcPts val="400"/>
+              </a:spcAft>
+            </a:pPr>
+            <a:r>
+              <a:rPr sz="3000" b="1" i="0" lang="zh-TW">
+                <a:solidFill>
+                  <a:srgbClr val="1E293B"/>
+                </a:solidFill>
+                <a:latin typeface="Microsoft JhengHei"/>
+                <a:ea typeface="Microsoft JhengHei"/>
+              </a:rPr>
+              <a:t>回學校後的第一週，做這四件就好</a:t>
+            </a:r>
+          </a:p>
+        </p:txBody>
+      </p:sp>
+      <p:sp>
+        <p:nvSpPr>
+          <p:cNvPr id="5" name="TextBox 4"/>
+          <p:cNvSpPr txBox="1"/>
+          <p:nvPr/>
+        </p:nvSpPr>
+        <p:spPr>
+          <a:xfrm>
+            <a:off x="502920" y="1298448"/>
+            <a:ext cx="11155680" cy="320040"/>
+          </a:xfrm>
+          <a:prstGeom prst="rect">
+            <a:avLst/>
+          </a:prstGeom>
+          <a:noFill/>
+        </p:spPr>
+        <p:txBody>
+          <a:bodyPr wrap="square" anchor="t" lIns="0" rIns="0" tIns="0" bIns="0">
+            <a:spAutoFit/>
+          </a:bodyPr>
+          <a:lstStyle/>
+          <a:p>
+            <a:pPr algn="l">
+              <a:lnSpc>
+                <a:spcPct val="115000"/>
+              </a:lnSpc>
+              <a:spcAft>
+                <a:spcPts val="400"/>
+              </a:spcAft>
+            </a:pPr>
+            <a:r>
+              <a:rPr sz="1400" b="0" i="1" lang="zh-TW">
+                <a:solidFill>
+                  <a:srgbClr val="64748B"/>
+                </a:solidFill>
+                <a:latin typeface="Microsoft JhengHei"/>
+                <a:ea typeface="Microsoft JhengHei"/>
+              </a:rPr>
+              <a:t>開學（9 月）前的準備</a:t>
+            </a:r>
+          </a:p>
+        </p:txBody>
+      </p:sp>
+      <p:sp>
+        <p:nvSpPr>
+          <p:cNvPr id="6" name="Rounded Rectangle 5"/>
+          <p:cNvSpPr/>
+          <p:nvPr/>
+        </p:nvSpPr>
+        <p:spPr>
+          <a:xfrm>
+            <a:off x="685800" y="1828800"/>
+            <a:ext cx="10835640" cy="896112"/>
+          </a:xfrm>
+          <a:prstGeom prst="roundRect">
+            <a:avLst>
+              <a:gd name="adj" fmla="val 6000"/>
+            </a:avLst>
+          </a:prstGeom>
+          <a:solidFill>
+            <a:srgbClr val="FFFFFF"/>
+          </a:solidFill>
+          <a:ln>
+            <a:noFill/>
+          </a:ln>
+          <a:effectLst/>
+        </p:spPr>
+        <p:style>
+          <a:lnRef idx="1">
+            <a:schemeClr val="accent1"/>
+          </a:lnRef>
+          <a:fillRef idx="3">
+            <a:schemeClr val="accent1"/>
+          </a:fillRef>
+          <a:effectRef idx="2">
+            <a:schemeClr val="accent1"/>
+          </a:effectRef>
+          <a:fontRef idx="minor">
+            <a:schemeClr val="lt1"/>
+          </a:fontRef>
+        </p:style>
+        <p:txBody>
+          <a:bodyPr rtlCol="0" anchor="ctr"/>
+          <a:lstStyle/>
+          <a:p>
+            <a:pPr algn="ctr"/>
+          </a:p>
+        </p:txBody>
+      </p:sp>
+      <p:sp>
+        <p:nvSpPr>
+          <p:cNvPr id="7" name="Oval 6"/>
+          <p:cNvSpPr/>
+          <p:nvPr/>
+        </p:nvSpPr>
+        <p:spPr>
+          <a:xfrm>
+            <a:off x="960120" y="1993392"/>
+            <a:ext cx="566928" cy="566928"/>
+          </a:xfrm>
+          <a:prstGeom prst="ellipse">
+            <a:avLst/>
+          </a:prstGeom>
+          <a:solidFill>
+            <a:srgbClr val="1C7293"/>
+          </a:solidFill>
+          <a:ln>
+            <a:noFill/>
+          </a:ln>
+          <a:effectLst/>
+        </p:spPr>
+        <p:style>
+          <a:lnRef idx="1">
+            <a:schemeClr val="accent1"/>
+          </a:lnRef>
+          <a:fillRef idx="3">
+            <a:schemeClr val="accent1"/>
+          </a:fillRef>
+          <a:effectRef idx="2">
+            <a:schemeClr val="accent1"/>
+          </a:effectRef>
+          <a:fontRef idx="minor">
+            <a:schemeClr val="lt1"/>
+          </a:fontRef>
+        </p:style>
+        <p:txBody>
+          <a:bodyPr rtlCol="0" anchor="ctr" lIns="0" rIns="0" tIns="0" bIns="0"/>
+          <a:lstStyle/>
+          <a:p>
+            <a:pPr algn="ctr"/>
+            <a:r>
+              <a:rPr sz="1800" b="1">
+                <a:solidFill>
+                  <a:srgbClr val="FFFFFF"/>
+                </a:solidFill>
+                <a:latin typeface="Microsoft JhengHei"/>
+              </a:rPr>
+              <a:t>1</a:t>
+            </a:r>
+          </a:p>
+        </p:txBody>
+      </p:sp>
+      <p:sp>
+        <p:nvSpPr>
+          <p:cNvPr id="8" name="TextBox 7"/>
+          <p:cNvSpPr txBox="1"/>
+          <p:nvPr/>
+        </p:nvSpPr>
+        <p:spPr>
+          <a:xfrm>
+            <a:off x="1783080" y="1938528"/>
+            <a:ext cx="3108960" cy="685800"/>
+          </a:xfrm>
+          <a:prstGeom prst="rect">
+            <a:avLst/>
+          </a:prstGeom>
+          <a:noFill/>
+        </p:spPr>
+        <p:txBody>
+          <a:bodyPr wrap="square" anchor="ctr" lIns="0" rIns="0" tIns="0" bIns="0">
+            <a:spAutoFit/>
+          </a:bodyPr>
+          <a:lstStyle/>
+          <a:p>
+            <a:pPr algn="l">
+              <a:lnSpc>
+                <a:spcPct val="110000"/>
+              </a:lnSpc>
+              <a:spcAft>
+                <a:spcPts val="400"/>
+              </a:spcAft>
+            </a:pPr>
+            <a:r>
+              <a:rPr sz="1550" b="1" i="0" lang="zh-TW">
+                <a:solidFill>
+                  <a:srgbClr val="1E293B"/>
+                </a:solidFill>
+                <a:latin typeface="Microsoft JhengHei"/>
+                <a:ea typeface="Microsoft JhengHei"/>
+              </a:rPr>
+              <a:t>回饋單先印好備妥</a:t>
+            </a:r>
+          </a:p>
+        </p:txBody>
+      </p:sp>
+      <p:sp>
+        <p:nvSpPr>
+          <p:cNvPr id="9" name="TextBox 8"/>
+          <p:cNvSpPr txBox="1"/>
+          <p:nvPr/>
+        </p:nvSpPr>
+        <p:spPr>
+          <a:xfrm>
+            <a:off x="5029200" y="1920240"/>
+            <a:ext cx="6309360" cy="731520"/>
+          </a:xfrm>
+          <a:prstGeom prst="rect">
+            <a:avLst/>
+          </a:prstGeom>
+          <a:noFill/>
+        </p:spPr>
+        <p:txBody>
+          <a:bodyPr wrap="square" anchor="ctr" lIns="0" rIns="0" tIns="0" bIns="0">
+            <a:spAutoFit/>
+          </a:bodyPr>
+          <a:lstStyle/>
+          <a:p>
+            <a:pPr algn="l">
+              <a:lnSpc>
+                <a:spcPct val="120000"/>
+              </a:lnSpc>
+              <a:spcAft>
+                <a:spcPts val="400"/>
+              </a:spcAft>
+            </a:pPr>
+            <a:r>
+              <a:rPr sz="1300" b="0" i="0" lang="zh-TW">
+                <a:solidFill>
+                  <a:srgbClr val="1E293B"/>
+                </a:solidFill>
+                <a:latin typeface="Microsoft JhengHei"/>
+                <a:ea typeface="Microsoft JhengHei"/>
+              </a:rPr>
+              <a:t>印 30 份放進社團資料夾（開學就備好，不要拖到期末才想）；期末最後一兩堂課發下去、當場收回</a:t>
+            </a:r>
+          </a:p>
+        </p:txBody>
+      </p:sp>
+      <p:sp>
+        <p:nvSpPr>
+          <p:cNvPr id="10" name="Rounded Rectangle 9"/>
+          <p:cNvSpPr/>
+          <p:nvPr/>
+        </p:nvSpPr>
+        <p:spPr>
+          <a:xfrm>
+            <a:off x="685800" y="2852928"/>
+            <a:ext cx="10835640" cy="896112"/>
+          </a:xfrm>
+          <a:prstGeom prst="roundRect">
+            <a:avLst>
+              <a:gd name="adj" fmla="val 6000"/>
+            </a:avLst>
+          </a:prstGeom>
+          <a:solidFill>
+            <a:srgbClr val="FFFFFF"/>
+          </a:solidFill>
+          <a:ln>
+            <a:noFill/>
+          </a:ln>
+          <a:effectLst/>
+        </p:spPr>
+        <p:style>
+          <a:lnRef idx="1">
+            <a:schemeClr val="accent1"/>
+          </a:lnRef>
+          <a:fillRef idx="3">
+            <a:schemeClr val="accent1"/>
+          </a:fillRef>
+          <a:effectRef idx="2">
+            <a:schemeClr val="accent1"/>
+          </a:effectRef>
+          <a:fontRef idx="minor">
+            <a:schemeClr val="lt1"/>
+          </a:fontRef>
+        </p:style>
+        <p:txBody>
+          <a:bodyPr rtlCol="0" anchor="ctr"/>
+          <a:lstStyle/>
+          <a:p>
+            <a:pPr algn="ctr"/>
+          </a:p>
+        </p:txBody>
+      </p:sp>
+      <p:sp>
+        <p:nvSpPr>
+          <p:cNvPr id="11" name="Oval 10"/>
+          <p:cNvSpPr/>
+          <p:nvPr/>
+        </p:nvSpPr>
+        <p:spPr>
+          <a:xfrm>
+            <a:off x="960120" y="3017520"/>
+            <a:ext cx="566928" cy="566928"/>
+          </a:xfrm>
+          <a:prstGeom prst="ellipse">
+            <a:avLst/>
+          </a:prstGeom>
+          <a:solidFill>
+            <a:srgbClr val="065A82"/>
+          </a:solidFill>
+          <a:ln>
+            <a:noFill/>
+          </a:ln>
+          <a:effectLst/>
+        </p:spPr>
+        <p:style>
+          <a:lnRef idx="1">
+            <a:schemeClr val="accent1"/>
+          </a:lnRef>
+          <a:fillRef idx="3">
+            <a:schemeClr val="accent1"/>
+          </a:fillRef>
+          <a:effectRef idx="2">
+            <a:schemeClr val="accent1"/>
+          </a:effectRef>
+          <a:fontRef idx="minor">
+            <a:schemeClr val="lt1"/>
+          </a:fontRef>
+        </p:style>
+        <p:txBody>
+          <a:bodyPr rtlCol="0" anchor="ctr" lIns="0" rIns="0" tIns="0" bIns="0"/>
+          <a:lstStyle/>
+          <a:p>
+            <a:pPr algn="ctr"/>
+            <a:r>
+              <a:rPr sz="1800" b="1">
+                <a:solidFill>
+                  <a:srgbClr val="FFFFFF"/>
+                </a:solidFill>
+                <a:latin typeface="Microsoft JhengHei"/>
+              </a:rPr>
+              <a:t>2</a:t>
+            </a:r>
+          </a:p>
+        </p:txBody>
+      </p:sp>
+      <p:sp>
+        <p:nvSpPr>
+          <p:cNvPr id="12" name="TextBox 11"/>
+          <p:cNvSpPr txBox="1"/>
+          <p:nvPr/>
+        </p:nvSpPr>
+        <p:spPr>
+          <a:xfrm>
+            <a:off x="1783080" y="2962656"/>
+            <a:ext cx="3108960" cy="685800"/>
+          </a:xfrm>
+          <a:prstGeom prst="rect">
+            <a:avLst/>
+          </a:prstGeom>
+          <a:noFill/>
+        </p:spPr>
+        <p:txBody>
+          <a:bodyPr wrap="square" anchor="ctr" lIns="0" rIns="0" tIns="0" bIns="0">
+            <a:spAutoFit/>
+          </a:bodyPr>
+          <a:lstStyle/>
+          <a:p>
+            <a:pPr algn="l">
+              <a:lnSpc>
+                <a:spcPct val="110000"/>
+              </a:lnSpc>
+              <a:spcAft>
+                <a:spcPts val="400"/>
+              </a:spcAft>
+            </a:pPr>
+            <a:r>
+              <a:rPr sz="1550" b="1" i="0" lang="zh-TW">
+                <a:solidFill>
+                  <a:srgbClr val="1E293B"/>
+                </a:solidFill>
+                <a:latin typeface="Microsoft JhengHei"/>
+                <a:ea typeface="Microsoft JhengHei"/>
+              </a:rPr>
+              <a:t>真名單貼進系統</a:t>
+            </a:r>
+          </a:p>
+        </p:txBody>
+      </p:sp>
+      <p:sp>
+        <p:nvSpPr>
+          <p:cNvPr id="13" name="TextBox 12"/>
+          <p:cNvSpPr txBox="1"/>
+          <p:nvPr/>
+        </p:nvSpPr>
+        <p:spPr>
+          <a:xfrm>
+            <a:off x="5029200" y="2944368"/>
+            <a:ext cx="6309360" cy="731520"/>
+          </a:xfrm>
+          <a:prstGeom prst="rect">
+            <a:avLst/>
+          </a:prstGeom>
+          <a:noFill/>
+        </p:spPr>
+        <p:txBody>
+          <a:bodyPr wrap="square" anchor="ctr" lIns="0" rIns="0" tIns="0" bIns="0">
+            <a:spAutoFit/>
+          </a:bodyPr>
+          <a:lstStyle/>
+          <a:p>
+            <a:pPr algn="l">
+              <a:lnSpc>
+                <a:spcPct val="120000"/>
+              </a:lnSpc>
+              <a:spcAft>
+                <a:spcPts val="400"/>
+              </a:spcAft>
+            </a:pPr>
+            <a:r>
+              <a:rPr sz="1300" b="0" i="0" lang="zh-TW">
+                <a:solidFill>
+                  <a:srgbClr val="1E293B"/>
+                </a:solidFill>
+                <a:latin typeface="Microsoft JhengHei"/>
+                <a:ea typeface="Microsoft JhengHei"/>
+              </a:rPr>
+              <a:t>拿到正式社團名單就貼；第一週上完課就點名、登材料費</a:t>
+            </a:r>
+          </a:p>
+        </p:txBody>
+      </p:sp>
+      <p:sp>
+        <p:nvSpPr>
+          <p:cNvPr id="14" name="Rounded Rectangle 13"/>
+          <p:cNvSpPr/>
+          <p:nvPr/>
+        </p:nvSpPr>
+        <p:spPr>
+          <a:xfrm>
+            <a:off x="685800" y="3877056"/>
+            <a:ext cx="10835640" cy="896112"/>
+          </a:xfrm>
+          <a:prstGeom prst="roundRect">
+            <a:avLst>
+              <a:gd name="adj" fmla="val 6000"/>
+            </a:avLst>
+          </a:prstGeom>
+          <a:solidFill>
+            <a:srgbClr val="FFFFFF"/>
+          </a:solidFill>
+          <a:ln>
+            <a:noFill/>
+          </a:ln>
+          <a:effectLst/>
+        </p:spPr>
+        <p:style>
+          <a:lnRef idx="1">
+            <a:schemeClr val="accent1"/>
+          </a:lnRef>
+          <a:fillRef idx="3">
+            <a:schemeClr val="accent1"/>
+          </a:fillRef>
+          <a:effectRef idx="2">
+            <a:schemeClr val="accent1"/>
+          </a:effectRef>
+          <a:fontRef idx="minor">
+            <a:schemeClr val="lt1"/>
+          </a:fontRef>
+        </p:style>
+        <p:txBody>
+          <a:bodyPr rtlCol="0" anchor="ctr"/>
+          <a:lstStyle/>
+          <a:p>
+            <a:pPr algn="ctr"/>
+          </a:p>
+        </p:txBody>
+      </p:sp>
+      <p:sp>
+        <p:nvSpPr>
+          <p:cNvPr id="15" name="Oval 14"/>
+          <p:cNvSpPr/>
+          <p:nvPr/>
+        </p:nvSpPr>
+        <p:spPr>
+          <a:xfrm>
+            <a:off x="960120" y="4041648"/>
+            <a:ext cx="566928" cy="566928"/>
+          </a:xfrm>
+          <a:prstGeom prst="ellipse">
+            <a:avLst/>
+          </a:prstGeom>
+          <a:solidFill>
+            <a:srgbClr val="2E7D5B"/>
+          </a:solidFill>
+          <a:ln>
+            <a:noFill/>
+          </a:ln>
+          <a:effectLst/>
+        </p:spPr>
+        <p:style>
+          <a:lnRef idx="1">
+            <a:schemeClr val="accent1"/>
+          </a:lnRef>
+          <a:fillRef idx="3">
+            <a:schemeClr val="accent1"/>
+          </a:fillRef>
+          <a:effectRef idx="2">
+            <a:schemeClr val="accent1"/>
+          </a:effectRef>
+          <a:fontRef idx="minor">
+            <a:schemeClr val="lt1"/>
+          </a:fontRef>
+        </p:style>
+        <p:txBody>
+          <a:bodyPr rtlCol="0" anchor="ctr" lIns="0" rIns="0" tIns="0" bIns="0"/>
+          <a:lstStyle/>
+          <a:p>
+            <a:pPr algn="ctr"/>
+            <a:r>
+              <a:rPr sz="1800" b="1">
+                <a:solidFill>
+                  <a:srgbClr val="FFFFFF"/>
+                </a:solidFill>
+                <a:latin typeface="Microsoft JhengHei"/>
+              </a:rPr>
+              <a:t>3</a:t>
+            </a:r>
+          </a:p>
+        </p:txBody>
+      </p:sp>
+      <p:sp>
+        <p:nvSpPr>
+          <p:cNvPr id="16" name="TextBox 15"/>
+          <p:cNvSpPr txBox="1"/>
+          <p:nvPr/>
+        </p:nvSpPr>
+        <p:spPr>
+          <a:xfrm>
+            <a:off x="1783080" y="3986784"/>
+            <a:ext cx="3108960" cy="685800"/>
+          </a:xfrm>
+          <a:prstGeom prst="rect">
+            <a:avLst/>
+          </a:prstGeom>
+          <a:noFill/>
+        </p:spPr>
+        <p:txBody>
+          <a:bodyPr wrap="square" anchor="ctr" lIns="0" rIns="0" tIns="0" bIns="0">
+            <a:spAutoFit/>
+          </a:bodyPr>
+          <a:lstStyle/>
+          <a:p>
+            <a:pPr algn="l">
+              <a:lnSpc>
+                <a:spcPct val="110000"/>
+              </a:lnSpc>
+              <a:spcAft>
+                <a:spcPts val="400"/>
+              </a:spcAft>
+            </a:pPr>
+            <a:r>
+              <a:rPr sz="1550" b="1" i="0" lang="zh-TW">
+                <a:solidFill>
+                  <a:srgbClr val="1E293B"/>
+                </a:solidFill>
+                <a:latin typeface="Microsoft JhengHei"/>
+                <a:ea typeface="Microsoft JhengHei"/>
+              </a:rPr>
+              <a:t>跟出納對一次</a:t>
+            </a:r>
+          </a:p>
+        </p:txBody>
+      </p:sp>
+      <p:sp>
+        <p:nvSpPr>
+          <p:cNvPr id="17" name="TextBox 16"/>
+          <p:cNvSpPr txBox="1"/>
+          <p:nvPr/>
+        </p:nvSpPr>
+        <p:spPr>
+          <a:xfrm>
+            <a:off x="5029200" y="3968496"/>
+            <a:ext cx="6309360" cy="731520"/>
+          </a:xfrm>
+          <a:prstGeom prst="rect">
+            <a:avLst/>
+          </a:prstGeom>
+          <a:noFill/>
+        </p:spPr>
+        <p:txBody>
+          <a:bodyPr wrap="square" anchor="ctr" lIns="0" rIns="0" tIns="0" bIns="0">
+            <a:spAutoFit/>
+          </a:bodyPr>
+          <a:lstStyle/>
+          <a:p>
+            <a:pPr algn="l">
+              <a:lnSpc>
+                <a:spcPct val="120000"/>
+              </a:lnSpc>
+              <a:spcAft>
+                <a:spcPts val="400"/>
+              </a:spcAft>
+            </a:pPr>
+            <a:r>
+              <a:rPr sz="1300" b="0" i="0" lang="zh-TW">
+                <a:solidFill>
+                  <a:srgbClr val="1E293B"/>
+                </a:solidFill>
+                <a:latin typeface="Microsoft JhengHei"/>
+                <a:ea typeface="Microsoft JhengHei"/>
+              </a:rPr>
+              <a:t>拿「三個地雷」那頁去聊 10 分鐘，確認校內格式怎麼套</a:t>
+            </a:r>
+          </a:p>
+        </p:txBody>
+      </p:sp>
+      <p:sp>
+        <p:nvSpPr>
+          <p:cNvPr id="18" name="Rounded Rectangle 17"/>
+          <p:cNvSpPr/>
+          <p:nvPr/>
+        </p:nvSpPr>
+        <p:spPr>
+          <a:xfrm>
+            <a:off x="685800" y="4901184"/>
+            <a:ext cx="10835640" cy="896112"/>
+          </a:xfrm>
+          <a:prstGeom prst="roundRect">
+            <a:avLst>
+              <a:gd name="adj" fmla="val 6000"/>
+            </a:avLst>
+          </a:prstGeom>
+          <a:solidFill>
+            <a:srgbClr val="FFFFFF"/>
+          </a:solidFill>
+          <a:ln>
+            <a:noFill/>
+          </a:ln>
+          <a:effectLst/>
+        </p:spPr>
+        <p:style>
+          <a:lnRef idx="1">
+            <a:schemeClr val="accent1"/>
+          </a:lnRef>
+          <a:fillRef idx="3">
+            <a:schemeClr val="accent1"/>
+          </a:fillRef>
+          <a:effectRef idx="2">
+            <a:schemeClr val="accent1"/>
+          </a:effectRef>
+          <a:fontRef idx="minor">
+            <a:schemeClr val="lt1"/>
+          </a:fontRef>
+        </p:style>
+        <p:txBody>
+          <a:bodyPr rtlCol="0" anchor="ctr"/>
+          <a:lstStyle/>
+          <a:p>
+            <a:pPr algn="ctr"/>
+          </a:p>
+        </p:txBody>
+      </p:sp>
+      <p:sp>
+        <p:nvSpPr>
+          <p:cNvPr id="19" name="Oval 18"/>
+          <p:cNvSpPr/>
+          <p:nvPr/>
+        </p:nvSpPr>
+        <p:spPr>
+          <a:xfrm>
+            <a:off x="960120" y="5065776"/>
+            <a:ext cx="566928" cy="566928"/>
+          </a:xfrm>
+          <a:prstGeom prst="ellipse">
+            <a:avLst/>
+          </a:prstGeom>
+          <a:solidFill>
+            <a:srgbClr val="C99A3E"/>
+          </a:solidFill>
+          <a:ln>
+            <a:noFill/>
+          </a:ln>
+          <a:effectLst/>
+        </p:spPr>
+        <p:style>
+          <a:lnRef idx="1">
+            <a:schemeClr val="accent1"/>
+          </a:lnRef>
+          <a:fillRef idx="3">
+            <a:schemeClr val="accent1"/>
+          </a:fillRef>
+          <a:effectRef idx="2">
+            <a:schemeClr val="accent1"/>
+          </a:effectRef>
+          <a:fontRef idx="minor">
+            <a:schemeClr val="lt1"/>
+          </a:fontRef>
+        </p:style>
+        <p:txBody>
+          <a:bodyPr rtlCol="0" anchor="ctr" lIns="0" rIns="0" tIns="0" bIns="0"/>
+          <a:lstStyle/>
+          <a:p>
+            <a:pPr algn="ctr"/>
+            <a:r>
+              <a:rPr sz="1800" b="1">
+                <a:solidFill>
+                  <a:srgbClr val="FFFFFF"/>
+                </a:solidFill>
+                <a:latin typeface="Microsoft JhengHei"/>
+              </a:rPr>
+              <a:t>4</a:t>
+            </a:r>
+          </a:p>
+        </p:txBody>
+      </p:sp>
+      <p:sp>
+        <p:nvSpPr>
+          <p:cNvPr id="20" name="TextBox 19"/>
+          <p:cNvSpPr txBox="1"/>
+          <p:nvPr/>
+        </p:nvSpPr>
+        <p:spPr>
+          <a:xfrm>
+            <a:off x="1783080" y="5010912"/>
+            <a:ext cx="3108960" cy="685800"/>
+          </a:xfrm>
+          <a:prstGeom prst="rect">
+            <a:avLst/>
+          </a:prstGeom>
+          <a:noFill/>
+        </p:spPr>
+        <p:txBody>
+          <a:bodyPr wrap="square" anchor="ctr" lIns="0" rIns="0" tIns="0" bIns="0">
+            <a:spAutoFit/>
+          </a:bodyPr>
+          <a:lstStyle/>
+          <a:p>
+            <a:pPr algn="l">
+              <a:lnSpc>
+                <a:spcPct val="110000"/>
+              </a:lnSpc>
+              <a:spcAft>
+                <a:spcPts val="400"/>
+              </a:spcAft>
+            </a:pPr>
+            <a:r>
+              <a:rPr sz="1550" b="1" i="0" lang="zh-TW">
+                <a:solidFill>
+                  <a:srgbClr val="1E293B"/>
+                </a:solidFill>
+                <a:latin typeface="Microsoft JhengHei"/>
+                <a:ea typeface="Microsoft JhengHei"/>
+              </a:rPr>
+              <a:t>確認影像同意書範圍</a:t>
+            </a:r>
+          </a:p>
+        </p:txBody>
+      </p:sp>
+      <p:sp>
+        <p:nvSpPr>
+          <p:cNvPr id="21" name="TextBox 20"/>
+          <p:cNvSpPr txBox="1"/>
+          <p:nvPr/>
+        </p:nvSpPr>
+        <p:spPr>
+          <a:xfrm>
+            <a:off x="5029200" y="4992624"/>
+            <a:ext cx="6309360" cy="731520"/>
+          </a:xfrm>
+          <a:prstGeom prst="rect">
+            <a:avLst/>
+          </a:prstGeom>
+          <a:noFill/>
+        </p:spPr>
+        <p:txBody>
+          <a:bodyPr wrap="square" anchor="ctr" lIns="0" rIns="0" tIns="0" bIns="0">
+            <a:spAutoFit/>
+          </a:bodyPr>
+          <a:lstStyle/>
+          <a:p>
+            <a:pPr algn="l">
+              <a:lnSpc>
+                <a:spcPct val="120000"/>
+              </a:lnSpc>
+              <a:spcAft>
+                <a:spcPts val="400"/>
+              </a:spcAft>
+            </a:pPr>
+            <a:r>
+              <a:rPr sz="1300" b="0" i="0" lang="zh-TW">
+                <a:solidFill>
+                  <a:srgbClr val="1E293B"/>
+                </a:solidFill>
+                <a:latin typeface="Microsoft JhengHei"/>
+                <a:ea typeface="Microsoft JhengHei"/>
+              </a:rPr>
+              <a:t>問學校既有「個資蒐集告知暨同意書」是否涵蓋「提供校外單位作成果報告」；沒涵蓋隨報名表補發；沒回條的孩子拍背影或手部特寫</a:t>
+            </a:r>
+          </a:p>
+        </p:txBody>
+      </p:sp>
+      <p:sp>
+        <p:nvSpPr>
+          <p:cNvPr id="22" name="TextBox 21"/>
+          <p:cNvSpPr txBox="1"/>
+          <p:nvPr/>
+        </p:nvSpPr>
+        <p:spPr>
+          <a:xfrm>
+            <a:off x="685800" y="5998464"/>
+            <a:ext cx="10835640" cy="457200"/>
+          </a:xfrm>
+          <a:prstGeom prst="rect">
+            <a:avLst/>
+          </a:prstGeom>
+          <a:noFill/>
+        </p:spPr>
+        <p:txBody>
+          <a:bodyPr wrap="square" anchor="t" lIns="0" rIns="0" tIns="0" bIns="0">
+            <a:spAutoFit/>
+          </a:bodyPr>
+          <a:lstStyle/>
+          <a:p>
+            <a:pPr algn="l">
+              <a:lnSpc>
+                <a:spcPct val="120000"/>
+              </a:lnSpc>
+              <a:spcAft>
+                <a:spcPts val="400"/>
+              </a:spcAft>
+            </a:pPr>
+            <a:r>
+              <a:rPr sz="1300" b="1" i="0" lang="zh-TW">
+                <a:solidFill>
+                  <a:srgbClr val="B43B3B"/>
+                </a:solidFill>
+                <a:latin typeface="Microsoft JhengHei"/>
+                <a:ea typeface="Microsoft JhengHei"/>
+              </a:rPr>
+              <a:t>⚠ 電腦送修、歸還、借人前：</a:t>
+            </a:r>
+            <a:r>
+              <a:rPr sz="1300" b="0" i="0" lang="zh-TW">
+                <a:solidFill>
+                  <a:srgbClr val="1E293B"/>
+                </a:solidFill>
+                <a:latin typeface="Microsoft JhengHei"/>
+                <a:ea typeface="Microsoft JhengHei"/>
+              </a:rPr>
+              <a:t>先按「匯出備份」存好 .json，再按「清除全部資料」——名單存在瀏覽器裡，光刪 HTML 檔沒用。</a:t>
+            </a:r>
+          </a:p>
+        </p:txBody>
+      </p:sp>
+      <p:sp>
+        <p:nvSpPr>
+          <p:cNvPr id="23" name="TextBox 22"/>
+          <p:cNvSpPr txBox="1"/>
+          <p:nvPr/>
+        </p:nvSpPr>
+        <p:spPr>
+          <a:xfrm>
+            <a:off x="502920" y="6473952"/>
+            <a:ext cx="8229600" cy="274320"/>
+          </a:xfrm>
+          <a:prstGeom prst="rect">
+            <a:avLst/>
+          </a:prstGeom>
+          <a:noFill/>
+        </p:spPr>
+        <p:txBody>
+          <a:bodyPr wrap="square" anchor="t" lIns="0" rIns="0" tIns="0" bIns="0">
+            <a:spAutoFit/>
+          </a:bodyPr>
+          <a:lstStyle/>
+          <a:p>
+            <a:pPr algn="l">
+              <a:lnSpc>
+                <a:spcPct val="115000"/>
+              </a:lnSpc>
+              <a:spcAft>
+                <a:spcPts val="400"/>
+              </a:spcAft>
+            </a:pPr>
+            <a:r>
+              <a:rPr sz="1000" b="0" i="0" lang="zh-TW">
+                <a:solidFill>
+                  <a:srgbClr val="64748B"/>
+                </a:solidFill>
+                <a:latin typeface="Microsoft JhengHei"/>
+                <a:ea typeface="Microsoft JhengHei"/>
+              </a:rPr>
+              <a:t>仰望教育基金會 × 國立東華大學｜花蓮地區科學社團教師研習 2026/8/19</a:t>
+            </a:r>
+          </a:p>
+        </p:txBody>
+      </p:sp>
+      <p:sp>
+        <p:nvSpPr>
+          <p:cNvPr id="24" name="TextBox 23"/>
+          <p:cNvSpPr txBox="1"/>
+          <p:nvPr/>
+        </p:nvSpPr>
+        <p:spPr>
+          <a:xfrm>
+            <a:off x="10820095" y="6473952"/>
+            <a:ext cx="914400" cy="274320"/>
+          </a:xfrm>
+          <a:prstGeom prst="rect">
+            <a:avLst/>
+          </a:prstGeom>
+          <a:noFill/>
+        </p:spPr>
+        <p:txBody>
+          <a:bodyPr wrap="square" anchor="t" lIns="0" rIns="0" tIns="0" bIns="0">
+            <a:spAutoFit/>
+          </a:bodyPr>
+          <a:lstStyle/>
+          <a:p>
+            <a:pPr algn="r">
+              <a:lnSpc>
+                <a:spcPct val="115000"/>
+              </a:lnSpc>
+              <a:spcAft>
+                <a:spcPts val="400"/>
+              </a:spcAft>
+            </a:pPr>
+            <a:r>
+              <a:rPr sz="1000" b="0" i="0" lang="zh-TW">
+                <a:solidFill>
+                  <a:srgbClr val="64748B"/>
+                </a:solidFill>
+                <a:latin typeface="Microsoft JhengHei"/>
+                <a:ea typeface="Microsoft JhengHei"/>
+              </a:rPr>
+              <a:t>25 / 26</a:t>
+            </a:r>
+          </a:p>
+        </p:txBody>
+      </p:sp>
+    </p:spTree>
+  </p:cSld>
+  <p:clrMapOvr>
+    <a:masterClrMapping/>
+  </p:clrMapOvr>
+</p:sld>
+</file>
+
+<file path=ppt/slides/slide26.xml><?xml version="1.0" encoding="utf-8"?>
+<p:sld xmlns:a="http://schemas.openxmlformats.org/drawingml/2006/main" xmlns:p="http://schemas.openxmlformats.org/presentationml/2006/main" xmlns:r="http://schemas.openxmlformats.org/officeDocument/2006/relationships">
+  <p:cSld>
+    <p:spTree>
+      <p:nvGrpSpPr>
+        <p:cNvPr id="1" name=""/>
+        <p:cNvGrpSpPr/>
+        <p:nvPr/>
+      </p:nvGrpSpPr>
+      <p:grpSpPr/>
+      <p:sp>
+        <p:nvSpPr>
+          <p:cNvPr id="2" name="Rectangle 1"/>
+          <p:cNvSpPr/>
+          <p:nvPr/>
+        </p:nvSpPr>
+        <p:spPr>
+          <a:xfrm>
+            <a:off x="0" y="0"/>
+            <a:ext cx="12191695" cy="6858000"/>
+          </a:xfrm>
+          <a:prstGeom prst="rect">
+            <a:avLst/>
+          </a:prstGeom>
+          <a:solidFill>
             <a:srgbClr val="0B1F3A"/>
           </a:solidFill>
           <a:ln>
@@ -24481,7 +25437,7 @@
                 <a:latin typeface="Microsoft JhengHei"/>
                 <a:ea typeface="Microsoft JhengHei"/>
               </a:rPr>
-              <a:t>3 / 25</a:t>
+              <a:t>3 / 26</a:t>
             </a:r>
           </a:p>
         </p:txBody>
@@ -25314,7 +26270,7 @@
                 <a:latin typeface="Microsoft JhengHei"/>
                 <a:ea typeface="Microsoft JhengHei"/>
               </a:rPr>
-              <a:t>先做回饋單（動手一）：它是四個百分比唯一的來源，開學第一堂課就要發下去。</a:t>
+              <a:t>先做回饋單（動手一）：它是四個百分比唯一的來源，學期初就要準備好，期末發下去、當場收回。</a:t>
             </a:r>
           </a:p>
           <a:p>
@@ -25480,7 +26436,7 @@
                 <a:latin typeface="Microsoft JhengHei"/>
                 <a:ea typeface="Microsoft JhengHei"/>
               </a:rPr>
-              <a:t>4 / 25</a:t>
+              <a:t>4 / 26</a:t>
             </a:r>
           </a:p>
         </p:txBody>
@@ -26826,7 +27782,7 @@
                 <a:latin typeface="Microsoft JhengHei"/>
                 <a:ea typeface="Microsoft JhengHei"/>
               </a:rPr>
-              <a:t>5 / 25</a:t>
+              <a:t>5 / 26</a:t>
             </a:r>
           </a:p>
         </p:txBody>
@@ -27970,7 +28926,7 @@
                 <a:latin typeface="Microsoft JhengHei"/>
                 <a:ea typeface="Microsoft JhengHei"/>
               </a:rPr>
-              <a:t>6 / 25</a:t>
+              <a:t>6 / 26</a:t>
             </a:r>
           </a:p>
         </p:txBody>
@@ -29077,7 +30033,7 @@
                 <a:latin typeface="Microsoft JhengHei"/>
                 <a:ea typeface="Microsoft JhengHei"/>
               </a:rPr>
-              <a:t>7 / 25</a:t>
+              <a:t>7 / 26</a:t>
             </a:r>
           </a:p>
         </p:txBody>
@@ -29959,7 +30915,7 @@
                 <a:latin typeface="Microsoft JhengHei"/>
                 <a:ea typeface="Microsoft JhengHei"/>
               </a:rPr>
-              <a:t>8 / 25</a:t>
+              <a:t>8 / 26</a:t>
             </a:r>
           </a:p>
         </p:txBody>
@@ -30546,7 +31502,7 @@
                 <a:latin typeface="Microsoft JhengHei"/>
                 <a:ea typeface="Microsoft JhengHei"/>
               </a:rPr>
-              <a:t>（很同意＋同意）人數 ÷ 回收總數 ＝ 該項百分比</a:t>
+              <a:t>（很同意＋同意）人數 ÷ 回收份數（實際收回的份數，不是全班人數）</a:t>
             </a:r>
           </a:p>
         </p:txBody>
@@ -30897,7 +31853,7 @@
                 <a:latin typeface="Microsoft JhengHei"/>
                 <a:ea typeface="Microsoft JhengHei"/>
               </a:rPr>
-              <a:t>9 / 25</a:t>
+              <a:t>9 / 26</a:t>
             </a:r>
           </a:p>
         </p:txBody>

--- a/part2-豐兆/20260819仰望研習主講_從零打造社團管理系統_游豐兆.pptx
+++ b/part2-豐兆/20260819仰望研習主講_從零打造社團管理系統_游豐兆.pptx
@@ -887,7 +887,12 @@
           <a:lstStyle/>
           <a:p>
             <a:r>
-              <a:t>時間：11:12-11:14（2分半）</a:t>
+              <a:t>時間：11:12-11:14（2分半＋紅線30秒）</a:t>
+            </a:r>
+          </a:p>
+          <a:p>
+            <a:r>
+              <a:t>第四顆地雷花三十秒講：身分證字號、戶籍住址、匯款帳號，這三樣不貼進任何 AI、也不放雲端，只在學校的紙本表上寫——核銷印領清冊那兩欄本來就是手寫欄位，不要把它數位化。AI 幫你算的是時數、份數、金額，不碰身分資料。系統的核銷分頁抬頭印著同一句，回去會一直看到。</a:t>
             </a:r>
           </a:p>
           <a:p>
@@ -1187,12 +1192,12 @@
           </a:p>
           <a:p>
             <a:r>
-              <a:t>來對一下帳。學校承接這個專案，一年下來要生出的文件大概九類，這張地圖告訴你每一份從哪來。</a:t>
-            </a:r>
-          </a:p>
-          <a:p>
-            <a:r>
-              <a:t>左邊五份，系統已經內建：課程規劃表、簽到表、回饋單、時數表、核銷對帳。這五份今天就在你電腦裡了，要用的時候按列印就好。</a:t>
+              <a:t>來對一下帳。學校承接這個專案，一年下來要生出的文件，這張地圖告訴你每一份從哪來。</a:t>
+            </a:r>
+          </a:p>
+          <a:p>
+            <a:r>
+              <a:t>左邊七份，系統已經內建：課程規劃表和時數表在課程規劃分頁；學生名單也就是附件一，名單分頁直接列印；簽到表在教室日誌；回饋單自己一個分頁；課程紀錄——就是剛剛示範的每週文字加照片檔名——也在教室日誌，列印出來就是「參」的初稿；核銷對帳一個分頁；最後總覽還有一顆「成果報告書素材頁」，把壹和肆一鍵印出。這七份今天就在你電腦裡了，要用的時候按列印就好。</a:t>
             </a:r>
           </a:p>
           <a:p>
@@ -1467,17 +1472,17 @@
           </a:p>
           <a:p>
             <a:r>
-              <a:t>第壹節基本資料，系統總覽抄下來，三十秒。第貳節課程規劃表，列印或匯出，一分鐘。第參節課程紀錄，兩大項各一段文字加六張照片——文字用卡片四請 AI 照著照片寫，等一下講怎麼防它亂編。</a:t>
-            </a:r>
-          </a:p>
-          <a:p>
-            <a:r>
-              <a:t>第肆節，效益達成情形，就是折磨大家的七個百分比——注意，這時候總覽儀表板上七個數字全部已經自動算好了，你的工作是抄數字。想想看：別的學校期末在翻一整年的點名紙加計算機，你打開網頁抄七個數字。</a:t>
-            </a:r>
-          </a:p>
-          <a:p>
-            <a:r>
-              <a:t>第伍節結論與建議，材料就是回饋單那題開放題，學生最喜歡哪堂課、為什麼，加上你自己的觀察，請 ChatGPT 潤成兩段。第陸節附件，名單、出席總表、回饋單，系統匯出三個檔案。</a:t>
+              <a:t>第壹節基本資料，到總覽按「列印成果報告書素材頁」，學校、社團、學年度、兩位指導老師一鍵印出，三十秒。第貳節課程規劃表，列印或匯出，時數欄都在上面，一分鐘。第參節課程紀錄——如果你每週有在教室日誌填那格「本週課程紀錄」，按「列印課程紀錄」出來的就是初稿；圖說用卡片四請 AI 照著照片寫，等一下講怎麼防它亂編。</a:t>
+            </a:r>
+          </a:p>
+          <a:p>
+            <a:r>
+              <a:t>第肆節，效益達成情形，就是折磨大家的七個百分比——同一張素材頁上七個數字全部自動算好，而且每個數字後面帶著來源和分母，例如「回收 17 份：很同意 8＋同意 6」。別的學校期末在翻一整年的點名紙加計算機，你印一張 A4 照抄。</a:t>
+            </a:r>
+          </a:p>
+          <a:p>
+            <a:r>
+              <a:t>第伍節結論與建議，材料就在回饋單分頁最下面那個「第 5 題彙整框」——學生最喜歡哪堂課、為什麼，平常抄進去，期末加上你的觀察，請 ChatGPT 潤成兩段；素材頁也會把它一起印出來。第陸節附件，名單用列印（座號 01 才不會被 Excel 吃掉）、出席總表 CSV、回饋單，系統出。</a:t>
             </a:r>
           </a:p>
           <a:p>
@@ -1827,7 +1832,7 @@
           </a:p>
           <a:p>
             <a:r>
-              <a:t>清點行李。第一，你們學校專屬版的系統加上備份檔，網址也在投影片上，回去重新下載永遠拿得到。第二，兩份你自己做的文件，回饋單和你挑的那份表單，都驗收過了。第三，五張提示詞卡，從出規格、做檔案、萬用模板、寫圖說到驗收，一整套流程的口令都在裡面，共用資料夾有純文字版，複製就能用。第四，參考資源和投稿機會——名額、義務、網址下一頁專頁講，這裡先不展開。</a:t>
+              <a:t>清點行李。第一，你們學校專屬版的系統加上備份檔，網址也在投影片上，回去重新下載永遠拿得到。第二，兩份你自己做的文件，回饋單和你挑的那份表單，都驗收過了。第三，五張提示詞卡，從出規格、做檔案、萬用模板、寫圖說到驗收，一整套流程的口令都在裡面——全文放在系統網站的 prompts 頁，每張卡都有「複製」鍵，畫面上有網址，共用資料夾也有一份。第四，參考資源和投稿機會——名額、義務、網址下一頁專頁講，這裡先不展開。</a:t>
             </a:r>
           </a:p>
         </p:txBody>
@@ -2177,7 +2182,7 @@
           </a:p>
           <a:p>
             <a:r>
-              <a:t>最後一分鐘，講一句真心話。今天大家覺得自己是新手，我查過基金會的公告，上面寫的是「試辦」——全台十九所學校，今年通通是第一年。不是你們落後，是這條路大家一起在鋪。而且各位今天已經走在前面了：你們是全台第一批用 AI 把整套社團管理做起來的老師。</a:t>
+              <a:t>最後一分鐘，講一句真心話。今天大家覺得自己是新手，我查過基金會的公告，上面寫的是「試辦」——今年參與的學校全台大概二十所，通通是第一年。不是你們落後，是這條路大家一起在鋪。而且各位今天已經走在前面了：你們是全台第一批用 AI 把整套社團管理做起來的老師。</a:t>
             </a:r>
           </a:p>
           <a:p>
@@ -2437,47 +2442,47 @@
           </a:p>
           <a:p>
             <a:r>
-              <a:t>【示範動作】投影機切到瀏覽器，開 rlirdo.github.io/yangwang-club-manager，照投影片順序走五個分頁，邊點邊講。</a:t>
-            </a:r>
-          </a:p>
-          <a:p>
-            <a:r>
-              <a:t>口播參考：這就是今天的主角。先看總覽，上面七張卡片就是剛剛講的七個百分比，現在是空的，等資料進來它自己會算。下面是結案要交的文件清單，做完一項勾一項，期末就不會漏。</a:t>
-            </a:r>
-          </a:p>
-          <a:p>
-            <a:r>
-              <a:t>第二個分頁，學生名單。我從 Excel 複製十五個學生，注意看，直接貼上、按匯入，十五個人進來了，座號、班級、姓名它自己會分。</a:t>
-            </a:r>
-          </a:p>
-          <a:p>
-            <a:r>
-              <a:t>第三，教室日誌。選第一週，按全到，然後點兩個學生改成缺席和請假。看下面這一行：本週出席十三人，加老師兩位，材料費十五份。點完名，材料要買幾份當場就知道，這就是把核銷和出席綁在一起。</a:t>
-            </a:r>
-          </a:p>
-          <a:p>
-            <a:r>
-              <a:t>第四，回饋單分頁。這顆按鈕印出來的空白單就是發給學生的；期末回收之後，把每一題勾選的人數填進來，四個百分比自動出現在總覽。</a:t>
-            </a:r>
-          </a:p>
-          <a:p>
-            <a:r>
-              <a:t>第五，經費核銷。登記一筆材料費，選對應週次，系統自己對：份數跟出席對不對得起來、上下期有沒有搞錯。</a:t>
-            </a:r>
-          </a:p>
-          <a:p>
-            <a:r>
-              <a:t>最後看備份分頁：匯出備份，一個檔案，存隨身碟。資料只在你電腦裡，不會上傳到任何地方。</a:t>
-            </a:r>
-          </a:p>
-          <a:p>
-            <a:r>
-              <a:t>示範點名時明講這句：口訣是「先按『全到』，再改掉沒來的」——而且系統進到每一週已經幫你預設全到了。</a:t>
-            </a:r>
-          </a:p>
-          <a:p>
-            <a:r>
-              <a:t>另外先埋一個重要提醒，等動手二會再講一次：線上版（github.io）和存到桌面的檔案（file://）是兩個不同的儲存空間，資料不互通。今天上課統一用桌面那一份。</a:t>
+              <a:t>【示範動作】投影機切到瀏覽器，開 rlirdo.github.io/yangwang-club-manager，照投影片順序走六個分頁，邊點邊講。</a:t>
+            </a:r>
+          </a:p>
+          <a:p>
+            <a:r>
+              <a:t>口播參考：這就是今天的主角。第一個分頁，總覽。上面七張卡片就是剛剛講的七個百分比，現在是空的，等資料進來它自己會算；中間是結案要交的十二項文件追蹤，做完一項勾一項；旁邊有一顆「列印成果報告書素材頁」，期末把基本資料和七個數字一鍵印成一張 A4。</a:t>
+            </a:r>
+          </a:p>
+          <a:p>
+            <a:r>
+              <a:t>第二，學生名單。我從 Excel 複製十五個學生，連標題列一起框到也沒關係——直接貼上、按匯入，它會說「匯入 15 位，第 1 列看起來像標題列，已略過」。要交附件一，按「列印學生名單」。</a:t>
+            </a:r>
+          </a:p>
+          <a:p>
+            <a:r>
+              <a:t>第三，課程規劃表。上午跟文盛老師做的二十四週表就貼在這裡；週數不是寫死的——豐山排二十八週，到總覽把總週數改成 28 就多出四列；每一週還有「時數」欄，預設 2、可以改 3，時數表會照實加總，鐘點費才不會少報。</a:t>
+            </a:r>
+          </a:p>
+          <a:p>
+            <a:r>
+              <a:t>第四，教室日誌。選第一週——注意，進去就已經預設全到，口訣是「先按『全到』，再改掉沒來的」。我把兩個學生改成缺席和請假，看下面這行：本週出席十三人，加老師兩位，材料費十五份。點到一半漏人，它會紅字警告你「還有幾位未點名」。同一頁下面是「本週課程紀錄」：一段文字加照片檔名和圖說，這就是期末報告「參」的素材，有一顆專屬的列印鍵。</a:t>
+            </a:r>
+          </a:p>
+          <a:p>
+            <a:r>
+              <a:t>第五，學生回饋單。這顆按鈕印出來的空白單就是發給學生的；期末回收後把每一題人數填進來，百分比自動算，而且它會勾稽：合計超過回收份數會紅字叫你檢查。最下面有第 5 題開放作答的彙整框，寫「伍」的時候直接取材。</a:t>
+            </a:r>
+          </a:p>
+          <a:p>
+            <a:r>
+              <a:t>第六，經費核銷。抬頭那行紅字先唸一次：身分證字號、戶籍住址、匯款帳號不貼進任何 AI。登記一筆材料費，選對應週次——或選「整學期／未指定」，對帳表會用全期合計去比；上下期它也自動判別。</a:t>
+            </a:r>
+          </a:p>
+          <a:p>
+            <a:r>
+              <a:t>最後看「備份與設定」：匯出備份，一個檔案，存學校配發的隨身碟。資料只在你電腦裡，不會上傳到任何地方。</a:t>
+            </a:r>
+          </a:p>
+          <a:p>
+            <a:r>
+              <a:t>先埋一個重要提醒，動手二會再講一次：線上版（github.io）和桌面檔（file://）資料不互通，今天統一用桌面那一份。</a:t>
             </a:r>
           </a:p>
           <a:p>
@@ -9500,8 +9505,8 @@
         </p:nvSpPr>
         <p:spPr>
           <a:xfrm>
-            <a:off x="685800" y="1874519"/>
-            <a:ext cx="3520440" cy="3017520"/>
+            <a:off x="685800" y="1828800"/>
+            <a:ext cx="3520440" cy="2743200"/>
           </a:xfrm>
           <a:prstGeom prst="roundRect">
             <a:avLst>
@@ -9546,8 +9551,8 @@
         </p:nvSpPr>
         <p:spPr>
           <a:xfrm>
-            <a:off x="960120" y="2148839"/>
-            <a:ext cx="566928" cy="566928"/>
+            <a:off x="960120" y="2066544"/>
+            <a:ext cx="530352" cy="530352"/>
           </a:xfrm>
           <a:prstGeom prst="ellipse">
             <a:avLst/>
@@ -9580,7 +9585,7 @@
           <a:p>
             <a:pPr algn="ctr"/>
             <a:r>
-              <a:rPr sz="2200" b="1">
+              <a:rPr sz="2000" b="1">
                 <a:solidFill>
                   <a:srgbClr val="FFFFFF"/>
                 </a:solidFill>
@@ -9599,8 +9604,8 @@
         </p:nvSpPr>
         <p:spPr>
           <a:xfrm>
-            <a:off x="1691640" y="2221991"/>
-            <a:ext cx="2331720" cy="457200"/>
+            <a:off x="1645920" y="2130552"/>
+            <a:ext cx="2377440" cy="457200"/>
           </a:xfrm>
           <a:prstGeom prst="rect">
             <a:avLst/>
@@ -9622,7 +9627,7 @@
               </a:spcAft>
             </a:pPr>
             <a:r>
-              <a:rPr sz="1700" b="1" i="0" lang="zh-TW">
+              <a:rPr sz="1650" b="1" i="0" lang="zh-TW">
                 <a:solidFill>
                   <a:srgbClr val="1E293B"/>
                 </a:solidFill>
@@ -9642,8 +9647,8 @@
         </p:nvSpPr>
         <p:spPr>
           <a:xfrm>
-            <a:off x="960120" y="2926079"/>
-            <a:ext cx="2971800" cy="1188720"/>
+            <a:off x="960120" y="2761488"/>
+            <a:ext cx="2971800" cy="1143000"/>
           </a:xfrm>
           <a:prstGeom prst="rect">
             <a:avLst/>
@@ -9658,14 +9663,14 @@
           <a:p>
             <a:pPr algn="l">
               <a:lnSpc>
-                <a:spcPct val="125000"/>
-              </a:lnSpc>
-              <a:spcAft>
-                <a:spcPts val="400"/>
-              </a:spcAft>
-            </a:pPr>
-            <a:r>
-              <a:rPr sz="1450" b="0" i="0" lang="zh-TW">
+                <a:spcPct val="122000"/>
+              </a:lnSpc>
+              <a:spcAft>
+                <a:spcPts val="400"/>
+              </a:spcAft>
+            </a:pPr>
+            <a:r>
+              <a:rPr sz="1400" b="0" i="0" lang="zh-TW">
                 <a:solidFill>
                   <a:srgbClr val="1E293B"/>
                 </a:solidFill>
@@ -9685,8 +9690,8 @@
         </p:nvSpPr>
         <p:spPr>
           <a:xfrm>
-            <a:off x="960120" y="4160519"/>
-            <a:ext cx="2971800" cy="640080"/>
+            <a:off x="960120" y="3931920"/>
+            <a:ext cx="2971800" cy="594360"/>
           </a:xfrm>
           <a:prstGeom prst="rect">
             <a:avLst/>
@@ -9708,7 +9713,7 @@
               </a:spcAft>
             </a:pPr>
             <a:r>
-              <a:rPr sz="1400" b="1" i="0" lang="zh-TW">
+              <a:rPr sz="1350" b="1" i="0" lang="zh-TW">
                 <a:solidFill>
                   <a:srgbClr val="2E7D5B"/>
                 </a:solidFill>
@@ -9718,7 +9723,7 @@
               <a:t>✔ </a:t>
             </a:r>
             <a:r>
-              <a:rPr sz="1350" b="0" i="0" lang="zh-TW">
+              <a:rPr sz="1300" b="0" i="0" lang="zh-TW">
                 <a:solidFill>
                   <a:srgbClr val="64748B"/>
                 </a:solidFill>
@@ -9738,8 +9743,8 @@
         </p:nvSpPr>
         <p:spPr>
           <a:xfrm>
-            <a:off x="4526280" y="1874519"/>
-            <a:ext cx="3520440" cy="3017520"/>
+            <a:off x="4526280" y="1828800"/>
+            <a:ext cx="3520440" cy="2743200"/>
           </a:xfrm>
           <a:prstGeom prst="roundRect">
             <a:avLst>
@@ -9784,8 +9789,8 @@
         </p:nvSpPr>
         <p:spPr>
           <a:xfrm>
-            <a:off x="4800600" y="2148839"/>
-            <a:ext cx="566928" cy="566928"/>
+            <a:off x="4800600" y="2066544"/>
+            <a:ext cx="530352" cy="530352"/>
           </a:xfrm>
           <a:prstGeom prst="ellipse">
             <a:avLst/>
@@ -9818,7 +9823,7 @@
           <a:p>
             <a:pPr algn="ctr"/>
             <a:r>
-              <a:rPr sz="2200" b="1">
+              <a:rPr sz="2000" b="1">
                 <a:solidFill>
                   <a:srgbClr val="FFFFFF"/>
                 </a:solidFill>
@@ -9837,8 +9842,8 @@
         </p:nvSpPr>
         <p:spPr>
           <a:xfrm>
-            <a:off x="5532120" y="2221991"/>
-            <a:ext cx="2331720" cy="457200"/>
+            <a:off x="5486400" y="2130552"/>
+            <a:ext cx="2377440" cy="457200"/>
           </a:xfrm>
           <a:prstGeom prst="rect">
             <a:avLst/>
@@ -9860,7 +9865,7 @@
               </a:spcAft>
             </a:pPr>
             <a:r>
-              <a:rPr sz="1700" b="1" i="0" lang="zh-TW">
+              <a:rPr sz="1650" b="1" i="0" lang="zh-TW">
                 <a:solidFill>
                   <a:srgbClr val="1E293B"/>
                 </a:solidFill>
@@ -9880,8 +9885,8 @@
         </p:nvSpPr>
         <p:spPr>
           <a:xfrm>
-            <a:off x="4800600" y="2926079"/>
-            <a:ext cx="2971800" cy="1188720"/>
+            <a:off x="4800600" y="2761488"/>
+            <a:ext cx="2971800" cy="1143000"/>
           </a:xfrm>
           <a:prstGeom prst="rect">
             <a:avLst/>
@@ -9896,14 +9901,14 @@
           <a:p>
             <a:pPr algn="l">
               <a:lnSpc>
-                <a:spcPct val="125000"/>
-              </a:lnSpc>
-              <a:spcAft>
-                <a:spcPts val="400"/>
-              </a:spcAft>
-            </a:pPr>
-            <a:r>
-              <a:rPr sz="1450" b="0" i="0" lang="zh-TW">
+                <a:spcPct val="122000"/>
+              </a:lnSpc>
+              <a:spcAft>
+                <a:spcPts val="400"/>
+              </a:spcAft>
+            </a:pPr>
+            <a:r>
+              <a:rPr sz="1400" b="0" i="0" lang="zh-TW">
                 <a:solidFill>
                   <a:srgbClr val="1E293B"/>
                 </a:solidFill>
@@ -9923,8 +9928,8 @@
         </p:nvSpPr>
         <p:spPr>
           <a:xfrm>
-            <a:off x="4800600" y="4160519"/>
-            <a:ext cx="2971800" cy="640080"/>
+            <a:off x="4800600" y="3931920"/>
+            <a:ext cx="2971800" cy="594360"/>
           </a:xfrm>
           <a:prstGeom prst="rect">
             <a:avLst/>
@@ -9946,7 +9951,7 @@
               </a:spcAft>
             </a:pPr>
             <a:r>
-              <a:rPr sz="1400" b="1" i="0" lang="zh-TW">
+              <a:rPr sz="1350" b="1" i="0" lang="zh-TW">
                 <a:solidFill>
                   <a:srgbClr val="2E7D5B"/>
                 </a:solidFill>
@@ -9956,7 +9961,7 @@
               <a:t>✔ </a:t>
             </a:r>
             <a:r>
-              <a:rPr sz="1350" b="0" i="0" lang="zh-TW">
+              <a:rPr sz="1300" b="0" i="0" lang="zh-TW">
                 <a:solidFill>
                   <a:srgbClr val="64748B"/>
                 </a:solidFill>
@@ -9976,8 +9981,8 @@
         </p:nvSpPr>
         <p:spPr>
           <a:xfrm>
-            <a:off x="8366760" y="1874519"/>
-            <a:ext cx="3520440" cy="3017520"/>
+            <a:off x="8366760" y="1828800"/>
+            <a:ext cx="3520440" cy="2743200"/>
           </a:xfrm>
           <a:prstGeom prst="roundRect">
             <a:avLst>
@@ -10022,8 +10027,8 @@
         </p:nvSpPr>
         <p:spPr>
           <a:xfrm>
-            <a:off x="8641080" y="2148839"/>
-            <a:ext cx="566928" cy="566928"/>
+            <a:off x="8641080" y="2066544"/>
+            <a:ext cx="530352" cy="530352"/>
           </a:xfrm>
           <a:prstGeom prst="ellipse">
             <a:avLst/>
@@ -10056,7 +10061,7 @@
           <a:p>
             <a:pPr algn="ctr"/>
             <a:r>
-              <a:rPr sz="2200" b="1">
+              <a:rPr sz="2000" b="1">
                 <a:solidFill>
                   <a:srgbClr val="FFFFFF"/>
                 </a:solidFill>
@@ -10075,8 +10080,8 @@
         </p:nvSpPr>
         <p:spPr>
           <a:xfrm>
-            <a:off x="9372600" y="2221991"/>
-            <a:ext cx="2331720" cy="457200"/>
+            <a:off x="9326880" y="2130552"/>
+            <a:ext cx="2377440" cy="457200"/>
           </a:xfrm>
           <a:prstGeom prst="rect">
             <a:avLst/>
@@ -10098,7 +10103,7 @@
               </a:spcAft>
             </a:pPr>
             <a:r>
-              <a:rPr sz="1700" b="1" i="0" lang="zh-TW">
+              <a:rPr sz="1650" b="1" i="0" lang="zh-TW">
                 <a:solidFill>
                   <a:srgbClr val="1E293B"/>
                 </a:solidFill>
@@ -10118,8 +10123,8 @@
         </p:nvSpPr>
         <p:spPr>
           <a:xfrm>
-            <a:off x="8641080" y="2926079"/>
-            <a:ext cx="2971800" cy="1188720"/>
+            <a:off x="8641080" y="2761488"/>
+            <a:ext cx="2971800" cy="1143000"/>
           </a:xfrm>
           <a:prstGeom prst="rect">
             <a:avLst/>
@@ -10134,14 +10139,14 @@
           <a:p>
             <a:pPr algn="l">
               <a:lnSpc>
-                <a:spcPct val="125000"/>
-              </a:lnSpc>
-              <a:spcAft>
-                <a:spcPts val="400"/>
-              </a:spcAft>
-            </a:pPr>
-            <a:r>
-              <a:rPr sz="1450" b="0" i="0" lang="zh-TW">
+                <a:spcPct val="122000"/>
+              </a:lnSpc>
+              <a:spcAft>
+                <a:spcPts val="400"/>
+              </a:spcAft>
+            </a:pPr>
+            <a:r>
+              <a:rPr sz="1400" b="0" i="0" lang="zh-TW">
                 <a:solidFill>
                   <a:srgbClr val="1E293B"/>
                 </a:solidFill>
@@ -10161,8 +10166,8 @@
         </p:nvSpPr>
         <p:spPr>
           <a:xfrm>
-            <a:off x="8641080" y="4160519"/>
-            <a:ext cx="2971800" cy="640080"/>
+            <a:off x="8641080" y="3931920"/>
+            <a:ext cx="2971800" cy="594360"/>
           </a:xfrm>
           <a:prstGeom prst="rect">
             <a:avLst/>
@@ -10184,7 +10189,7 @@
               </a:spcAft>
             </a:pPr>
             <a:r>
-              <a:rPr sz="1400" b="1" i="0" lang="zh-TW">
+              <a:rPr sz="1350" b="1" i="0" lang="zh-TW">
                 <a:solidFill>
                   <a:srgbClr val="2E7D5B"/>
                 </a:solidFill>
@@ -10194,27 +10199,80 @@
               <a:t>✔ </a:t>
             </a:r>
             <a:r>
+              <a:rPr sz="1300" b="0" i="0" lang="zh-TW">
+                <a:solidFill>
+                  <a:srgbClr val="64748B"/>
+                </a:solidFill>
+                <a:latin typeface="Microsoft JhengHei"/>
+                <a:ea typeface="Microsoft JhengHei"/>
+              </a:rPr>
+              <a:t>收據份數先跟點名結果對過再送</a:t>
+            </a:r>
+          </a:p>
+        </p:txBody>
+      </p:sp>
+      <p:sp>
+        <p:nvSpPr>
+          <p:cNvPr id="21" name="TextBox 20"/>
+          <p:cNvSpPr txBox="1"/>
+          <p:nvPr/>
+        </p:nvSpPr>
+        <p:spPr>
+          <a:xfrm>
+            <a:off x="685800" y="4709160"/>
+            <a:ext cx="10835640" cy="502920"/>
+          </a:xfrm>
+          <a:prstGeom prst="rect">
+            <a:avLst/>
+          </a:prstGeom>
+          <a:noFill/>
+        </p:spPr>
+        <p:txBody>
+          <a:bodyPr wrap="square" anchor="t" lIns="0" rIns="0" tIns="0" bIns="0">
+            <a:spAutoFit/>
+          </a:bodyPr>
+          <a:lstStyle/>
+          <a:p>
+            <a:pPr algn="l">
+              <a:lnSpc>
+                <a:spcPct val="125000"/>
+              </a:lnSpc>
+              <a:spcAft>
+                <a:spcPts val="400"/>
+              </a:spcAft>
+            </a:pPr>
+            <a:r>
+              <a:rPr sz="1350" b="1" i="0" lang="zh-TW">
+                <a:solidFill>
+                  <a:srgbClr val="B43B3B"/>
+                </a:solidFill>
+                <a:latin typeface="Microsoft JhengHei"/>
+                <a:ea typeface="Microsoft JhengHei"/>
+              </a:rPr>
+              <a:t>第四顆地雷（紅線）：</a:t>
+            </a:r>
+            <a:r>
               <a:rPr sz="1350" b="0" i="0" lang="zh-TW">
                 <a:solidFill>
-                  <a:srgbClr val="64748B"/>
-                </a:solidFill>
-                <a:latin typeface="Microsoft JhengHei"/>
-                <a:ea typeface="Microsoft JhengHei"/>
-              </a:rPr>
-              <a:t>收據份數先跟點名結果對過再送</a:t>
-            </a:r>
-          </a:p>
-        </p:txBody>
-      </p:sp>
-      <p:sp>
-        <p:nvSpPr>
-          <p:cNvPr id="21" name="Rounded Rectangle 20"/>
+                  <a:srgbClr val="1E293B"/>
+                </a:solidFill>
+                <a:latin typeface="Microsoft JhengHei"/>
+                <a:ea typeface="Microsoft JhengHei"/>
+              </a:rPr>
+              <a:t>身分證字號、戶籍住址、匯款帳號——這三樣不貼進任何 AI，也不放雲端，只在學校的紙本表上寫。AI 幫你算的是時數、份數、金額，不碰身分資料。</a:t>
+            </a:r>
+          </a:p>
+        </p:txBody>
+      </p:sp>
+      <p:sp>
+        <p:nvSpPr>
+          <p:cNvPr id="22" name="Rounded Rectangle 21"/>
           <p:cNvSpPr/>
           <p:nvPr/>
         </p:nvSpPr>
         <p:spPr>
           <a:xfrm>
-            <a:off x="685800" y="5257800"/>
+            <a:off x="685800" y="5349240"/>
             <a:ext cx="10835640" cy="685800"/>
           </a:xfrm>
           <a:prstGeom prst="roundRect">
@@ -10254,13 +10312,13 @@
       </p:sp>
       <p:sp>
         <p:nvSpPr>
-          <p:cNvPr id="22" name="TextBox 21"/>
+          <p:cNvPr id="23" name="TextBox 22"/>
           <p:cNvSpPr txBox="1"/>
           <p:nvPr/>
         </p:nvSpPr>
         <p:spPr>
           <a:xfrm>
-            <a:off x="960120" y="5394960"/>
+            <a:off x="960120" y="5486400"/>
             <a:ext cx="10332720" cy="457200"/>
           </a:xfrm>
           <a:prstGeom prst="rect">
@@ -10290,14 +10348,14 @@
                 <a:latin typeface="Microsoft JhengHei"/>
                 <a:ea typeface="Microsoft JhengHei"/>
               </a:rPr>
-              <a:t>系統的「經費核銷」分頁內建這三條：上下期自動判別、材料費自動對帳。</a:t>
-            </a:r>
-          </a:p>
-        </p:txBody>
-      </p:sp>
-      <p:sp>
-        <p:nvSpPr>
-          <p:cNvPr id="23" name="TextBox 22"/>
+              <a:t>系統的「經費核銷」分頁抬頭印著同一句紅線，並內建：上下期自動判別、材料費自動對帳（含整學期）。</a:t>
+            </a:r>
+          </a:p>
+        </p:txBody>
+      </p:sp>
+      <p:sp>
+        <p:nvSpPr>
+          <p:cNvPr id="24" name="TextBox 23"/>
           <p:cNvSpPr txBox="1"/>
           <p:nvPr/>
         </p:nvSpPr>
@@ -10340,7 +10398,7 @@
       </p:sp>
       <p:sp>
         <p:nvSpPr>
-          <p:cNvPr id="24" name="TextBox 23"/>
+          <p:cNvPr id="25" name="TextBox 24"/>
           <p:cNvSpPr txBox="1"/>
           <p:nvPr/>
         </p:nvSpPr>
@@ -12528,7 +12586,7 @@
                 <a:latin typeface="Microsoft JhengHei"/>
                 <a:ea typeface="Microsoft JhengHei"/>
               </a:rPr>
-              <a:t>九份文件的生產地圖：五份內建、四份用 AI 做</a:t>
+              <a:t>文件生產地圖：七份內建、四份用 AI 做</a:t>
             </a:r>
           </a:p>
         </p:txBody>
@@ -12630,7 +12688,7 @@
         </p:nvSpPr>
         <p:spPr>
           <a:xfrm>
-            <a:off x="960120" y="1965960"/>
+            <a:off x="960120" y="1920240"/>
             <a:ext cx="4663440" cy="411480"/>
           </a:xfrm>
           <a:prstGeom prst="rect">
@@ -12673,8 +12731,8 @@
         </p:nvSpPr>
         <p:spPr>
           <a:xfrm>
-            <a:off x="960120" y="2468880"/>
-            <a:ext cx="4663440" cy="457200"/>
+            <a:off x="960120" y="2377440"/>
+            <a:ext cx="4663440" cy="411480"/>
           </a:xfrm>
           <a:prstGeom prst="rect">
             <a:avLst/>
@@ -12696,7 +12754,7 @@
               </a:spcAft>
             </a:pPr>
             <a:r>
-              <a:rPr sz="1500" b="1" i="0" lang="zh-TW">
+              <a:rPr sz="1400" b="1" i="0" lang="zh-TW">
                 <a:solidFill>
                   <a:srgbClr val="2E7D5B"/>
                 </a:solidFill>
@@ -12706,14 +12764,14 @@
               <a:t>✔ </a:t>
             </a:r>
             <a:r>
-              <a:rPr sz="1350" b="0" i="0" lang="zh-TW">
+              <a:rPr sz="1250" b="0" i="0" lang="zh-TW">
                 <a:solidFill>
                   <a:srgbClr val="1E293B"/>
                 </a:solidFill>
                 <a:latin typeface="Microsoft JhengHei"/>
                 <a:ea typeface="Microsoft JhengHei"/>
               </a:rPr>
-              <a:t>課程規劃表（24 週）→ 課程規劃分頁列印</a:t>
+              <a:t>課程規劃表（貳）＋授課時數表 → 課程規劃分頁</a:t>
             </a:r>
           </a:p>
         </p:txBody>
@@ -12726,8 +12784,8 @@
         </p:nvSpPr>
         <p:spPr>
           <a:xfrm>
-            <a:off x="960120" y="2971800"/>
-            <a:ext cx="4663440" cy="457200"/>
+            <a:off x="960120" y="2807208"/>
+            <a:ext cx="4663440" cy="411480"/>
           </a:xfrm>
           <a:prstGeom prst="rect">
             <a:avLst/>
@@ -12749,7 +12807,7 @@
               </a:spcAft>
             </a:pPr>
             <a:r>
-              <a:rPr sz="1500" b="1" i="0" lang="zh-TW">
+              <a:rPr sz="1400" b="1" i="0" lang="zh-TW">
                 <a:solidFill>
                   <a:srgbClr val="2E7D5B"/>
                 </a:solidFill>
@@ -12759,14 +12817,14 @@
               <a:t>✔ </a:t>
             </a:r>
             <a:r>
-              <a:rPr sz="1350" b="0" i="0" lang="zh-TW">
+              <a:rPr sz="1250" b="0" i="0" lang="zh-TW">
                 <a:solidFill>
                   <a:srgbClr val="1E293B"/>
                 </a:solidFill>
                 <a:latin typeface="Microsoft JhengHei"/>
                 <a:ea typeface="Microsoft JhengHei"/>
               </a:rPr>
-              <a:t>社團課簽到表 → 教室日誌分頁列印</a:t>
+              <a:t>學生名單（附件一）→ 名單分頁列印</a:t>
             </a:r>
           </a:p>
         </p:txBody>
@@ -12779,8 +12837,8 @@
         </p:nvSpPr>
         <p:spPr>
           <a:xfrm>
-            <a:off x="960120" y="3474720"/>
-            <a:ext cx="4663440" cy="457200"/>
+            <a:off x="960120" y="3236976"/>
+            <a:ext cx="4663440" cy="411480"/>
           </a:xfrm>
           <a:prstGeom prst="rect">
             <a:avLst/>
@@ -12802,7 +12860,7 @@
               </a:spcAft>
             </a:pPr>
             <a:r>
-              <a:rPr sz="1500" b="1" i="0" lang="zh-TW">
+              <a:rPr sz="1400" b="1" i="0" lang="zh-TW">
                 <a:solidFill>
                   <a:srgbClr val="2E7D5B"/>
                 </a:solidFill>
@@ -12812,14 +12870,14 @@
               <a:t>✔ </a:t>
             </a:r>
             <a:r>
-              <a:rPr sz="1350" b="0" i="0" lang="zh-TW">
+              <a:rPr sz="1250" b="0" i="0" lang="zh-TW">
                 <a:solidFill>
                   <a:srgbClr val="1E293B"/>
                 </a:solidFill>
                 <a:latin typeface="Microsoft JhengHei"/>
                 <a:ea typeface="Microsoft JhengHei"/>
               </a:rPr>
-              <a:t>學生回饋單 → 回饋單分頁列印</a:t>
+              <a:t>社團課簽到表（附件二）→ 教室日誌列印</a:t>
             </a:r>
           </a:p>
         </p:txBody>
@@ -12832,8 +12890,8 @@
         </p:nvSpPr>
         <p:spPr>
           <a:xfrm>
-            <a:off x="960120" y="3977640"/>
-            <a:ext cx="4663440" cy="457200"/>
+            <a:off x="960120" y="3666744"/>
+            <a:ext cx="4663440" cy="411480"/>
           </a:xfrm>
           <a:prstGeom prst="rect">
             <a:avLst/>
@@ -12855,7 +12913,7 @@
               </a:spcAft>
             </a:pPr>
             <a:r>
-              <a:rPr sz="1500" b="1" i="0" lang="zh-TW">
+              <a:rPr sz="1400" b="1" i="0" lang="zh-TW">
                 <a:solidFill>
                   <a:srgbClr val="2E7D5B"/>
                 </a:solidFill>
@@ -12865,14 +12923,14 @@
               <a:t>✔ </a:t>
             </a:r>
             <a:r>
-              <a:rPr sz="1350" b="0" i="0" lang="zh-TW">
+              <a:rPr sz="1250" b="0" i="0" lang="zh-TW">
                 <a:solidFill>
                   <a:srgbClr val="1E293B"/>
                 </a:solidFill>
                 <a:latin typeface="Microsoft JhengHei"/>
                 <a:ea typeface="Microsoft JhengHei"/>
               </a:rPr>
-              <a:t>授課時數表（鐘點費）→ 課程規劃分頁列印</a:t>
+              <a:t>學生回饋單（附件三）→ 回饋單分頁列印</a:t>
             </a:r>
           </a:p>
         </p:txBody>
@@ -12885,8 +12943,8 @@
         </p:nvSpPr>
         <p:spPr>
           <a:xfrm>
-            <a:off x="960120" y="4480560"/>
-            <a:ext cx="4663440" cy="457200"/>
+            <a:off x="960120" y="4096512"/>
+            <a:ext cx="4663440" cy="411480"/>
           </a:xfrm>
           <a:prstGeom prst="rect">
             <a:avLst/>
@@ -12908,7 +12966,7 @@
               </a:spcAft>
             </a:pPr>
             <a:r>
-              <a:rPr sz="1500" b="1" i="0" lang="zh-TW">
+              <a:rPr sz="1400" b="1" i="0" lang="zh-TW">
                 <a:solidFill>
                   <a:srgbClr val="2E7D5B"/>
                 </a:solidFill>
@@ -12918,14 +12976,14 @@
               <a:t>✔ </a:t>
             </a:r>
             <a:r>
-              <a:rPr sz="1350" b="0" i="0" lang="zh-TW">
+              <a:rPr sz="1250" b="0" i="0" lang="zh-TW">
                 <a:solidFill>
                   <a:srgbClr val="1E293B"/>
                 </a:solidFill>
                 <a:latin typeface="Microsoft JhengHei"/>
                 <a:ea typeface="Microsoft JhengHei"/>
               </a:rPr>
-              <a:t>核銷登記＋材料費對帳 → 經費核銷分頁</a:t>
+              <a:t>課程紀錄（參）→ 教室日誌逐週填、列印</a:t>
             </a:r>
           </a:p>
         </p:txBody>
@@ -12938,8 +12996,8 @@
         </p:nvSpPr>
         <p:spPr>
           <a:xfrm>
-            <a:off x="960120" y="5074920"/>
-            <a:ext cx="4663440" cy="731520"/>
+            <a:off x="960120" y="4526280"/>
+            <a:ext cx="4663440" cy="411480"/>
           </a:xfrm>
           <a:prstGeom prst="rect">
             <a:avLst/>
@@ -12963,19 +13021,125 @@
             <a:r>
               <a:rPr sz="1400" b="1" i="0" lang="zh-TW">
                 <a:solidFill>
+                  <a:srgbClr val="2E7D5B"/>
+                </a:solidFill>
+                <a:latin typeface="Microsoft JhengHei"/>
+                <a:ea typeface="Microsoft JhengHei"/>
+              </a:rPr>
+              <a:t>✔ </a:t>
+            </a:r>
+            <a:r>
+              <a:rPr sz="1250" b="0" i="0" lang="zh-TW">
+                <a:solidFill>
+                  <a:srgbClr val="1E293B"/>
+                </a:solidFill>
+                <a:latin typeface="Microsoft JhengHei"/>
+                <a:ea typeface="Microsoft JhengHei"/>
+              </a:rPr>
+              <a:t>核銷登記＋材料費對帳 → 經費核銷分頁</a:t>
+            </a:r>
+          </a:p>
+        </p:txBody>
+      </p:sp>
+      <p:sp>
+        <p:nvSpPr>
+          <p:cNvPr id="14" name="TextBox 13"/>
+          <p:cNvSpPr txBox="1"/>
+          <p:nvPr/>
+        </p:nvSpPr>
+        <p:spPr>
+          <a:xfrm>
+            <a:off x="960120" y="4956048"/>
+            <a:ext cx="4663440" cy="411480"/>
+          </a:xfrm>
+          <a:prstGeom prst="rect">
+            <a:avLst/>
+          </a:prstGeom>
+          <a:noFill/>
+        </p:spPr>
+        <p:txBody>
+          <a:bodyPr wrap="square" anchor="t" lIns="0" rIns="0" tIns="0" bIns="0">
+            <a:spAutoFit/>
+          </a:bodyPr>
+          <a:lstStyle/>
+          <a:p>
+            <a:pPr algn="l">
+              <a:lnSpc>
+                <a:spcPct val="115000"/>
+              </a:lnSpc>
+              <a:spcAft>
+                <a:spcPts val="400"/>
+              </a:spcAft>
+            </a:pPr>
+            <a:r>
+              <a:rPr sz="1400" b="1" i="0" lang="zh-TW">
+                <a:solidFill>
+                  <a:srgbClr val="2E7D5B"/>
+                </a:solidFill>
+                <a:latin typeface="Microsoft JhengHei"/>
+                <a:ea typeface="Microsoft JhengHei"/>
+              </a:rPr>
+              <a:t>✔ </a:t>
+            </a:r>
+            <a:r>
+              <a:rPr sz="1250" b="0" i="0" lang="zh-TW">
+                <a:solidFill>
+                  <a:srgbClr val="1E293B"/>
+                </a:solidFill>
+                <a:latin typeface="Microsoft JhengHei"/>
+                <a:ea typeface="Microsoft JhengHei"/>
+              </a:rPr>
+              <a:t>成果報告書素材頁（壹＋肆）→ 總覽列印</a:t>
+            </a:r>
+          </a:p>
+        </p:txBody>
+      </p:sp>
+      <p:sp>
+        <p:nvSpPr>
+          <p:cNvPr id="15" name="TextBox 14"/>
+          <p:cNvSpPr txBox="1"/>
+          <p:nvPr/>
+        </p:nvSpPr>
+        <p:spPr>
+          <a:xfrm>
+            <a:off x="960120" y="5440680"/>
+            <a:ext cx="4663440" cy="457200"/>
+          </a:xfrm>
+          <a:prstGeom prst="rect">
+            <a:avLst/>
+          </a:prstGeom>
+          <a:noFill/>
+        </p:spPr>
+        <p:txBody>
+          <a:bodyPr wrap="square" anchor="t" lIns="0" rIns="0" tIns="0" bIns="0">
+            <a:spAutoFit/>
+          </a:bodyPr>
+          <a:lstStyle/>
+          <a:p>
+            <a:pPr algn="l">
+              <a:lnSpc>
+                <a:spcPct val="115000"/>
+              </a:lnSpc>
+              <a:spcAft>
+                <a:spcPts val="400"/>
+              </a:spcAft>
+            </a:pPr>
+            <a:r>
+              <a:rPr sz="1400" b="1" i="0" lang="zh-TW">
+                <a:solidFill>
                   <a:srgbClr val="64748B"/>
                 </a:solidFill>
                 <a:latin typeface="Microsoft JhengHei"/>
                 <a:ea typeface="Microsoft JhengHei"/>
               </a:rPr>
-              <a:t>這五份今天已經在你電腦裡了。</a:t>
-            </a:r>
-          </a:p>
-        </p:txBody>
-      </p:sp>
-      <p:sp>
-        <p:nvSpPr>
-          <p:cNvPr id="14" name="Rounded Rectangle 13"/>
+              <a:t>這七份今天已經在你電腦裡了。</a:t>
+            </a:r>
+          </a:p>
+        </p:txBody>
+      </p:sp>
+      <p:sp>
+        <p:nvSpPr>
+          <p:cNvPr id="16" name="Rounded Rectangle 15"/>
           <p:cNvSpPr/>
           <p:nvPr/>
         </p:nvSpPr>
@@ -13021,7 +13185,7 @@
       </p:sp>
       <p:sp>
         <p:nvSpPr>
-          <p:cNvPr id="15" name="TextBox 14"/>
+          <p:cNvPr id="17" name="TextBox 16"/>
           <p:cNvSpPr txBox="1"/>
           <p:nvPr/>
         </p:nvSpPr>
@@ -13064,7 +13228,7 @@
       </p:sp>
       <p:sp>
         <p:nvSpPr>
-          <p:cNvPr id="16" name="TextBox 15"/>
+          <p:cNvPr id="18" name="TextBox 17"/>
           <p:cNvSpPr txBox="1"/>
           <p:nvPr/>
         </p:nvSpPr>
@@ -13117,7 +13281,7 @@
       </p:sp>
       <p:sp>
         <p:nvSpPr>
-          <p:cNvPr id="17" name="TextBox 16"/>
+          <p:cNvPr id="19" name="TextBox 18"/>
           <p:cNvSpPr txBox="1"/>
           <p:nvPr/>
         </p:nvSpPr>
@@ -13170,7 +13334,7 @@
       </p:sp>
       <p:sp>
         <p:nvSpPr>
-          <p:cNvPr id="18" name="TextBox 17"/>
+          <p:cNvPr id="20" name="TextBox 19"/>
           <p:cNvSpPr txBox="1"/>
           <p:nvPr/>
         </p:nvSpPr>
@@ -13223,7 +13387,7 @@
       </p:sp>
       <p:sp>
         <p:nvSpPr>
-          <p:cNvPr id="19" name="TextBox 18"/>
+          <p:cNvPr id="21" name="TextBox 20"/>
           <p:cNvSpPr txBox="1"/>
           <p:nvPr/>
         </p:nvSpPr>
@@ -13276,7 +13440,7 @@
       </p:sp>
       <p:sp>
         <p:nvSpPr>
-          <p:cNvPr id="20" name="TextBox 19"/>
+          <p:cNvPr id="22" name="TextBox 21"/>
           <p:cNvSpPr txBox="1"/>
           <p:nvPr/>
         </p:nvSpPr>
@@ -13329,7 +13493,7 @@
       </p:sp>
       <p:sp>
         <p:nvSpPr>
-          <p:cNvPr id="21" name="TextBox 20"/>
+          <p:cNvPr id="23" name="TextBox 22"/>
           <p:cNvSpPr txBox="1"/>
           <p:nvPr/>
         </p:nvSpPr>
@@ -13372,7 +13536,7 @@
       </p:sp>
       <p:sp>
         <p:nvSpPr>
-          <p:cNvPr id="22" name="TextBox 21"/>
+          <p:cNvPr id="24" name="TextBox 23"/>
           <p:cNvSpPr txBox="1"/>
           <p:nvPr/>
         </p:nvSpPr>
@@ -13415,7 +13579,7 @@
       </p:sp>
       <p:sp>
         <p:nvSpPr>
-          <p:cNvPr id="23" name="TextBox 22"/>
+          <p:cNvPr id="25" name="TextBox 24"/>
           <p:cNvSpPr txBox="1"/>
           <p:nvPr/>
         </p:nvSpPr>
@@ -15467,7 +15631,7 @@
                 <a:latin typeface="Microsoft JhengHei"/>
                 <a:ea typeface="Microsoft JhengHei"/>
               </a:rPr>
-              <a:t>系統總覽的基本資料照抄</a:t>
+              <a:t>總覽「列印成果報告書素材頁」一鍵印出（含指導老師）</a:t>
             </a:r>
           </a:p>
         </p:txBody>
@@ -15599,7 +15763,7 @@
                 <a:latin typeface="Microsoft JhengHei"/>
                 <a:ea typeface="Microsoft JhengHei"/>
               </a:rPr>
-              <a:t>課程規劃分頁 → 列印／匯出 CSV</a:t>
+              <a:t>課程規劃分頁 → 列印（含時數欄）／匯出 CSV</a:t>
             </a:r>
           </a:p>
         </p:txBody>
@@ -15731,7 +15895,7 @@
                 <a:latin typeface="Microsoft JhengHei"/>
                 <a:ea typeface="Microsoft JhengHei"/>
               </a:rPr>
-              <a:t>兩大項各一段文字＋6 張照片 → 卡片④寫圖說</a:t>
+              <a:t>教室日誌逐週填的課程紀錄 → 列印即初稿；圖說用卡片④</a:t>
             </a:r>
           </a:p>
         </p:txBody>
@@ -15863,7 +16027,7 @@
                 <a:latin typeface="Microsoft JhengHei"/>
                 <a:ea typeface="Microsoft JhengHei"/>
               </a:rPr>
-              <a:t>總覽儀表板直接抄數字</a:t>
+              <a:t>素材頁一鍵印出，每個數字帶來源與分母</a:t>
             </a:r>
           </a:p>
         </p:txBody>
@@ -15995,7 +16159,7 @@
                 <a:latin typeface="Microsoft JhengHei"/>
                 <a:ea typeface="Microsoft JhengHei"/>
               </a:rPr>
-              <a:t>回饋單開放題＋你的觀察，請 ChatGPT 潤稿</a:t>
+              <a:t>回饋單分頁「第 5 題彙整框」＋你的觀察，請 ChatGPT 潤稿</a:t>
             </a:r>
           </a:p>
         </p:txBody>
@@ -16127,7 +16291,7 @@
                 <a:latin typeface="Microsoft JhengHei"/>
                 <a:ea typeface="Microsoft JhengHei"/>
               </a:rPr>
-              <a:t>名單 CSV／出席總表 CSV／回饋單，系統匯出</a:t>
+              <a:t>名單列印／CSV、出席總表 CSV、回饋單，系統匯出</a:t>
             </a:r>
           </a:p>
         </p:txBody>
@@ -20376,7 +20540,7 @@
                 <a:latin typeface="Microsoft JhengHei"/>
                 <a:ea typeface="Microsoft JhengHei"/>
               </a:rPr>
-              <a:t>規劃、製作、萬用模板、圖說、驗收</a:t>
+              <a:t>全文可複製：rlirdo.github.io/yangwang-club-manager/prompts.html</a:t>
             </a:r>
           </a:p>
         </p:txBody>
@@ -23613,7 +23777,7 @@
                 <a:latin typeface="Microsoft JhengHei"/>
                 <a:ea typeface="Microsoft JhengHei"/>
               </a:rPr>
-              <a:t>全台 19 校今年都是第一年，這條路大家一起鋪。</a:t>
+              <a:t>今年大概二十所學校，全部都是第一年，這條路大家一起鋪。</a:t>
             </a:r>
           </a:p>
         </p:txBody>
@@ -26584,7 +26748,7 @@
                 <a:latin typeface="Microsoft JhengHei"/>
                 <a:ea typeface="Microsoft JhengHei"/>
               </a:rPr>
-              <a:t>五分鐘看完：你們今天要做出來的東西</a:t>
+              <a:t>六個分頁看完：你們今天要做出來的東西</a:t>
             </a:r>
           </a:p>
         </p:txBody>
@@ -26695,8 +26859,8 @@
         </p:nvSpPr>
         <p:spPr>
           <a:xfrm>
-            <a:off x="685800" y="1783080"/>
-            <a:ext cx="10835640" cy="731520"/>
+            <a:off x="685800" y="1737360"/>
+            <a:ext cx="10835640" cy="566928"/>
           </a:xfrm>
           <a:prstGeom prst="roundRect">
             <a:avLst>
@@ -26741,8 +26905,8 @@
         </p:nvSpPr>
         <p:spPr>
           <a:xfrm>
-            <a:off x="914400" y="1892808"/>
-            <a:ext cx="512064" cy="512064"/>
+            <a:off x="914400" y="1792224"/>
+            <a:ext cx="457200" cy="457200"/>
           </a:xfrm>
           <a:prstGeom prst="ellipse">
             <a:avLst/>
@@ -26775,7 +26939,7 @@
           <a:p>
             <a:pPr algn="ctr"/>
             <a:r>
-              <a:rPr sz="1600" b="1">
+              <a:rPr sz="1500" b="1">
                 <a:solidFill>
                   <a:srgbClr val="FFFFFF"/>
                 </a:solidFill>
@@ -26794,8 +26958,8 @@
         </p:nvSpPr>
         <p:spPr>
           <a:xfrm>
-            <a:off x="1645920" y="1874520"/>
-            <a:ext cx="2377440" cy="548640"/>
+            <a:off x="1572768" y="1783080"/>
+            <a:ext cx="2286000" cy="457200"/>
           </a:xfrm>
           <a:prstGeom prst="rect">
             <a:avLst/>
@@ -26817,7 +26981,7 @@
               </a:spcAft>
             </a:pPr>
             <a:r>
-              <a:rPr sz="1600" b="1" i="0" lang="zh-TW">
+              <a:rPr sz="1500" b="1" i="0" lang="zh-TW">
                 <a:solidFill>
                   <a:srgbClr val="1E293B"/>
                 </a:solidFill>
@@ -26837,8 +27001,8 @@
         </p:nvSpPr>
         <p:spPr>
           <a:xfrm>
-            <a:off x="4206240" y="1874520"/>
-            <a:ext cx="7132320" cy="548640"/>
+            <a:off x="3977639" y="1783080"/>
+            <a:ext cx="7406640" cy="457200"/>
           </a:xfrm>
           <a:prstGeom prst="rect">
             <a:avLst/>
@@ -26860,14 +27024,14 @@
               </a:spcAft>
             </a:pPr>
             <a:r>
-              <a:rPr sz="1400" b="0" i="0" lang="zh-TW">
+              <a:rPr sz="1300" b="0" i="0" lang="zh-TW">
                 <a:solidFill>
                   <a:srgbClr val="1E293B"/>
                 </a:solidFill>
                 <a:latin typeface="Microsoft JhengHei"/>
                 <a:ea typeface="Microsoft JhengHei"/>
               </a:rPr>
-              <a:t>七個百分比的儀表板＋結案文件追蹤清單</a:t>
+              <a:t>七個百分比儀表板＋12 項結案文件追蹤＋列印成果報告書素材頁</a:t>
             </a:r>
           </a:p>
         </p:txBody>
@@ -26880,8 +27044,8 @@
         </p:nvSpPr>
         <p:spPr>
           <a:xfrm>
-            <a:off x="685800" y="2642616"/>
-            <a:ext cx="10835640" cy="731520"/>
+            <a:off x="685800" y="2423160"/>
+            <a:ext cx="10835640" cy="566928"/>
           </a:xfrm>
           <a:prstGeom prst="roundRect">
             <a:avLst>
@@ -26926,8 +27090,8 @@
         </p:nvSpPr>
         <p:spPr>
           <a:xfrm>
-            <a:off x="914400" y="2752344"/>
-            <a:ext cx="512064" cy="512064"/>
+            <a:off x="914400" y="2478024"/>
+            <a:ext cx="457200" cy="457200"/>
           </a:xfrm>
           <a:prstGeom prst="ellipse">
             <a:avLst/>
@@ -26960,7 +27124,7 @@
           <a:p>
             <a:pPr algn="ctr"/>
             <a:r>
-              <a:rPr sz="1600" b="1">
+              <a:rPr sz="1500" b="1">
                 <a:solidFill>
                   <a:srgbClr val="FFFFFF"/>
                 </a:solidFill>
@@ -26979,8 +27143,8 @@
         </p:nvSpPr>
         <p:spPr>
           <a:xfrm>
-            <a:off x="1645920" y="2734056"/>
-            <a:ext cx="2377440" cy="548640"/>
+            <a:off x="1572768" y="2468880"/>
+            <a:ext cx="2286000" cy="457200"/>
           </a:xfrm>
           <a:prstGeom prst="rect">
             <a:avLst/>
@@ -27002,7 +27166,7 @@
               </a:spcAft>
             </a:pPr>
             <a:r>
-              <a:rPr sz="1600" b="1" i="0" lang="zh-TW">
+              <a:rPr sz="1500" b="1" i="0" lang="zh-TW">
                 <a:solidFill>
                   <a:srgbClr val="1E293B"/>
                 </a:solidFill>
@@ -27022,8 +27186,8 @@
         </p:nvSpPr>
         <p:spPr>
           <a:xfrm>
-            <a:off x="4206240" y="2734056"/>
-            <a:ext cx="7132320" cy="548640"/>
+            <a:off x="3977639" y="2468880"/>
+            <a:ext cx="7406640" cy="457200"/>
           </a:xfrm>
           <a:prstGeom prst="rect">
             <a:avLst/>
@@ -27045,14 +27209,14 @@
               </a:spcAft>
             </a:pPr>
             <a:r>
-              <a:rPr sz="1400" b="0" i="0" lang="zh-TW">
+              <a:rPr sz="1300" b="0" i="0" lang="zh-TW">
                 <a:solidFill>
                   <a:srgbClr val="1E293B"/>
                 </a:solidFill>
                 <a:latin typeface="Microsoft JhengHei"/>
                 <a:ea typeface="Microsoft JhengHei"/>
               </a:rPr>
-              <a:t>從 Excel 整批複製、貼上匯入，三種格式都吃</a:t>
+              <a:t>從 Excel 整批貼上匯入（標題列自動略過）；可列印附件一</a:t>
             </a:r>
           </a:p>
         </p:txBody>
@@ -27065,8 +27229,8 @@
         </p:nvSpPr>
         <p:spPr>
           <a:xfrm>
-            <a:off x="685800" y="3502152"/>
-            <a:ext cx="10835640" cy="731520"/>
+            <a:off x="685800" y="3108960"/>
+            <a:ext cx="10835640" cy="566928"/>
           </a:xfrm>
           <a:prstGeom prst="roundRect">
             <a:avLst>
@@ -27111,8 +27275,193 @@
         </p:nvSpPr>
         <p:spPr>
           <a:xfrm>
-            <a:off x="914400" y="3611880"/>
-            <a:ext cx="512064" cy="512064"/>
+            <a:off x="914400" y="3163824"/>
+            <a:ext cx="457200" cy="457200"/>
+          </a:xfrm>
+          <a:prstGeom prst="ellipse">
+            <a:avLst/>
+          </a:prstGeom>
+          <a:solidFill>
+            <a:srgbClr val="5FA98A"/>
+          </a:solidFill>
+          <a:ln>
+            <a:noFill/>
+          </a:ln>
+          <a:effectLst/>
+        </p:spPr>
+        <p:style>
+          <a:lnRef idx="1">
+            <a:schemeClr val="accent1"/>
+          </a:lnRef>
+          <a:fillRef idx="3">
+            <a:schemeClr val="accent1"/>
+          </a:fillRef>
+          <a:effectRef idx="2">
+            <a:schemeClr val="accent1"/>
+          </a:effectRef>
+          <a:fontRef idx="minor">
+            <a:schemeClr val="lt1"/>
+          </a:fontRef>
+        </p:style>
+        <p:txBody>
+          <a:bodyPr rtlCol="0" anchor="ctr" lIns="0" rIns="0" tIns="0" bIns="0"/>
+          <a:lstStyle/>
+          <a:p>
+            <a:pPr algn="ctr"/>
+            <a:r>
+              <a:rPr sz="1500" b="1">
+                <a:solidFill>
+                  <a:srgbClr val="FFFFFF"/>
+                </a:solidFill>
+                <a:latin typeface="Microsoft JhengHei"/>
+              </a:rPr>
+              <a:t>3</a:t>
+            </a:r>
+          </a:p>
+        </p:txBody>
+      </p:sp>
+      <p:sp>
+        <p:nvSpPr>
+          <p:cNvPr id="17" name="TextBox 16"/>
+          <p:cNvSpPr txBox="1"/>
+          <p:nvPr/>
+        </p:nvSpPr>
+        <p:spPr>
+          <a:xfrm>
+            <a:off x="1572768" y="3154680"/>
+            <a:ext cx="2286000" cy="457200"/>
+          </a:xfrm>
+          <a:prstGeom prst="rect">
+            <a:avLst/>
+          </a:prstGeom>
+          <a:noFill/>
+        </p:spPr>
+        <p:txBody>
+          <a:bodyPr wrap="square" anchor="ctr" lIns="0" rIns="0" tIns="0" bIns="0">
+            <a:spAutoFit/>
+          </a:bodyPr>
+          <a:lstStyle/>
+          <a:p>
+            <a:pPr algn="l">
+              <a:lnSpc>
+                <a:spcPct val="115000"/>
+              </a:lnSpc>
+              <a:spcAft>
+                <a:spcPts val="400"/>
+              </a:spcAft>
+            </a:pPr>
+            <a:r>
+              <a:rPr sz="1500" b="1" i="0" lang="zh-TW">
+                <a:solidFill>
+                  <a:srgbClr val="1E293B"/>
+                </a:solidFill>
+                <a:latin typeface="Microsoft JhengHei"/>
+                <a:ea typeface="Microsoft JhengHei"/>
+              </a:rPr>
+              <a:t>課程規劃表</a:t>
+            </a:r>
+          </a:p>
+        </p:txBody>
+      </p:sp>
+      <p:sp>
+        <p:nvSpPr>
+          <p:cNvPr id="18" name="TextBox 17"/>
+          <p:cNvSpPr txBox="1"/>
+          <p:nvPr/>
+        </p:nvSpPr>
+        <p:spPr>
+          <a:xfrm>
+            <a:off x="3977639" y="3154680"/>
+            <a:ext cx="7406640" cy="457200"/>
+          </a:xfrm>
+          <a:prstGeom prst="rect">
+            <a:avLst/>
+          </a:prstGeom>
+          <a:noFill/>
+        </p:spPr>
+        <p:txBody>
+          <a:bodyPr wrap="square" anchor="ctr" lIns="0" rIns="0" tIns="0" bIns="0">
+            <a:spAutoFit/>
+          </a:bodyPr>
+          <a:lstStyle/>
+          <a:p>
+            <a:pPr algn="l">
+              <a:lnSpc>
+                <a:spcPct val="115000"/>
+              </a:lnSpc>
+              <a:spcAft>
+                <a:spcPts val="400"/>
+              </a:spcAft>
+            </a:pPr>
+            <a:r>
+              <a:rPr sz="1300" b="0" i="0" lang="zh-TW">
+                <a:solidFill>
+                  <a:srgbClr val="1E293B"/>
+                </a:solidFill>
+                <a:latin typeface="Microsoft JhengHei"/>
+                <a:ea typeface="Microsoft JhengHei"/>
+              </a:rPr>
+              <a:t>總週數可調（28／19 週都行）＋時數欄；列印規劃表與時數表</a:t>
+            </a:r>
+          </a:p>
+        </p:txBody>
+      </p:sp>
+      <p:sp>
+        <p:nvSpPr>
+          <p:cNvPr id="19" name="Rounded Rectangle 18"/>
+          <p:cNvSpPr/>
+          <p:nvPr/>
+        </p:nvSpPr>
+        <p:spPr>
+          <a:xfrm>
+            <a:off x="685800" y="3794760"/>
+            <a:ext cx="10835640" cy="566928"/>
+          </a:xfrm>
+          <a:prstGeom prst="roundRect">
+            <a:avLst>
+              <a:gd name="adj" fmla="val 6000"/>
+            </a:avLst>
+          </a:prstGeom>
+          <a:solidFill>
+            <a:srgbClr val="FFFFFF"/>
+          </a:solidFill>
+          <a:ln>
+            <a:noFill/>
+          </a:ln>
+          <a:effectLst/>
+        </p:spPr>
+        <p:style>
+          <a:lnRef idx="1">
+            <a:schemeClr val="accent1"/>
+          </a:lnRef>
+          <a:fillRef idx="3">
+            <a:schemeClr val="accent1"/>
+          </a:fillRef>
+          <a:effectRef idx="2">
+            <a:schemeClr val="accent1"/>
+          </a:effectRef>
+          <a:fontRef idx="minor">
+            <a:schemeClr val="lt1"/>
+          </a:fontRef>
+        </p:style>
+        <p:txBody>
+          <a:bodyPr rtlCol="0" anchor="ctr"/>
+          <a:lstStyle/>
+          <a:p>
+            <a:pPr algn="ctr"/>
+          </a:p>
+        </p:txBody>
+      </p:sp>
+      <p:sp>
+        <p:nvSpPr>
+          <p:cNvPr id="20" name="Oval 19"/>
+          <p:cNvSpPr/>
+          <p:nvPr/>
+        </p:nvSpPr>
+        <p:spPr>
+          <a:xfrm>
+            <a:off x="914400" y="3849624"/>
+            <a:ext cx="457200" cy="457200"/>
           </a:xfrm>
           <a:prstGeom prst="ellipse">
             <a:avLst/>
@@ -27145,27 +27494,27 @@
           <a:p>
             <a:pPr algn="ctr"/>
             <a:r>
-              <a:rPr sz="1600" b="1">
+              <a:rPr sz="1500" b="1">
                 <a:solidFill>
                   <a:srgbClr val="FFFFFF"/>
                 </a:solidFill>
                 <a:latin typeface="Microsoft JhengHei"/>
               </a:rPr>
-              <a:t>3</a:t>
-            </a:r>
-          </a:p>
-        </p:txBody>
-      </p:sp>
-      <p:sp>
-        <p:nvSpPr>
-          <p:cNvPr id="17" name="TextBox 16"/>
+              <a:t>4</a:t>
+            </a:r>
+          </a:p>
+        </p:txBody>
+      </p:sp>
+      <p:sp>
+        <p:nvSpPr>
+          <p:cNvPr id="21" name="TextBox 20"/>
           <p:cNvSpPr txBox="1"/>
           <p:nvPr/>
         </p:nvSpPr>
         <p:spPr>
           <a:xfrm>
-            <a:off x="1645920" y="3593592"/>
-            <a:ext cx="2377440" cy="548640"/>
+            <a:off x="1572768" y="3840480"/>
+            <a:ext cx="2286000" cy="457200"/>
           </a:xfrm>
           <a:prstGeom prst="rect">
             <a:avLst/>
@@ -27187,7 +27536,7 @@
               </a:spcAft>
             </a:pPr>
             <a:r>
-              <a:rPr sz="1600" b="1" i="0" lang="zh-TW">
+              <a:rPr sz="1500" b="1" i="0" lang="zh-TW">
                 <a:solidFill>
                   <a:srgbClr val="1E293B"/>
                 </a:solidFill>
@@ -27201,14 +27550,14 @@
       </p:sp>
       <p:sp>
         <p:nvSpPr>
-          <p:cNvPr id="18" name="TextBox 17"/>
+          <p:cNvPr id="22" name="TextBox 21"/>
           <p:cNvSpPr txBox="1"/>
           <p:nvPr/>
         </p:nvSpPr>
         <p:spPr>
           <a:xfrm>
-            <a:off x="4206240" y="3593592"/>
-            <a:ext cx="7132320" cy="548640"/>
+            <a:off x="3977639" y="3840480"/>
+            <a:ext cx="7406640" cy="457200"/>
           </a:xfrm>
           <a:prstGeom prst="rect">
             <a:avLst/>
@@ -27230,28 +27579,28 @@
               </a:spcAft>
             </a:pPr>
             <a:r>
-              <a:rPr sz="1400" b="0" i="0" lang="zh-TW">
+              <a:rPr sz="1300" b="0" i="0" lang="zh-TW">
                 <a:solidFill>
                   <a:srgbClr val="1E293B"/>
                 </a:solidFill>
                 <a:latin typeface="Microsoft JhengHei"/>
                 <a:ea typeface="Microsoft JhengHei"/>
               </a:rPr>
-              <a:t>點名三態切換；出席＋老師2位＝材料費份數當場算</a:t>
-            </a:r>
-          </a:p>
-        </p:txBody>
-      </p:sp>
-      <p:sp>
-        <p:nvSpPr>
-          <p:cNvPr id="19" name="Rounded Rectangle 18"/>
+              <a:t>進去就預設全到，改掉沒來的；出席＋老師2＝材料費；本週課程紀錄（參）</a:t>
+            </a:r>
+          </a:p>
+        </p:txBody>
+      </p:sp>
+      <p:sp>
+        <p:nvSpPr>
+          <p:cNvPr id="23" name="Rounded Rectangle 22"/>
           <p:cNvSpPr/>
           <p:nvPr/>
         </p:nvSpPr>
         <p:spPr>
           <a:xfrm>
-            <a:off x="685800" y="4361688"/>
-            <a:ext cx="10835640" cy="731520"/>
+            <a:off x="685800" y="4480560"/>
+            <a:ext cx="10835640" cy="566928"/>
           </a:xfrm>
           <a:prstGeom prst="roundRect">
             <a:avLst>
@@ -27290,14 +27639,14 @@
       </p:sp>
       <p:sp>
         <p:nvSpPr>
-          <p:cNvPr id="20" name="Oval 19"/>
+          <p:cNvPr id="24" name="Oval 23"/>
           <p:cNvSpPr/>
           <p:nvPr/>
         </p:nvSpPr>
         <p:spPr>
           <a:xfrm>
-            <a:off x="914400" y="4471416"/>
-            <a:ext cx="512064" cy="512064"/>
+            <a:off x="914400" y="4535424"/>
+            <a:ext cx="457200" cy="457200"/>
           </a:xfrm>
           <a:prstGeom prst="ellipse">
             <a:avLst/>
@@ -27330,27 +27679,27 @@
           <a:p>
             <a:pPr algn="ctr"/>
             <a:r>
-              <a:rPr sz="1600" b="1">
+              <a:rPr sz="1500" b="1">
                 <a:solidFill>
                   <a:srgbClr val="FFFFFF"/>
                 </a:solidFill>
                 <a:latin typeface="Microsoft JhengHei"/>
               </a:rPr>
-              <a:t>4</a:t>
-            </a:r>
-          </a:p>
-        </p:txBody>
-      </p:sp>
-      <p:sp>
-        <p:nvSpPr>
-          <p:cNvPr id="21" name="TextBox 20"/>
+              <a:t>5</a:t>
+            </a:r>
+          </a:p>
+        </p:txBody>
+      </p:sp>
+      <p:sp>
+        <p:nvSpPr>
+          <p:cNvPr id="25" name="TextBox 24"/>
           <p:cNvSpPr txBox="1"/>
           <p:nvPr/>
         </p:nvSpPr>
         <p:spPr>
           <a:xfrm>
-            <a:off x="1645920" y="4453128"/>
-            <a:ext cx="2377440" cy="548640"/>
+            <a:off x="1572768" y="4526280"/>
+            <a:ext cx="2286000" cy="457200"/>
           </a:xfrm>
           <a:prstGeom prst="rect">
             <a:avLst/>
@@ -27372,7 +27721,7 @@
               </a:spcAft>
             </a:pPr>
             <a:r>
-              <a:rPr sz="1600" b="1" i="0" lang="zh-TW">
+              <a:rPr sz="1500" b="1" i="0" lang="zh-TW">
                 <a:solidFill>
                   <a:srgbClr val="1E293B"/>
                 </a:solidFill>
@@ -27386,14 +27735,14 @@
       </p:sp>
       <p:sp>
         <p:nvSpPr>
-          <p:cNvPr id="22" name="TextBox 21"/>
+          <p:cNvPr id="26" name="TextBox 25"/>
           <p:cNvSpPr txBox="1"/>
           <p:nvPr/>
         </p:nvSpPr>
         <p:spPr>
           <a:xfrm>
-            <a:off x="4206240" y="4453128"/>
-            <a:ext cx="7132320" cy="548640"/>
+            <a:off x="3977639" y="4526280"/>
+            <a:ext cx="7406640" cy="457200"/>
           </a:xfrm>
           <a:prstGeom prst="rect">
             <a:avLst/>
@@ -27415,28 +27764,28 @@
               </a:spcAft>
             </a:pPr>
             <a:r>
-              <a:rPr sz="1400" b="0" i="0" lang="zh-TW">
+              <a:rPr sz="1300" b="0" i="0" lang="zh-TW">
                 <a:solidFill>
                   <a:srgbClr val="1E293B"/>
                 </a:solidFill>
                 <a:latin typeface="Microsoft JhengHei"/>
                 <a:ea typeface="Microsoft JhengHei"/>
               </a:rPr>
-              <a:t>列印空白單發學生；回收填人數，百分比自動算</a:t>
-            </a:r>
-          </a:p>
-        </p:txBody>
-      </p:sp>
-      <p:sp>
-        <p:nvSpPr>
-          <p:cNvPr id="23" name="Rounded Rectangle 22"/>
+              <a:t>列印空白單；回收填人數自動算 %＋勾稽；第 5 題彙整框</a:t>
+            </a:r>
+          </a:p>
+        </p:txBody>
+      </p:sp>
+      <p:sp>
+        <p:nvSpPr>
+          <p:cNvPr id="27" name="Rounded Rectangle 26"/>
           <p:cNvSpPr/>
           <p:nvPr/>
         </p:nvSpPr>
         <p:spPr>
           <a:xfrm>
-            <a:off x="685800" y="5221224"/>
-            <a:ext cx="10835640" cy="731520"/>
+            <a:off x="685800" y="5166360"/>
+            <a:ext cx="10835640" cy="566928"/>
           </a:xfrm>
           <a:prstGeom prst="roundRect">
             <a:avLst>
@@ -27475,14 +27824,14 @@
       </p:sp>
       <p:sp>
         <p:nvSpPr>
-          <p:cNvPr id="24" name="Oval 23"/>
+          <p:cNvPr id="28" name="Oval 27"/>
           <p:cNvSpPr/>
           <p:nvPr/>
         </p:nvSpPr>
         <p:spPr>
           <a:xfrm>
-            <a:off x="914400" y="5330952"/>
-            <a:ext cx="512064" cy="512064"/>
+            <a:off x="914400" y="5221224"/>
+            <a:ext cx="457200" cy="457200"/>
           </a:xfrm>
           <a:prstGeom prst="ellipse">
             <a:avLst/>
@@ -27515,27 +27864,27 @@
           <a:p>
             <a:pPr algn="ctr"/>
             <a:r>
-              <a:rPr sz="1600" b="1">
+              <a:rPr sz="1500" b="1">
                 <a:solidFill>
                   <a:srgbClr val="FFFFFF"/>
                 </a:solidFill>
                 <a:latin typeface="Microsoft JhengHei"/>
               </a:rPr>
-              <a:t>5</a:t>
-            </a:r>
-          </a:p>
-        </p:txBody>
-      </p:sp>
-      <p:sp>
-        <p:nvSpPr>
-          <p:cNvPr id="25" name="TextBox 24"/>
+              <a:t>6</a:t>
+            </a:r>
+          </a:p>
+        </p:txBody>
+      </p:sp>
+      <p:sp>
+        <p:nvSpPr>
+          <p:cNvPr id="29" name="TextBox 28"/>
           <p:cNvSpPr txBox="1"/>
           <p:nvPr/>
         </p:nvSpPr>
         <p:spPr>
           <a:xfrm>
-            <a:off x="1645920" y="5312664"/>
-            <a:ext cx="2377440" cy="548640"/>
+            <a:off x="1572768" y="5212080"/>
+            <a:ext cx="2286000" cy="457200"/>
           </a:xfrm>
           <a:prstGeom prst="rect">
             <a:avLst/>
@@ -27557,7 +27906,7 @@
               </a:spcAft>
             </a:pPr>
             <a:r>
-              <a:rPr sz="1600" b="1" i="0" lang="zh-TW">
+              <a:rPr sz="1500" b="1" i="0" lang="zh-TW">
                 <a:solidFill>
                   <a:srgbClr val="1E293B"/>
                 </a:solidFill>
@@ -27571,14 +27920,14 @@
       </p:sp>
       <p:sp>
         <p:nvSpPr>
-          <p:cNvPr id="26" name="TextBox 25"/>
+          <p:cNvPr id="30" name="TextBox 29"/>
           <p:cNvSpPr txBox="1"/>
           <p:nvPr/>
         </p:nvSpPr>
         <p:spPr>
           <a:xfrm>
-            <a:off x="4206240" y="5312664"/>
-            <a:ext cx="7132320" cy="548640"/>
+            <a:off x="3977639" y="5212080"/>
+            <a:ext cx="7406640" cy="457200"/>
           </a:xfrm>
           <a:prstGeom prst="rect">
             <a:avLst/>
@@ -27600,27 +27949,27 @@
               </a:spcAft>
             </a:pPr>
             <a:r>
-              <a:rPr sz="1400" b="0" i="0" lang="zh-TW">
+              <a:rPr sz="1300" b="0" i="0" lang="zh-TW">
                 <a:solidFill>
                   <a:srgbClr val="1E293B"/>
                 </a:solidFill>
                 <a:latin typeface="Microsoft JhengHei"/>
                 <a:ea typeface="Microsoft JhengHei"/>
               </a:rPr>
-              <a:t>四類登記、上下期自動判別、材料費自動對帳</a:t>
-            </a:r>
-          </a:p>
-        </p:txBody>
-      </p:sp>
-      <p:sp>
-        <p:nvSpPr>
-          <p:cNvPr id="27" name="Rounded Rectangle 26"/>
+              <a:t>四類登記、上下期自動判別、材料費對帳（含整學期）</a:t>
+            </a:r>
+          </a:p>
+        </p:txBody>
+      </p:sp>
+      <p:sp>
+        <p:nvSpPr>
+          <p:cNvPr id="31" name="Rounded Rectangle 30"/>
           <p:cNvSpPr/>
           <p:nvPr/>
         </p:nvSpPr>
         <p:spPr>
           <a:xfrm>
-            <a:off x="685800" y="6080760"/>
+            <a:off x="685800" y="5879592"/>
             <a:ext cx="10835640" cy="685800"/>
           </a:xfrm>
           <a:prstGeom prst="roundRect">
@@ -27660,13 +28009,13 @@
       </p:sp>
       <p:sp>
         <p:nvSpPr>
-          <p:cNvPr id="28" name="TextBox 27"/>
+          <p:cNvPr id="32" name="TextBox 31"/>
           <p:cNvSpPr txBox="1"/>
           <p:nvPr/>
         </p:nvSpPr>
         <p:spPr>
           <a:xfrm>
-            <a:off x="960120" y="6217920"/>
+            <a:off x="960120" y="6016752"/>
             <a:ext cx="10332720" cy="457200"/>
           </a:xfrm>
           <a:prstGeom prst="rect">
@@ -27703,7 +28052,7 @@
       </p:sp>
       <p:sp>
         <p:nvSpPr>
-          <p:cNvPr id="29" name="TextBox 28"/>
+          <p:cNvPr id="33" name="TextBox 32"/>
           <p:cNvSpPr txBox="1"/>
           <p:nvPr/>
         </p:nvSpPr>
@@ -27746,7 +28095,7 @@
       </p:sp>
       <p:sp>
         <p:nvSpPr>
-          <p:cNvPr id="30" name="TextBox 29"/>
+          <p:cNvPr id="34" name="TextBox 33"/>
           <p:cNvSpPr txBox="1"/>
           <p:nvPr/>
         </p:nvSpPr>
@@ -30557,6 +30906,26 @@
                 <a:latin typeface="Microsoft JhengHei"/>
                 <a:ea typeface="Microsoft JhengHei"/>
               </a:rPr>
+              <a:t>・這次先只做「學生回饋單」這一張，其他表先不要做</a:t>
+            </a:r>
+          </a:p>
+          <a:p>
+            <a:pPr algn="l">
+              <a:lnSpc>
+                <a:spcPct val="122000"/>
+              </a:lnSpc>
+              <a:spcAft>
+                <a:spcPts val="400"/>
+              </a:spcAft>
+            </a:pPr>
+            <a:r>
+              <a:rPr sz="1350" b="0" i="0" lang="zh-TW">
+                <a:solidFill>
+                  <a:srgbClr val="1E293B"/>
+                </a:solidFill>
+                <a:latin typeface="Microsoft JhengHei"/>
+                <a:ea typeface="Microsoft JhengHei"/>
+              </a:rPr>
               <a:t>・四題選擇題一題對一個百分比，題目要讓國小三年級看得懂</a:t>
             </a:r>
           </a:p>
@@ -30769,7 +31138,27 @@
                 <a:latin typeface="Microsoft JhengHei"/>
                 <a:ea typeface="Microsoft JhengHei"/>
               </a:rPr>
-              <a:t>2. 掃 QR 或從共用資料夾複製卡片①</a:t>
+              <a:t>2. 開 rlirdo.github.io/yangwang-club-manager/prompts.html</a:t>
+            </a:r>
+          </a:p>
+          <a:p>
+            <a:pPr algn="l">
+              <a:lnSpc>
+                <a:spcPct val="130000"/>
+              </a:lnSpc>
+              <a:spcAft>
+                <a:spcPts val="400"/>
+              </a:spcAft>
+            </a:pPr>
+            <a:r>
+              <a:rPr sz="1400" b="0" i="0" lang="zh-TW">
+                <a:solidFill>
+                  <a:srgbClr val="1E293B"/>
+                </a:solidFill>
+                <a:latin typeface="Microsoft JhengHei"/>
+                <a:ea typeface="Microsoft JhengHei"/>
+              </a:rPr>
+              <a:t>　（或共用資料夾）按「複製」拿卡片①</a:t>
             </a:r>
           </a:p>
           <a:p>

--- a/part2-豐兆/20260819仰望研習主講_從零打造社團管理系統_游豐兆.pptx
+++ b/part2-豐兆/20260819仰望研習主講_從零打造社團管理系統_游豐兆.pptx
@@ -802,7 +802,7 @@
           </a:p>
           <a:p>
             <a:r>
-              <a:t>第二輪，先看一條官方規定：材料費的份數，要和教室日誌上的出席學生數加兩位老師相符。</a:t>
+              <a:t>第二輪，先看一條基金會的核銷實務：材料費的份數，要和教室日誌上的「出席學生數加實際授課教師人數」相符——教師人數不是寫死兩位，是你們學校實際帶課的老師數，系統會讀基本資料實填的指導老師。金額的核算公式也記一下：上課人數加實際授課教師人數，乘主題、乘二百五十元。</a:t>
             </a:r>
           </a:p>
           <a:p>
@@ -812,12 +812,12 @@
           </a:p>
           <a:p>
             <a:r>
-              <a:t>【示範動作：切到系統教室日誌分頁】看一次流程：第三週，點名，十二個出席、兩個請假。下面這行字直接告訴你：出席十二人，加老師兩位，材料費十四份。下週買材料就買十四份，收據開十四份，數字對得整整齊齊。</a:t>
-            </a:r>
-          </a:p>
-          <a:p>
-            <a:r>
-              <a:t>同時系統在背後累計出席率，這就是官方第五項百分比，期末自動出現在總覽，一秒都不用算。點名這個動作每週三十秒，換來的是核銷不退件、出席率不用算。這筆帳很划算。</a:t>
+              <a:t>【示範動作：切到系統教室日誌分頁】看一次流程：第三週，點名，十二個出席、兩個請假。下面這行字直接告訴你：出席十二人，加授課教師兩位（這個示範的學校填了兩位老師），材料費十四份。下週買材料就買十四份，收據開十四份，數字對得整整齊齊。</a:t>
+            </a:r>
+          </a:p>
+          <a:p>
+            <a:r>
+              <a:t>同時系統在背後累計出席率——口徑是定案的：分母是總報名人數，請假、缺席都算在分母裡——這就是官方第五項百分比，期末自動出現在總覽，一秒都不用算。點名這個動作每週三十秒，換來的是核銷不退件、出席率不用算。這筆帳很划算。</a:t>
             </a:r>
           </a:p>
         </p:txBody>
@@ -887,7 +887,12 @@
           <a:lstStyle/>
           <a:p>
             <a:r>
-              <a:t>時間：11:12-11:14（2分半＋紅線30秒）</a:t>
+              <a:t>時間：11:12-11:14（2分半＋紅線與統編30秒）</a:t>
+            </a:r>
+          </a:p>
+          <a:p>
+            <a:r>
+              <a:t>橫幅這行也唸一次：材料費、餐費、茶水費的發票或收據，統編要開基金會的——八二三三九五六三，財團法人仰望教育基金會。開成學校統編就退件重開，這行系統核銷分頁抬頭也印著。</a:t>
             </a:r>
           </a:p>
           <a:p>
@@ -2182,7 +2187,7 @@
           </a:p>
           <a:p>
             <a:r>
-              <a:t>最後一分鐘，講一句真心話。今天大家覺得自己是新手，我查過基金會的公告，上面寫的是「試辦」——今年參與的學校全台大概二十所，通通是第一年。不是你們落後，是這條路大家一起在鋪。而且各位今天已經走在前面了：你們是全台第一批用 AI 把整套社團管理做起來的老師。</a:t>
+              <a:t>最後一分鐘，講一句真心話。今天大家覺得自己是新手，跟大家報一個數字：一一五學年度這個科學社團計畫，全台一共十八所學校參與——花蓮八所、中彰投十所。只有南投有一所學校在上學期試辦過一學期，其他通通是第一年。不是你們落後，是這條路大家一起在鋪。而且各位今天已經走在前面了：你們是全台第一批用 AI 把整套社團管理做起來的老師。</a:t>
             </a:r>
           </a:p>
           <a:p>
@@ -2462,7 +2467,7 @@
           </a:p>
           <a:p>
             <a:r>
-              <a:t>第四，教室日誌。選第一週——注意，進去就已經預設全到，口訣是「先按『全到』，再改掉沒來的」。我把兩個學生改成缺席和請假，看下面這行：本週出席十三人，加老師兩位，材料費十五份。點到一半漏人，它會紅字警告你「還有幾位未點名」。同一頁下面是「本週課程紀錄」：一段文字加照片檔名和圖說，這就是期末報告「參」的素材，有一顆專屬的列印鍵。</a:t>
+              <a:t>第四，教室日誌。選第一週——注意，進去就已經預設全到，口訣是「先按『全到』，再改掉沒來的」。我把兩個學生改成缺席和請假，看下面這行：本週出席十三人，加實際授課教師——系統讀基本資料實填的指導老師數，示範裡是兩位——材料費十五份。順便講口徑：出席率的分母是總報名人數，請假、缺席都算在分母裡。點到一半漏人，它會紅字警告你「還有幾位未點名」。同一頁下面是「本週課程紀錄」：一段文字加照片檔名和圖說，這就是期末報告「參」的素材，有一顆專屬的列印鍵。</a:t>
             </a:r>
           </a:p>
           <a:p>
@@ -2472,7 +2477,7 @@
           </a:p>
           <a:p>
             <a:r>
-              <a:t>第六，經費核銷。抬頭那行紅字先唸一次：身分證字號、戶籍住址、匯款帳號不貼進任何 AI。登記一筆材料費，選對應週次——或選「整學期／未指定」，對帳表會用全期合計去比；上下期它也自動判別。</a:t>
+              <a:t>第六，經費核銷。抬頭那行紅字先唸一次：身分證字號、戶籍住址、匯款帳號不貼進任何 AI。下面印著材料費核算公式：（上課人數＋實際授課教師人數）乘主題乘二百五十元；還有一行粗體：材料費、餐費、茶水費的發票要開基金會統編，八二三三九五六三，財團法人仰望教育基金會。登記一筆材料費，選對應週次——或選「整學期／未指定」，對帳表會用全期合計去比；上下期它也自動判別。</a:t>
             </a:r>
           </a:p>
           <a:p>
@@ -8664,7 +8669,7 @@
                 <a:latin typeface="Microsoft JhengHei"/>
                 <a:ea typeface="Microsoft JhengHei"/>
               </a:rPr>
-              <a:t>出席學生數＋老師 2 位＝材料費份數</a:t>
+              <a:t>出席學生數＋實際授課教師人數＝材料費份數</a:t>
             </a:r>
           </a:p>
         </p:txBody>
@@ -8808,7 +8813,7 @@
                 <a:latin typeface="Microsoft JhengHei"/>
                 <a:ea typeface="Microsoft JhengHei"/>
               </a:rPr>
-              <a:t>官方規定</a:t>
+              <a:t>基金會核銷實務</a:t>
             </a:r>
           </a:p>
         </p:txBody>
@@ -8851,7 +8856,27 @@
                 <a:latin typeface="Microsoft JhengHei"/>
                 <a:ea typeface="Microsoft JhengHei"/>
               </a:rPr>
-              <a:t>材料費的份數，要和教室日誌上的「出席學生數＋兩位老師」相符。</a:t>
+              <a:t>材料費的份數，要和教室日誌上的「出席學生數＋實際授課教師人數」相符。</a:t>
+            </a:r>
+          </a:p>
+          <a:p>
+            <a:pPr algn="l">
+              <a:lnSpc>
+                <a:spcPct val="130000"/>
+              </a:lnSpc>
+              <a:spcAft>
+                <a:spcPts val="400"/>
+              </a:spcAft>
+            </a:pPr>
+            <a:r>
+              <a:rPr sz="1400" b="0" i="0" lang="zh-TW">
+                <a:solidFill>
+                  <a:srgbClr val="64748B"/>
+                </a:solidFill>
+                <a:latin typeface="Microsoft JhengHei"/>
+                <a:ea typeface="Microsoft JhengHei"/>
+              </a:rPr>
+              <a:t>核算公式：（上課人數＋實際授課教師人數）× 主題 × 250 元。</a:t>
             </a:r>
           </a:p>
         </p:txBody>
@@ -9102,14 +9127,14 @@
               </a:spcAft>
             </a:pPr>
             <a:r>
-              <a:rPr sz="2000" b="1" i="0" lang="zh-TW">
+              <a:rPr sz="1900" b="1" i="0" lang="zh-TW">
                 <a:solidFill>
                   <a:srgbClr val="5FA98A"/>
                 </a:solidFill>
                 <a:latin typeface="Microsoft JhengHei"/>
                 <a:ea typeface="Microsoft JhengHei"/>
               </a:rPr>
-              <a:t>＋ 老師 2 位</a:t>
+              <a:t>＋ 授課教師 2 位（實填人數）</a:t>
             </a:r>
           </a:p>
         </p:txBody>
@@ -10153,7 +10178,7 @@
                 <a:latin typeface="Microsoft JhengHei"/>
                 <a:ea typeface="Microsoft JhengHei"/>
               </a:rPr>
-              <a:t>材料費認列「發票上的日期」，份數＝出席＋老師 2 位。</a:t>
+              <a:t>材料費認列「發票上的日期」，份數＝出席＋實際授課教師人數。</a:t>
             </a:r>
           </a:p>
         </p:txBody>
@@ -10348,7 +10373,7 @@
                 <a:latin typeface="Microsoft JhengHei"/>
                 <a:ea typeface="Microsoft JhengHei"/>
               </a:rPr>
-              <a:t>系統的「經費核銷」分頁抬頭印著同一句紅線，並內建：上下期自動判別、材料費自動對帳（含整學期）。</a:t>
+              <a:t>發票統編：材料費、餐費、茶水費開立 82339563 財團法人仰望教育基金會——系統核銷分頁印著這行與紅線。</a:t>
             </a:r>
           </a:p>
         </p:txBody>
@@ -19455,7 +19480,7 @@
                 <a:latin typeface="Microsoft JhengHei"/>
                 <a:ea typeface="Microsoft JhengHei"/>
               </a:rPr>
-              <a:t>3. 材料費份數的規則（出席＋老師2位）有沒有地方會對不起來？</a:t>
+              <a:t>3. 材料費份數的規則（出席＋實際授課教師人數）有沒有地方會對不起來？</a:t>
             </a:r>
           </a:p>
           <a:p>
@@ -23777,7 +23802,7 @@
                 <a:latin typeface="Microsoft JhengHei"/>
                 <a:ea typeface="Microsoft JhengHei"/>
               </a:rPr>
-              <a:t>今年大概二十所學校，全部都是第一年，這條路大家一起鋪。</a:t>
+              <a:t>115 學年度全台 18 校一起開跑，這條路大家一起鋪。</a:t>
             </a:r>
           </a:p>
         </p:txBody>
@@ -27586,7 +27611,7 @@
                 <a:latin typeface="Microsoft JhengHei"/>
                 <a:ea typeface="Microsoft JhengHei"/>
               </a:rPr>
-              <a:t>進去就預設全到，改掉沒來的；出席＋老師2＝材料費；本週課程紀錄（參）</a:t>
+              <a:t>進去就預設全到，改掉沒來的；出席＋授課教師＝材料費；本週課程紀錄（參）</a:t>
             </a:r>
           </a:p>
         </p:txBody>

--- a/part2-豐兆/20260819仰望研習主講_從零打造社團管理系統_游豐兆.pptx
+++ b/part2-豐兆/20260819仰望研習主講_從零打造社團管理系統_游豐兆.pptx
@@ -722,7 +722,7 @@
           </a:p>
           <a:p>
             <a:r>
-              <a:t>好，恭喜各位，你們剛剛完成了一件事：從零開始，用兩個 AI 接力，做出一份你們學校自己的、直接對到官方百分比的回饋單。開學第一堂課就發下去，期末那四個數字就有著落了。</a:t>
+              <a:t>好，恭喜各位，你們剛剛完成了一件事：從零開始，用兩個 AI 接力，做出一份你們學校自己的、直接對到官方百分比的回饋單。這張單子開學前先印好放進社團資料夾。真正發給學生、當場收回，是期末最後一兩堂課。今天先把題目做對，六月才填得出那四個百分比。</a:t>
             </a:r>
           </a:p>
           <a:p>
